--- a/Modules/03-Data-Architect/projects/Project 4 - SneakerPark Data Governance/report/sneakerpark_data_governance.pptx
+++ b/Modules/03-Data-Architect/projects/Project 4 - SneakerPark Data Governance/report/sneakerpark_data_governance.pptx
@@ -297,12 +297,20 @@
 </p:presentation>
 </file>
 
+<file path=ppt/revisionInfo.xml><?xml version="1.0" encoding="utf-8"?>
+<p1510:revInfo xmlns:a="http://schemas.openxmlformats.org/drawingml/2006/main" xmlns:r="http://schemas.openxmlformats.org/officeDocument/2006/relationships" xmlns:p1510="http://schemas.microsoft.com/office/powerpoint/2015/10/main">
+  <p1510:revLst>
+    <p1510:client id="{7C95B268-E689-48BE-B304-A84222016C49}" v="4" dt="2026-05-30T04:38:08.073"/>
+  </p1510:revLst>
+</p1510:revInfo>
+</file>
+
 <file path=ppt/changesInfos/changesInfo1.xml><?xml version="1.0" encoding="utf-8"?>
 <pc:chgInfo xmlns:a="http://schemas.openxmlformats.org/drawingml/2006/main" xmlns:r="http://schemas.openxmlformats.org/officeDocument/2006/relationships" xmlns:ac="http://schemas.microsoft.com/office/drawing/2013/main/command" xmlns:pc="http://schemas.microsoft.com/office/powerpoint/2013/main/command">
   <pc:docChgLst>
     <pc:chgData name="ARJUN AVALAKKI MOHAN" userId="be4ab9aaf12c5868" providerId="LiveId" clId="{C81E60EF-EF5F-4B4B-A4E1-3178676F15CC}"/>
     <pc:docChg chg="custSel modSld">
-      <pc:chgData name="ARJUN AVALAKKI MOHAN" userId="be4ab9aaf12c5868" providerId="LiveId" clId="{C81E60EF-EF5F-4B4B-A4E1-3178676F15CC}" dt="2026-05-27T04:15:22.659" v="86" actId="255"/>
+      <pc:chgData name="ARJUN AVALAKKI MOHAN" userId="be4ab9aaf12c5868" providerId="LiveId" clId="{C81E60EF-EF5F-4B4B-A4E1-3178676F15CC}" dt="2026-05-30T05:21:17.104" v="116" actId="1076"/>
       <pc:docMkLst>
         <pc:docMk/>
       </pc:docMkLst>
@@ -343,12 +351,75 @@
             <ac:picMk id="3" creationId="{741A04ED-7421-9AB8-1581-89CCD9D747C2}"/>
           </ac:picMkLst>
         </pc:picChg>
-        <pc:picChg chg="del">
-          <ac:chgData name="ARJUN AVALAKKI MOHAN" userId="be4ab9aaf12c5868" providerId="LiveId" clId="{C81E60EF-EF5F-4B4B-A4E1-3178676F15CC}" dt="2026-05-27T04:12:44.865" v="30" actId="478"/>
+      </pc:sldChg>
+      <pc:sldChg chg="addSp delSp modSp mod modNotes">
+        <pc:chgData name="ARJUN AVALAKKI MOHAN" userId="be4ab9aaf12c5868" providerId="LiveId" clId="{C81E60EF-EF5F-4B4B-A4E1-3178676F15CC}" dt="2026-05-30T05:21:17.104" v="116" actId="1076"/>
+        <pc:sldMkLst>
+          <pc:docMk/>
+          <pc:sldMk cId="0" sldId="269"/>
+        </pc:sldMkLst>
+        <pc:spChg chg="add mod">
+          <ac:chgData name="ARJUN AVALAKKI MOHAN" userId="be4ab9aaf12c5868" providerId="LiveId" clId="{C81E60EF-EF5F-4B4B-A4E1-3178676F15CC}" dt="2026-05-30T05:21:17.104" v="116" actId="1076"/>
+          <ac:spMkLst>
+            <pc:docMk/>
+            <pc:sldMk cId="0" sldId="269"/>
+            <ac:spMk id="5" creationId="{E9E3B61F-17F6-2188-6589-BFE74ADDC4CB}"/>
+          </ac:spMkLst>
+        </pc:spChg>
+        <pc:spChg chg="add del mod">
+          <ac:chgData name="ARJUN AVALAKKI MOHAN" userId="be4ab9aaf12c5868" providerId="LiveId" clId="{C81E60EF-EF5F-4B4B-A4E1-3178676F15CC}" dt="2026-05-30T05:12:37.083" v="108" actId="478"/>
+          <ac:spMkLst>
+            <pc:docMk/>
+            <pc:sldMk cId="0" sldId="269"/>
+            <ac:spMk id="9" creationId="{44E5A8F0-9DBB-2D8F-FCF1-B8CFE8D39FA9}"/>
+          </ac:spMkLst>
+        </pc:spChg>
+        <pc:spChg chg="del mod">
+          <ac:chgData name="ARJUN AVALAKKI MOHAN" userId="be4ab9aaf12c5868" providerId="LiveId" clId="{C81E60EF-EF5F-4B4B-A4E1-3178676F15CC}" dt="2026-05-30T05:12:25.783" v="107" actId="478"/>
+          <ac:spMkLst>
+            <pc:docMk/>
+            <pc:sldMk cId="0" sldId="269"/>
+            <ac:spMk id="263" creationId="{00000000-0000-0000-0000-000000000000}"/>
+          </ac:spMkLst>
+        </pc:spChg>
+        <pc:graphicFrameChg chg="add mod">
+          <ac:chgData name="ARJUN AVALAKKI MOHAN" userId="be4ab9aaf12c5868" providerId="LiveId" clId="{C81E60EF-EF5F-4B4B-A4E1-3178676F15CC}" dt="2026-05-30T04:35:30.336" v="87"/>
+          <ac:graphicFrameMkLst>
+            <pc:docMk/>
+            <pc:sldMk cId="0" sldId="269"/>
+            <ac:graphicFrameMk id="2" creationId="{9E67940D-03B4-72A6-64F7-374CF3171A3A}"/>
+          </ac:graphicFrameMkLst>
+        </pc:graphicFrameChg>
+        <pc:graphicFrameChg chg="add del mod modGraphic">
+          <ac:chgData name="ARJUN AVALAKKI MOHAN" userId="be4ab9aaf12c5868" providerId="LiveId" clId="{C81E60EF-EF5F-4B4B-A4E1-3178676F15CC}" dt="2026-05-30T05:06:01.103" v="101" actId="478"/>
+          <ac:graphicFrameMkLst>
+            <pc:docMk/>
+            <pc:sldMk cId="0" sldId="269"/>
+            <ac:graphicFrameMk id="3" creationId="{A2C332E5-9F90-BECA-6D0F-1750E9108B99}"/>
+          </ac:graphicFrameMkLst>
+        </pc:graphicFrameChg>
+        <pc:picChg chg="add del mod">
+          <ac:chgData name="ARJUN AVALAKKI MOHAN" userId="be4ab9aaf12c5868" providerId="LiveId" clId="{C81E60EF-EF5F-4B4B-A4E1-3178676F15CC}" dt="2026-05-30T05:20:58.843" v="113" actId="478"/>
           <ac:picMkLst>
             <pc:docMk/>
-            <pc:sldMk cId="0" sldId="263"/>
-            <ac:picMk id="230" creationId="{00000000-0000-0000-0000-000000000000}"/>
+            <pc:sldMk cId="0" sldId="269"/>
+            <ac:picMk id="7" creationId="{F393F1FE-966A-652D-914B-8E2E10EF4F54}"/>
+          </ac:picMkLst>
+        </pc:picChg>
+        <pc:picChg chg="add mod">
+          <ac:chgData name="ARJUN AVALAKKI MOHAN" userId="be4ab9aaf12c5868" providerId="LiveId" clId="{C81E60EF-EF5F-4B4B-A4E1-3178676F15CC}" dt="2026-05-30T05:21:12.090" v="115" actId="1076"/>
+          <ac:picMkLst>
+            <pc:docMk/>
+            <pc:sldMk cId="0" sldId="269"/>
+            <ac:picMk id="11" creationId="{3AA77A95-45AE-5456-1B90-9CC748EF794E}"/>
+          </ac:picMkLst>
+        </pc:picChg>
+        <pc:picChg chg="del">
+          <ac:chgData name="ARJUN AVALAKKI MOHAN" userId="be4ab9aaf12c5868" providerId="LiveId" clId="{C81E60EF-EF5F-4B4B-A4E1-3178676F15CC}" dt="2026-05-30T04:38:00.047" v="94" actId="478"/>
+          <ac:picMkLst>
+            <pc:docMk/>
+            <pc:sldMk cId="0" sldId="269"/>
+            <ac:picMk id="264" creationId="{00000000-0000-0000-0000-000000000000}"/>
           </ac:picMkLst>
         </pc:picChg>
       </pc:sldChg>
@@ -1355,8 +1426,8 @@
         </p:nvSpPr>
         <p:spPr>
           <a:xfrm>
-            <a:off x="2104459" y="685800"/>
-            <a:ext cx="2649600" cy="3429000"/>
+            <a:off x="2105025" y="685800"/>
+            <a:ext cx="2649538" cy="3429000"/>
           </a:xfrm>
           <a:custGeom>
             <a:avLst/>
@@ -28253,296 +28324,75 @@
       </p:grpSpPr>
       <p:sp>
         <p:nvSpPr>
-          <p:cNvPr id="263" name="Google Shape;263;p64"/>
-          <p:cNvSpPr txBox="1">
-            <a:spLocks noGrp="1"/>
-          </p:cNvSpPr>
-          <p:nvPr>
-            <p:ph type="body" idx="1"/>
-          </p:nvPr>
+          <p:cNvPr id="5" name="TextBox 4">
+            <a:extLst>
+              <a:ext uri="{FF2B5EF4-FFF2-40B4-BE49-F238E27FC236}">
+                <a16:creationId xmlns:a16="http://schemas.microsoft.com/office/drawing/2014/main" id="{E9E3B61F-17F6-2188-6589-BFE74ADDC4CB}"/>
+              </a:ext>
+            </a:extLst>
+          </p:cNvPr>
+          <p:cNvSpPr txBox="1"/>
+          <p:nvPr/>
         </p:nvSpPr>
         <p:spPr>
           <a:xfrm>
-            <a:off x="369675" y="695675"/>
-            <a:ext cx="6914100" cy="1371300"/>
+            <a:off x="189984" y="6705990"/>
+            <a:ext cx="7335274" cy="1600438"/>
           </a:xfrm>
           <a:prstGeom prst="rect">
             <a:avLst/>
           </a:prstGeom>
+          <a:noFill/>
         </p:spPr>
         <p:txBody>
-          <a:bodyPr spcFirstLastPara="1" wrap="square" lIns="91425" tIns="91425" rIns="91425" bIns="91425" anchor="t" anchorCtr="0">
-            <a:noAutofit/>
+          <a:bodyPr wrap="square">
+            <a:spAutoFit/>
           </a:bodyPr>
           <a:lstStyle/>
           <a:p>
-            <a:pPr marL="0" lvl="0" indent="0" algn="l" rtl="0">
-              <a:lnSpc>
-                <a:spcPct val="170000"/>
-              </a:lnSpc>
-              <a:spcBef>
-                <a:spcPts val="0"/>
-              </a:spcBef>
-              <a:spcAft>
-                <a:spcPts val="0"/>
-              </a:spcAft>
-              <a:buClr>
-                <a:schemeClr val="dk1"/>
-              </a:buClr>
-              <a:buSzPts val="1100"/>
-              <a:buFont typeface="Arial"/>
-              <a:buNone/>
-            </a:pPr>
             <a:r>
-              <a:rPr lang="en" sz="1600">
-                <a:solidFill>
-                  <a:srgbClr val="525C65"/>
-                </a:solidFill>
-                <a:highlight>
-                  <a:srgbClr val="FFFFFF"/>
-                </a:highlight>
-                <a:latin typeface="Open Sans"/>
-                <a:ea typeface="Open Sans"/>
-                <a:cs typeface="Open Sans"/>
-                <a:sym typeface="Open Sans"/>
-              </a:rPr>
-              <a:t>Using the metrics you've created in the last step, please create a mock-up of a data quality </a:t>
+              <a:rPr lang="en-GB" dirty="0"/>
+              <a:t>The dashboard highlights data quality issues identified during profiling of the </a:t>
             </a:r>
             <a:r>
-              <a:rPr lang="en" sz="1600" b="1">
-                <a:solidFill>
-                  <a:srgbClr val="525C65"/>
-                </a:solidFill>
-                <a:highlight>
-                  <a:srgbClr val="FFFFFF"/>
-                </a:highlight>
-                <a:latin typeface="Open Sans"/>
-                <a:ea typeface="Open Sans"/>
-                <a:cs typeface="Open Sans"/>
-                <a:sym typeface="Open Sans"/>
-              </a:rPr>
-              <a:t>monitoring dashboard</a:t>
+              <a:rPr lang="en-GB" dirty="0" err="1"/>
+              <a:t>SneakerPark</a:t>
             </a:r>
             <a:r>
-              <a:rPr lang="en" sz="1600">
-                <a:solidFill>
-                  <a:srgbClr val="525C65"/>
-                </a:solidFill>
-                <a:highlight>
-                  <a:srgbClr val="FFFFFF"/>
-                </a:highlight>
-                <a:latin typeface="Open Sans"/>
-                <a:ea typeface="Open Sans"/>
-                <a:cs typeface="Open Sans"/>
-                <a:sym typeface="Open Sans"/>
-              </a:rPr>
-              <a:t> that will be used to monitor the data to ensure compliance with your data quality rules.</a:t>
+              <a:rPr lang="en-GB" dirty="0"/>
+              <a:t> data. The most significant issues are invalid customer email addresses and inconsistencies between listing information and inventory item data. Missing shipping addresses were identified in a smaller number of order records. While no duplicate customer accounts were found in the current dataset, this remains a foreseeable future risk as the business continues to grow. These metrics should be monitored regularly to ensure compliance with data quality rules and to support future Master Data Management initiatives.</a:t>
             </a:r>
-            <a:endParaRPr sz="1600">
-              <a:solidFill>
-                <a:srgbClr val="525C65"/>
-              </a:solidFill>
-              <a:highlight>
-                <a:srgbClr val="FFFFFF"/>
-              </a:highlight>
-              <a:latin typeface="Open Sans"/>
-              <a:ea typeface="Open Sans"/>
-              <a:cs typeface="Open Sans"/>
-              <a:sym typeface="Open Sans"/>
-            </a:endParaRPr>
-          </a:p>
-          <a:p>
-            <a:pPr marL="0" lvl="0" indent="0" algn="l" rtl="0">
-              <a:lnSpc>
-                <a:spcPct val="170000"/>
-              </a:lnSpc>
-              <a:spcBef>
-                <a:spcPts val="1100"/>
-              </a:spcBef>
-              <a:spcAft>
-                <a:spcPts val="0"/>
-              </a:spcAft>
-              <a:buNone/>
-            </a:pPr>
-            <a:r>
-              <a:rPr lang="en" sz="1600">
-                <a:solidFill>
-                  <a:srgbClr val="525C65"/>
-                </a:solidFill>
-                <a:highlight>
-                  <a:srgbClr val="FFFFFF"/>
-                </a:highlight>
-                <a:latin typeface="Open Sans"/>
-                <a:ea typeface="Open Sans"/>
-                <a:cs typeface="Open Sans"/>
-                <a:sym typeface="Open Sans"/>
-              </a:rPr>
-              <a:t>Please </a:t>
-            </a:r>
-            <a:r>
-              <a:rPr lang="en" sz="1600" b="1">
-                <a:solidFill>
-                  <a:srgbClr val="525C65"/>
-                </a:solidFill>
-                <a:highlight>
-                  <a:srgbClr val="FFFFFF"/>
-                </a:highlight>
-                <a:latin typeface="Open Sans"/>
-                <a:ea typeface="Open Sans"/>
-                <a:cs typeface="Open Sans"/>
-                <a:sym typeface="Open Sans"/>
-              </a:rPr>
-              <a:t>make sure to label your metrics clearly</a:t>
-            </a:r>
-            <a:r>
-              <a:rPr lang="en" sz="1600">
-                <a:solidFill>
-                  <a:srgbClr val="525C65"/>
-                </a:solidFill>
-                <a:highlight>
-                  <a:srgbClr val="FFFFFF"/>
-                </a:highlight>
-                <a:latin typeface="Open Sans"/>
-                <a:ea typeface="Open Sans"/>
-                <a:cs typeface="Open Sans"/>
-                <a:sym typeface="Open Sans"/>
-              </a:rPr>
-              <a:t> on your mock-up.</a:t>
-            </a:r>
-            <a:endParaRPr sz="1600">
-              <a:solidFill>
-                <a:srgbClr val="525C65"/>
-              </a:solidFill>
-              <a:highlight>
-                <a:srgbClr val="FFFFFF"/>
-              </a:highlight>
-              <a:latin typeface="Open Sans"/>
-              <a:ea typeface="Open Sans"/>
-              <a:cs typeface="Open Sans"/>
-              <a:sym typeface="Open Sans"/>
-            </a:endParaRPr>
-          </a:p>
-          <a:p>
-            <a:pPr marL="0" lvl="0" indent="0" algn="l" rtl="0">
-              <a:lnSpc>
-                <a:spcPct val="170000"/>
-              </a:lnSpc>
-              <a:spcBef>
-                <a:spcPts val="1100"/>
-              </a:spcBef>
-              <a:spcAft>
-                <a:spcPts val="0"/>
-              </a:spcAft>
-              <a:buNone/>
-            </a:pPr>
-            <a:endParaRPr sz="1600">
-              <a:solidFill>
-                <a:srgbClr val="525C65"/>
-              </a:solidFill>
-              <a:highlight>
-                <a:srgbClr val="FFFFFF"/>
-              </a:highlight>
-              <a:latin typeface="Open Sans"/>
-              <a:ea typeface="Open Sans"/>
-              <a:cs typeface="Open Sans"/>
-              <a:sym typeface="Open Sans"/>
-            </a:endParaRPr>
-          </a:p>
-          <a:p>
-            <a:pPr marL="0" lvl="0" indent="0" algn="l" rtl="0">
-              <a:lnSpc>
-                <a:spcPct val="170000"/>
-              </a:lnSpc>
-              <a:spcBef>
-                <a:spcPts val="1100"/>
-              </a:spcBef>
-              <a:spcAft>
-                <a:spcPts val="0"/>
-              </a:spcAft>
-              <a:buNone/>
-            </a:pPr>
-            <a:r>
-              <a:rPr lang="en" sz="1600" b="1">
-                <a:solidFill>
-                  <a:srgbClr val="525C65"/>
-                </a:solidFill>
-                <a:highlight>
-                  <a:schemeClr val="lt1"/>
-                </a:highlight>
-                <a:latin typeface="Open Sans"/>
-                <a:ea typeface="Open Sans"/>
-                <a:cs typeface="Open Sans"/>
-                <a:sym typeface="Open Sans"/>
-              </a:rPr>
-              <a:t>Replace the example dashboard below with your own. (obviously feel free to take more space).</a:t>
-            </a:r>
-            <a:endParaRPr sz="1600">
-              <a:solidFill>
-                <a:srgbClr val="525C65"/>
-              </a:solidFill>
-              <a:highlight>
-                <a:schemeClr val="lt1"/>
-              </a:highlight>
-              <a:latin typeface="Open Sans"/>
-              <a:ea typeface="Open Sans"/>
-              <a:cs typeface="Open Sans"/>
-              <a:sym typeface="Open Sans"/>
-            </a:endParaRPr>
-          </a:p>
-          <a:p>
-            <a:pPr marL="0" lvl="0" indent="0" algn="l" rtl="0">
-              <a:lnSpc>
-                <a:spcPct val="170000"/>
-              </a:lnSpc>
-              <a:spcBef>
-                <a:spcPts val="1100"/>
-              </a:spcBef>
-              <a:spcAft>
-                <a:spcPts val="1100"/>
-              </a:spcAft>
-              <a:buNone/>
-            </a:pPr>
-            <a:endParaRPr sz="1600">
-              <a:solidFill>
-                <a:srgbClr val="525C65"/>
-              </a:solidFill>
-              <a:highlight>
-                <a:srgbClr val="FFFFFF"/>
-              </a:highlight>
-              <a:latin typeface="Open Sans"/>
-              <a:ea typeface="Open Sans"/>
-              <a:cs typeface="Open Sans"/>
-              <a:sym typeface="Open Sans"/>
-            </a:endParaRPr>
           </a:p>
         </p:txBody>
       </p:sp>
       <p:pic>
         <p:nvPicPr>
-          <p:cNvPr id="264" name="Google Shape;264;p64"/>
-          <p:cNvPicPr preferRelativeResize="0"/>
+          <p:cNvPr id="11" name="Picture 10">
+            <a:extLst>
+              <a:ext uri="{FF2B5EF4-FFF2-40B4-BE49-F238E27FC236}">
+                <a16:creationId xmlns:a16="http://schemas.microsoft.com/office/drawing/2014/main" id="{3AA77A95-45AE-5456-1B90-9CC748EF794E}"/>
+              </a:ext>
+            </a:extLst>
+          </p:cNvPr>
+          <p:cNvPicPr>
+            <a:picLocks noChangeAspect="1"/>
+          </p:cNvPicPr>
           <p:nvPr/>
         </p:nvPicPr>
         <p:blipFill>
-          <a:blip r:embed="rId3">
-            <a:alphaModFix/>
-          </a:blip>
+          <a:blip r:embed="rId3"/>
           <a:stretch>
             <a:fillRect/>
           </a:stretch>
         </p:blipFill>
         <p:spPr>
           <a:xfrm>
-            <a:off x="369675" y="4848275"/>
-            <a:ext cx="6914099" cy="3782718"/>
+            <a:off x="189984" y="398349"/>
+            <a:ext cx="7363853" cy="5925377"/>
           </a:xfrm>
           <a:prstGeom prst="rect">
             <a:avLst/>
           </a:prstGeom>
-          <a:noFill/>
-          <a:ln>
-            <a:noFill/>
-          </a:ln>
         </p:spPr>
       </p:pic>
     </p:spTree>
@@ -28839,7 +28689,7 @@
               <a:buNone/>
             </a:pPr>
             <a:r>
-              <a:rPr lang="en" sz="1600">
+              <a:rPr lang="en" sz="1600" dirty="0">
                 <a:solidFill>
                   <a:srgbClr val="525C65"/>
                 </a:solidFill>
@@ -28854,7 +28704,7 @@
               <a:t>Based on what you’ve read about SneakerPark’s systems and business model, sketch out a proposed </a:t>
             </a:r>
             <a:r>
-              <a:rPr lang="en" sz="1600" b="1">
+              <a:rPr lang="en" sz="1600" b="1" dirty="0">
                 <a:solidFill>
                   <a:srgbClr val="525C65"/>
                 </a:solidFill>
@@ -28869,7 +28719,7 @@
               <a:t>MDM implementation architecture</a:t>
             </a:r>
             <a:r>
-              <a:rPr lang="en" sz="1600">
+              <a:rPr lang="en" sz="1600" dirty="0">
                 <a:solidFill>
                   <a:srgbClr val="525C65"/>
                 </a:solidFill>
@@ -28884,7 +28734,7 @@
               <a:t>, and write a </a:t>
             </a:r>
             <a:r>
-              <a:rPr lang="en" sz="1600" b="1">
+              <a:rPr lang="en" sz="1600" b="1" dirty="0">
                 <a:solidFill>
                   <a:srgbClr val="525C65"/>
                 </a:solidFill>
@@ -28899,7 +28749,7 @@
               <a:t>detailed explanation</a:t>
             </a:r>
             <a:r>
-              <a:rPr lang="en" sz="1600">
+              <a:rPr lang="en" sz="1600" dirty="0">
                 <a:solidFill>
                   <a:srgbClr val="525C65"/>
                 </a:solidFill>
@@ -28914,7 +28764,7 @@
               <a:t> of </a:t>
             </a:r>
             <a:r>
-              <a:rPr lang="en" sz="1600" b="1">
+              <a:rPr lang="en" sz="1600" b="1" dirty="0">
                 <a:solidFill>
                   <a:srgbClr val="525C65"/>
                 </a:solidFill>
@@ -28929,7 +28779,7 @@
               <a:t>why</a:t>
             </a:r>
             <a:r>
-              <a:rPr lang="en" sz="1600">
+              <a:rPr lang="en" sz="1600" dirty="0">
                 <a:solidFill>
                   <a:srgbClr val="525C65"/>
                 </a:solidFill>
@@ -28943,7 +28793,7 @@
               </a:rPr>
               <a:t> you chose this specific approach.</a:t>
             </a:r>
-            <a:endParaRPr sz="1600">
+            <a:endParaRPr sz="1600" dirty="0">
               <a:solidFill>
                 <a:srgbClr val="525C65"/>
               </a:solidFill>
@@ -28970,7 +28820,7 @@
               <a:buNone/>
             </a:pPr>
             <a:r>
-              <a:rPr lang="en" sz="1600" b="1">
+              <a:rPr lang="en" sz="1600" b="1" dirty="0">
                 <a:solidFill>
                   <a:srgbClr val="525C65"/>
                 </a:solidFill>
@@ -28985,7 +28835,7 @@
               <a:t>Tip:</a:t>
             </a:r>
             <a:r>
-              <a:rPr lang="en" sz="1600">
+              <a:rPr lang="en" sz="1600" dirty="0">
                 <a:solidFill>
                   <a:srgbClr val="525C65"/>
                 </a:solidFill>
@@ -28999,7 +28849,7 @@
               </a:rPr>
               <a:t> Think about how your plan and its implementation might affect existing systems.</a:t>
             </a:r>
-            <a:endParaRPr sz="1600">
+            <a:endParaRPr sz="1600" dirty="0">
               <a:solidFill>
                 <a:srgbClr val="525C65"/>
               </a:solidFill>
@@ -29023,7 +28873,7 @@
               <a:buNone/>
             </a:pPr>
             <a:r>
-              <a:rPr lang="en" sz="1600" b="1">
+              <a:rPr lang="en" sz="1600" b="1" dirty="0">
                 <a:solidFill>
                   <a:srgbClr val="525C65"/>
                 </a:solidFill>
@@ -29037,7 +28887,7 @@
               </a:rPr>
               <a:t>Replace example screenshot below with your own solutions (obviously feel free to take more space). </a:t>
             </a:r>
-            <a:endParaRPr sz="1600" b="1">
+            <a:endParaRPr sz="1600" b="1" dirty="0">
               <a:solidFill>
                 <a:srgbClr val="525C65"/>
               </a:solidFill>
@@ -29061,7 +28911,7 @@
               <a:buNone/>
             </a:pPr>
             <a:r>
-              <a:rPr lang="en" sz="1600" b="1">
+              <a:rPr lang="en" sz="1600" b="1" dirty="0">
                 <a:solidFill>
                   <a:srgbClr val="525C65"/>
                 </a:solidFill>
@@ -29075,7 +28925,7 @@
               </a:rPr>
               <a:t>Next, please write at least a paragraph explaining  your choice.</a:t>
             </a:r>
-            <a:endParaRPr sz="1600">
+            <a:endParaRPr sz="1600" dirty="0">
               <a:solidFill>
                 <a:srgbClr val="525C65"/>
               </a:solidFill>
@@ -29101,7 +28951,7 @@
               </a:spcAft>
               <a:buNone/>
             </a:pPr>
-            <a:endParaRPr sz="1600">
+            <a:endParaRPr sz="1600" dirty="0">
               <a:solidFill>
                 <a:srgbClr val="525C65"/>
               </a:solidFill>
@@ -29127,7 +28977,7 @@
               </a:spcAft>
               <a:buNone/>
             </a:pPr>
-            <a:endParaRPr sz="1600">
+            <a:endParaRPr sz="1600" dirty="0">
               <a:solidFill>
                 <a:srgbClr val="525C65"/>
               </a:solidFill>
@@ -29153,7 +29003,7 @@
               </a:spcAft>
               <a:buNone/>
             </a:pPr>
-            <a:endParaRPr sz="1600">
+            <a:endParaRPr sz="1600" dirty="0">
               <a:solidFill>
                 <a:srgbClr val="525C65"/>
               </a:solidFill>
@@ -29179,7 +29029,7 @@
               </a:spcAft>
               <a:buNone/>
             </a:pPr>
-            <a:endParaRPr sz="1600">
+            <a:endParaRPr sz="1600" dirty="0">
               <a:solidFill>
                 <a:srgbClr val="525C65"/>
               </a:solidFill>
@@ -29205,7 +29055,7 @@
               </a:spcAft>
               <a:buNone/>
             </a:pPr>
-            <a:endParaRPr sz="1600">
+            <a:endParaRPr sz="1600" dirty="0">
               <a:solidFill>
                 <a:srgbClr val="525C65"/>
               </a:solidFill>
@@ -29236,7 +29086,7 @@
               <a:buFont typeface="Arial"/>
               <a:buNone/>
             </a:pPr>
-            <a:endParaRPr sz="1400">
+            <a:endParaRPr sz="1400" dirty="0">
               <a:solidFill>
                 <a:srgbClr val="525C65"/>
               </a:solidFill>
@@ -29267,7 +29117,7 @@
               <a:buFont typeface="Arial"/>
               <a:buNone/>
             </a:pPr>
-            <a:endParaRPr sz="1600">
+            <a:endParaRPr sz="1600" dirty="0">
               <a:solidFill>
                 <a:srgbClr val="525C65"/>
               </a:solidFill>
@@ -29290,7 +29140,7 @@
               </a:spcAft>
               <a:buNone/>
             </a:pPr>
-            <a:endParaRPr sz="1600">
+            <a:endParaRPr sz="1600" dirty="0">
               <a:solidFill>
                 <a:srgbClr val="525C65"/>
               </a:solidFill>
@@ -29313,7 +29163,7 @@
               </a:spcAft>
               <a:buNone/>
             </a:pPr>
-            <a:endParaRPr sz="1600">
+            <a:endParaRPr sz="1600" dirty="0">
               <a:solidFill>
                 <a:srgbClr val="525C65"/>
               </a:solidFill>
@@ -29336,7 +29186,7 @@
               </a:spcAft>
               <a:buNone/>
             </a:pPr>
-            <a:endParaRPr sz="1600">
+            <a:endParaRPr sz="1600" dirty="0">
               <a:solidFill>
                 <a:srgbClr val="525C65"/>
               </a:solidFill>

--- a/Modules/03-Data-Architect/projects/Project 4 - SneakerPark Data Governance/report/sneakerpark_data_governance.pptx
+++ b/Modules/03-Data-Architect/projects/Project 4 - SneakerPark Data Governance/report/sneakerpark_data_governance.pptx
@@ -300,7 +300,7 @@
 <file path=ppt/revisionInfo.xml><?xml version="1.0" encoding="utf-8"?>
 <p1510:revInfo xmlns:a="http://schemas.openxmlformats.org/drawingml/2006/main" xmlns:r="http://schemas.openxmlformats.org/officeDocument/2006/relationships" xmlns:p1510="http://schemas.microsoft.com/office/powerpoint/2015/10/main">
   <p1510:revLst>
-    <p1510:client id="{7C95B268-E689-48BE-B304-A84222016C49}" v="4" dt="2026-05-30T04:38:08.073"/>
+    <p1510:client id="{7C95B268-E689-48BE-B304-A84222016C49}" v="12" dt="2026-06-01T05:32:44.556"/>
   </p1510:revLst>
 </p1510:revInfo>
 </file>
@@ -310,7 +310,7 @@
   <pc:docChgLst>
     <pc:chgData name="ARJUN AVALAKKI MOHAN" userId="be4ab9aaf12c5868" providerId="LiveId" clId="{C81E60EF-EF5F-4B4B-A4E1-3178676F15CC}"/>
     <pc:docChg chg="custSel modSld">
-      <pc:chgData name="ARJUN AVALAKKI MOHAN" userId="be4ab9aaf12c5868" providerId="LiveId" clId="{C81E60EF-EF5F-4B4B-A4E1-3178676F15CC}" dt="2026-05-30T05:21:17.104" v="116" actId="1076"/>
+      <pc:chgData name="ARJUN AVALAKKI MOHAN" userId="be4ab9aaf12c5868" providerId="LiveId" clId="{C81E60EF-EF5F-4B4B-A4E1-3178676F15CC}" dt="2026-06-01T07:19:11.880" v="167" actId="1076"/>
       <pc:docMkLst>
         <pc:docMk/>
       </pc:docMkLst>
@@ -353,73 +353,104 @@
         </pc:picChg>
       </pc:sldChg>
       <pc:sldChg chg="addSp delSp modSp mod modNotes">
-        <pc:chgData name="ARJUN AVALAKKI MOHAN" userId="be4ab9aaf12c5868" providerId="LiveId" clId="{C81E60EF-EF5F-4B4B-A4E1-3178676F15CC}" dt="2026-05-30T05:21:17.104" v="116" actId="1076"/>
+        <pc:chgData name="ARJUN AVALAKKI MOHAN" userId="be4ab9aaf12c5868" providerId="LiveId" clId="{C81E60EF-EF5F-4B4B-A4E1-3178676F15CC}" dt="2026-06-01T05:17:24.337" v="135" actId="20577"/>
         <pc:sldMkLst>
           <pc:docMk/>
           <pc:sldMk cId="0" sldId="269"/>
         </pc:sldMkLst>
         <pc:spChg chg="add mod">
-          <ac:chgData name="ARJUN AVALAKKI MOHAN" userId="be4ab9aaf12c5868" providerId="LiveId" clId="{C81E60EF-EF5F-4B4B-A4E1-3178676F15CC}" dt="2026-05-30T05:21:17.104" v="116" actId="1076"/>
+          <ac:chgData name="ARJUN AVALAKKI MOHAN" userId="be4ab9aaf12c5868" providerId="LiveId" clId="{C81E60EF-EF5F-4B4B-A4E1-3178676F15CC}" dt="2026-06-01T05:17:24.337" v="135" actId="20577"/>
           <ac:spMkLst>
             <pc:docMk/>
             <pc:sldMk cId="0" sldId="269"/>
             <ac:spMk id="5" creationId="{E9E3B61F-17F6-2188-6589-BFE74ADDC4CB}"/>
           </ac:spMkLst>
         </pc:spChg>
-        <pc:spChg chg="add del mod">
-          <ac:chgData name="ARJUN AVALAKKI MOHAN" userId="be4ab9aaf12c5868" providerId="LiveId" clId="{C81E60EF-EF5F-4B4B-A4E1-3178676F15CC}" dt="2026-05-30T05:12:37.083" v="108" actId="478"/>
-          <ac:spMkLst>
-            <pc:docMk/>
-            <pc:sldMk cId="0" sldId="269"/>
-            <ac:spMk id="9" creationId="{44E5A8F0-9DBB-2D8F-FCF1-B8CFE8D39FA9}"/>
-          </ac:spMkLst>
-        </pc:spChg>
-        <pc:spChg chg="del mod">
-          <ac:chgData name="ARJUN AVALAKKI MOHAN" userId="be4ab9aaf12c5868" providerId="LiveId" clId="{C81E60EF-EF5F-4B4B-A4E1-3178676F15CC}" dt="2026-05-30T05:12:25.783" v="107" actId="478"/>
-          <ac:spMkLst>
-            <pc:docMk/>
-            <pc:sldMk cId="0" sldId="269"/>
-            <ac:spMk id="263" creationId="{00000000-0000-0000-0000-000000000000}"/>
-          </ac:spMkLst>
-        </pc:spChg>
         <pc:graphicFrameChg chg="add mod">
-          <ac:chgData name="ARJUN AVALAKKI MOHAN" userId="be4ab9aaf12c5868" providerId="LiveId" clId="{C81E60EF-EF5F-4B4B-A4E1-3178676F15CC}" dt="2026-05-30T04:35:30.336" v="87"/>
+          <ac:chgData name="ARJUN AVALAKKI MOHAN" userId="be4ab9aaf12c5868" providerId="LiveId" clId="{C81E60EF-EF5F-4B4B-A4E1-3178676F15CC}" dt="2026-06-01T05:15:02.995" v="118"/>
           <ac:graphicFrameMkLst>
             <pc:docMk/>
             <pc:sldMk cId="0" sldId="269"/>
-            <ac:graphicFrameMk id="2" creationId="{9E67940D-03B4-72A6-64F7-374CF3171A3A}"/>
+            <ac:graphicFrameMk id="2" creationId="{C5B20F93-1E02-F83F-A2EB-DBAD633AF4F7}"/>
           </ac:graphicFrameMkLst>
         </pc:graphicFrameChg>
-        <pc:graphicFrameChg chg="add del mod modGraphic">
-          <ac:chgData name="ARJUN AVALAKKI MOHAN" userId="be4ab9aaf12c5868" providerId="LiveId" clId="{C81E60EF-EF5F-4B4B-A4E1-3178676F15CC}" dt="2026-05-30T05:06:01.103" v="101" actId="478"/>
-          <ac:graphicFrameMkLst>
-            <pc:docMk/>
-            <pc:sldMk cId="0" sldId="269"/>
-            <ac:graphicFrameMk id="3" creationId="{A2C332E5-9F90-BECA-6D0F-1750E9108B99}"/>
-          </ac:graphicFrameMkLst>
-        </pc:graphicFrameChg>
-        <pc:picChg chg="add del mod">
-          <ac:chgData name="ARJUN AVALAKKI MOHAN" userId="be4ab9aaf12c5868" providerId="LiveId" clId="{C81E60EF-EF5F-4B4B-A4E1-3178676F15CC}" dt="2026-05-30T05:20:58.843" v="113" actId="478"/>
+        <pc:picChg chg="add mod">
+          <ac:chgData name="ARJUN AVALAKKI MOHAN" userId="be4ab9aaf12c5868" providerId="LiveId" clId="{C81E60EF-EF5F-4B4B-A4E1-3178676F15CC}" dt="2026-06-01T05:15:26.041" v="120" actId="1076"/>
           <ac:picMkLst>
             <pc:docMk/>
             <pc:sldMk cId="0" sldId="269"/>
-            <ac:picMk id="7" creationId="{F393F1FE-966A-652D-914B-8E2E10EF4F54}"/>
+            <ac:picMk id="4" creationId="{BB810124-E5C9-ED18-D2F5-6173976C0BC9}"/>
           </ac:picMkLst>
         </pc:picChg>
         <pc:picChg chg="add mod">
-          <ac:chgData name="ARJUN AVALAKKI MOHAN" userId="be4ab9aaf12c5868" providerId="LiveId" clId="{C81E60EF-EF5F-4B4B-A4E1-3178676F15CC}" dt="2026-05-30T05:21:12.090" v="115" actId="1076"/>
+          <ac:chgData name="ARJUN AVALAKKI MOHAN" userId="be4ab9aaf12c5868" providerId="LiveId" clId="{C81E60EF-EF5F-4B4B-A4E1-3178676F15CC}" dt="2026-06-01T05:15:50.046" v="123" actId="1076"/>
+          <ac:picMkLst>
+            <pc:docMk/>
+            <pc:sldMk cId="0" sldId="269"/>
+            <ac:picMk id="7" creationId="{7220465E-D0D3-D449-F6C4-FBACE7DDBB6A}"/>
+          </ac:picMkLst>
+        </pc:picChg>
+        <pc:picChg chg="add del mod">
+          <ac:chgData name="ARJUN AVALAKKI MOHAN" userId="be4ab9aaf12c5868" providerId="LiveId" clId="{C81E60EF-EF5F-4B4B-A4E1-3178676F15CC}" dt="2026-06-01T05:14:49.762" v="117" actId="478"/>
           <ac:picMkLst>
             <pc:docMk/>
             <pc:sldMk cId="0" sldId="269"/>
             <ac:picMk id="11" creationId="{3AA77A95-45AE-5456-1B90-9CC748EF794E}"/>
           </ac:picMkLst>
         </pc:picChg>
-        <pc:picChg chg="del">
-          <ac:chgData name="ARJUN AVALAKKI MOHAN" userId="be4ab9aaf12c5868" providerId="LiveId" clId="{C81E60EF-EF5F-4B4B-A4E1-3178676F15CC}" dt="2026-05-30T04:38:00.047" v="94" actId="478"/>
+      </pc:sldChg>
+      <pc:sldChg chg="addSp delSp modSp mod">
+        <pc:chgData name="ARJUN AVALAKKI MOHAN" userId="be4ab9aaf12c5868" providerId="LiveId" clId="{C81E60EF-EF5F-4B4B-A4E1-3178676F15CC}" dt="2026-06-01T07:19:11.880" v="167" actId="1076"/>
+        <pc:sldMkLst>
+          <pc:docMk/>
+          <pc:sldMk cId="0" sldId="271"/>
+        </pc:sldMkLst>
+        <pc:spChg chg="add del mod">
+          <ac:chgData name="ARJUN AVALAKKI MOHAN" userId="be4ab9aaf12c5868" providerId="LiveId" clId="{C81E60EF-EF5F-4B4B-A4E1-3178676F15CC}" dt="2026-06-01T05:30:45.253" v="154" actId="478"/>
+          <ac:spMkLst>
+            <pc:docMk/>
+            <pc:sldMk cId="0" sldId="271"/>
+            <ac:spMk id="3" creationId="{99E6F135-1A31-51F8-3DAF-1D423CA6F58B}"/>
+          </ac:spMkLst>
+        </pc:spChg>
+        <pc:spChg chg="add mod">
+          <ac:chgData name="ARJUN AVALAKKI MOHAN" userId="be4ab9aaf12c5868" providerId="LiveId" clId="{C81E60EF-EF5F-4B4B-A4E1-3178676F15CC}" dt="2026-06-01T05:33:10.079" v="164" actId="1076"/>
+          <ac:spMkLst>
+            <pc:docMk/>
+            <pc:sldMk cId="0" sldId="271"/>
+            <ac:spMk id="5" creationId="{F2B0C846-C61E-0ADF-5A36-A50856564291}"/>
+          </ac:spMkLst>
+        </pc:spChg>
+        <pc:spChg chg="add del mod">
+          <ac:chgData name="ARJUN AVALAKKI MOHAN" userId="be4ab9aaf12c5868" providerId="LiveId" clId="{C81E60EF-EF5F-4B4B-A4E1-3178676F15CC}" dt="2026-06-01T05:30:41.949" v="153" actId="478"/>
+          <ac:spMkLst>
+            <pc:docMk/>
+            <pc:sldMk cId="0" sldId="271"/>
+            <ac:spMk id="6" creationId="{9E77B42A-8F11-4B1E-A946-ADA86BDFBEB8}"/>
+          </ac:spMkLst>
+        </pc:spChg>
+        <pc:spChg chg="del mod">
+          <ac:chgData name="ARJUN AVALAKKI MOHAN" userId="be4ab9aaf12c5868" providerId="LiveId" clId="{C81E60EF-EF5F-4B4B-A4E1-3178676F15CC}" dt="2026-06-01T05:29:02.073" v="141" actId="478"/>
+          <ac:spMkLst>
+            <pc:docMk/>
+            <pc:sldMk cId="0" sldId="271"/>
+            <ac:spMk id="275" creationId="{00000000-0000-0000-0000-000000000000}"/>
+          </ac:spMkLst>
+        </pc:spChg>
+        <pc:picChg chg="add mod">
+          <ac:chgData name="ARJUN AVALAKKI MOHAN" userId="be4ab9aaf12c5868" providerId="LiveId" clId="{C81E60EF-EF5F-4B4B-A4E1-3178676F15CC}" dt="2026-06-01T07:19:11.880" v="167" actId="1076"/>
           <ac:picMkLst>
             <pc:docMk/>
-            <pc:sldMk cId="0" sldId="269"/>
-            <ac:picMk id="264" creationId="{00000000-0000-0000-0000-000000000000}"/>
+            <pc:sldMk cId="0" sldId="271"/>
+            <ac:picMk id="8" creationId="{AE3491BB-3730-2915-7AE9-7F7B3C8D387D}"/>
+          </ac:picMkLst>
+        </pc:picChg>
+        <pc:picChg chg="del">
+          <ac:chgData name="ARJUN AVALAKKI MOHAN" userId="be4ab9aaf12c5868" providerId="LiveId" clId="{C81E60EF-EF5F-4B4B-A4E1-3178676F15CC}" dt="2026-06-01T05:30:47.479" v="155" actId="478"/>
+          <ac:picMkLst>
+            <pc:docMk/>
+            <pc:sldMk cId="0" sldId="271"/>
+            <ac:picMk id="276" creationId="{00000000-0000-0000-0000-000000000000}"/>
           </ac:picMkLst>
         </pc:picChg>
       </pc:sldChg>
@@ -1638,8 +1669,8 @@
         </p:nvSpPr>
         <p:spPr>
           <a:xfrm>
-            <a:off x="2104459" y="685800"/>
-            <a:ext cx="2649600" cy="3429000"/>
+            <a:off x="2105025" y="685800"/>
+            <a:ext cx="2649538" cy="3429000"/>
           </a:xfrm>
           <a:custGeom>
             <a:avLst/>
@@ -28336,8 +28367,8 @@
         </p:nvSpPr>
         <p:spPr>
           <a:xfrm>
-            <a:off x="189984" y="6705990"/>
-            <a:ext cx="7335274" cy="1600438"/>
+            <a:off x="609141" y="7064336"/>
+            <a:ext cx="6764236" cy="2031325"/>
           </a:xfrm>
           <a:prstGeom prst="rect">
             <a:avLst/>
@@ -28360,17 +28391,30 @@
             </a:r>
             <a:r>
               <a:rPr lang="en-GB" dirty="0"/>
-              <a:t> data. The most significant issues are invalid customer email addresses and inconsistencies between listing information and inventory item data. Missing shipping addresses were identified in a smaller number of order records. While no duplicate customer accounts were found in the current dataset, this remains a foreseeable future risk as the business continues to grow. These metrics should be monitored regularly to ensure compliance with data quality rules and to support future Master Data Management initiatives.</a:t>
+              <a:t> data. The most significant issues are invalid customer email addresses and inconsistencies between listing information and inventory item data. Missing shipping addresses were identified in a smaller number of order records. </a:t>
+            </a:r>
+            <a:r>
+              <a:rPr lang="en-US" dirty="0"/>
+              <a:t>While no duplicate customer accounts were found in the current dataset, this remains a potential future risk as the business continues to grow.</a:t>
+            </a:r>
+          </a:p>
+          <a:p>
+            <a:endParaRPr lang="en-US" dirty="0"/>
+          </a:p>
+          <a:p>
+            <a:r>
+              <a:rPr lang="en-GB" dirty="0"/>
+              <a:t>These metrics should be monitored regularly to ensure compliance with data quality rules and to support future Master Data Management initiatives.</a:t>
             </a:r>
           </a:p>
         </p:txBody>
       </p:sp>
       <p:pic>
         <p:nvPicPr>
-          <p:cNvPr id="11" name="Picture 10">
+          <p:cNvPr id="4" name="Picture 3">
             <a:extLst>
               <a:ext uri="{FF2B5EF4-FFF2-40B4-BE49-F238E27FC236}">
-                <a16:creationId xmlns:a16="http://schemas.microsoft.com/office/drawing/2014/main" id="{3AA77A95-45AE-5456-1B90-9CC748EF794E}"/>
+                <a16:creationId xmlns:a16="http://schemas.microsoft.com/office/drawing/2014/main" id="{BB810124-E5C9-ED18-D2F5-6173976C0BC9}"/>
               </a:ext>
             </a:extLst>
           </p:cNvPr>
@@ -28387,8 +28431,38 @@
         </p:blipFill>
         <p:spPr>
           <a:xfrm>
-            <a:off x="189984" y="398349"/>
-            <a:ext cx="7363853" cy="5925377"/>
+            <a:off x="513879" y="212924"/>
+            <a:ext cx="6687483" cy="5134692"/>
+          </a:xfrm>
+          <a:prstGeom prst="rect">
+            <a:avLst/>
+          </a:prstGeom>
+        </p:spPr>
+      </p:pic>
+      <p:pic>
+        <p:nvPicPr>
+          <p:cNvPr id="7" name="Picture 6">
+            <a:extLst>
+              <a:ext uri="{FF2B5EF4-FFF2-40B4-BE49-F238E27FC236}">
+                <a16:creationId xmlns:a16="http://schemas.microsoft.com/office/drawing/2014/main" id="{7220465E-D0D3-D449-F6C4-FBACE7DDBB6A}"/>
+              </a:ext>
+            </a:extLst>
+          </p:cNvPr>
+          <p:cNvPicPr>
+            <a:picLocks noChangeAspect="1"/>
+          </p:cNvPicPr>
+          <p:nvPr/>
+        </p:nvPicPr>
+        <p:blipFill>
+          <a:blip r:embed="rId4"/>
+          <a:stretch>
+            <a:fillRect/>
+          </a:stretch>
+        </p:blipFill>
+        <p:spPr>
+          <a:xfrm>
+            <a:off x="609141" y="5506106"/>
+            <a:ext cx="6496957" cy="1200318"/>
           </a:xfrm>
           <a:prstGeom prst="rect">
             <a:avLst/>
@@ -28653,176 +28727,36 @@
       </p:grpSpPr>
       <p:sp>
         <p:nvSpPr>
-          <p:cNvPr id="275" name="Google Shape;275;p66"/>
-          <p:cNvSpPr txBox="1">
-            <a:spLocks noGrp="1"/>
-          </p:cNvSpPr>
-          <p:nvPr>
-            <p:ph type="body" idx="1"/>
-          </p:nvPr>
+          <p:cNvPr id="5" name="TextBox 4">
+            <a:extLst>
+              <a:ext uri="{FF2B5EF4-FFF2-40B4-BE49-F238E27FC236}">
+                <a16:creationId xmlns:a16="http://schemas.microsoft.com/office/drawing/2014/main" id="{F2B0C846-C61E-0ADF-5A36-A50856564291}"/>
+              </a:ext>
+            </a:extLst>
+          </p:cNvPr>
+          <p:cNvSpPr txBox="1"/>
+          <p:nvPr/>
         </p:nvSpPr>
         <p:spPr>
           <a:xfrm>
-            <a:off x="439225" y="-63075"/>
-            <a:ext cx="6907500" cy="4777800"/>
+            <a:off x="18535" y="342029"/>
+            <a:ext cx="7735330" cy="400110"/>
           </a:xfrm>
           <a:prstGeom prst="rect">
             <a:avLst/>
           </a:prstGeom>
+          <a:noFill/>
         </p:spPr>
         <p:txBody>
-          <a:bodyPr spcFirstLastPara="1" wrap="square" lIns="91425" tIns="91425" rIns="91425" bIns="91425" anchor="t" anchorCtr="0">
-            <a:noAutofit/>
+          <a:bodyPr wrap="square">
+            <a:spAutoFit/>
           </a:bodyPr>
           <a:lstStyle/>
           <a:p>
-            <a:pPr marL="0" marR="241300" lvl="0" indent="0" algn="just" rtl="0">
-              <a:lnSpc>
-                <a:spcPct val="150000"/>
-              </a:lnSpc>
-              <a:spcBef>
-                <a:spcPts val="3800"/>
-              </a:spcBef>
-              <a:spcAft>
-                <a:spcPts val="0"/>
-              </a:spcAft>
-              <a:buNone/>
-            </a:pPr>
             <a:r>
-              <a:rPr lang="en" sz="1600" dirty="0">
-                <a:solidFill>
-                  <a:srgbClr val="525C65"/>
-                </a:solidFill>
-                <a:highlight>
-                  <a:srgbClr val="FFFFFF"/>
-                </a:highlight>
-                <a:latin typeface="Open Sans"/>
-                <a:ea typeface="Open Sans"/>
-                <a:cs typeface="Open Sans"/>
-                <a:sym typeface="Open Sans"/>
-              </a:rPr>
-              <a:t>Based on what you’ve read about SneakerPark’s systems and business model, sketch out a proposed </a:t>
-            </a:r>
-            <a:r>
-              <a:rPr lang="en" sz="1600" b="1" dirty="0">
-                <a:solidFill>
-                  <a:srgbClr val="525C65"/>
-                </a:solidFill>
-                <a:highlight>
-                  <a:srgbClr val="FFFFFF"/>
-                </a:highlight>
-                <a:latin typeface="Open Sans"/>
-                <a:ea typeface="Open Sans"/>
-                <a:cs typeface="Open Sans"/>
-                <a:sym typeface="Open Sans"/>
-              </a:rPr>
-              <a:t>MDM implementation architecture</a:t>
-            </a:r>
-            <a:r>
-              <a:rPr lang="en" sz="1600" dirty="0">
-                <a:solidFill>
-                  <a:srgbClr val="525C65"/>
-                </a:solidFill>
-                <a:highlight>
-                  <a:srgbClr val="FFFFFF"/>
-                </a:highlight>
-                <a:latin typeface="Open Sans"/>
-                <a:ea typeface="Open Sans"/>
-                <a:cs typeface="Open Sans"/>
-                <a:sym typeface="Open Sans"/>
-              </a:rPr>
-              <a:t>, and write a </a:t>
-            </a:r>
-            <a:r>
-              <a:rPr lang="en" sz="1600" b="1" dirty="0">
-                <a:solidFill>
-                  <a:srgbClr val="525C65"/>
-                </a:solidFill>
-                <a:highlight>
-                  <a:srgbClr val="FFFFFF"/>
-                </a:highlight>
-                <a:latin typeface="Open Sans"/>
-                <a:ea typeface="Open Sans"/>
-                <a:cs typeface="Open Sans"/>
-                <a:sym typeface="Open Sans"/>
-              </a:rPr>
-              <a:t>detailed explanation</a:t>
-            </a:r>
-            <a:r>
-              <a:rPr lang="en" sz="1600" dirty="0">
-                <a:solidFill>
-                  <a:srgbClr val="525C65"/>
-                </a:solidFill>
-                <a:highlight>
-                  <a:srgbClr val="FFFFFF"/>
-                </a:highlight>
-                <a:latin typeface="Open Sans"/>
-                <a:ea typeface="Open Sans"/>
-                <a:cs typeface="Open Sans"/>
-                <a:sym typeface="Open Sans"/>
-              </a:rPr>
-              <a:t> of </a:t>
-            </a:r>
-            <a:r>
-              <a:rPr lang="en" sz="1600" b="1" dirty="0">
-                <a:solidFill>
-                  <a:srgbClr val="525C65"/>
-                </a:solidFill>
-                <a:highlight>
-                  <a:srgbClr val="FFFFFF"/>
-                </a:highlight>
-                <a:latin typeface="Open Sans"/>
-                <a:ea typeface="Open Sans"/>
-                <a:cs typeface="Open Sans"/>
-                <a:sym typeface="Open Sans"/>
-              </a:rPr>
-              <a:t>why</a:t>
-            </a:r>
-            <a:r>
-              <a:rPr lang="en" sz="1600" dirty="0">
-                <a:solidFill>
-                  <a:srgbClr val="525C65"/>
-                </a:solidFill>
-                <a:highlight>
-                  <a:srgbClr val="FFFFFF"/>
-                </a:highlight>
-                <a:latin typeface="Open Sans"/>
-                <a:ea typeface="Open Sans"/>
-                <a:cs typeface="Open Sans"/>
-                <a:sym typeface="Open Sans"/>
-              </a:rPr>
-              <a:t> you chose this specific approach.</a:t>
-            </a:r>
-            <a:endParaRPr sz="1600" dirty="0">
-              <a:solidFill>
-                <a:srgbClr val="525C65"/>
-              </a:solidFill>
-              <a:highlight>
-                <a:srgbClr val="FFFFFF"/>
-              </a:highlight>
-              <a:latin typeface="Open Sans"/>
-              <a:ea typeface="Open Sans"/>
-              <a:cs typeface="Open Sans"/>
-              <a:sym typeface="Open Sans"/>
-            </a:endParaRPr>
-          </a:p>
-          <a:p>
-            <a:pPr marL="0" marR="241300" lvl="0" indent="0" algn="just" rtl="0">
-              <a:lnSpc>
-                <a:spcPct val="150000"/>
-              </a:lnSpc>
-              <a:spcBef>
-                <a:spcPts val="3800"/>
-              </a:spcBef>
-              <a:spcAft>
-                <a:spcPts val="0"/>
-              </a:spcAft>
-              <a:buNone/>
-            </a:pPr>
-            <a:r>
-              <a:rPr lang="en" sz="1600" b="1" dirty="0">
-                <a:solidFill>
-                  <a:srgbClr val="525C65"/>
+              <a:rPr lang="en-GB" sz="2000" b="1" dirty="0">
+                <a:solidFill>
+                  <a:schemeClr val="tx1"/>
                 </a:solidFill>
                 <a:highlight>
                   <a:schemeClr val="lt1"/>
@@ -28830,402 +28764,40 @@
                 <a:latin typeface="Open Sans"/>
                 <a:ea typeface="Open Sans"/>
                 <a:cs typeface="Open Sans"/>
-                <a:sym typeface="Open Sans"/>
               </a:rPr>
-              <a:t>Tip:</a:t>
+              <a:t>SNEAKERPARK HYBRID (COEXISTENCE) MDM ARCHITECTURE</a:t>
             </a:r>
-            <a:r>
-              <a:rPr lang="en" sz="1600" dirty="0">
-                <a:solidFill>
-                  <a:srgbClr val="525C65"/>
-                </a:solidFill>
-                <a:highlight>
-                  <a:schemeClr val="lt1"/>
-                </a:highlight>
-                <a:latin typeface="Open Sans"/>
-                <a:ea typeface="Open Sans"/>
-                <a:cs typeface="Open Sans"/>
-                <a:sym typeface="Open Sans"/>
-              </a:rPr>
-              <a:t> Think about how your plan and its implementation might affect existing systems.</a:t>
-            </a:r>
-            <a:endParaRPr sz="1600" dirty="0">
-              <a:solidFill>
-                <a:srgbClr val="525C65"/>
-              </a:solidFill>
-              <a:highlight>
-                <a:srgbClr val="FFFFFF"/>
-              </a:highlight>
-              <a:latin typeface="Open Sans"/>
-              <a:ea typeface="Open Sans"/>
-              <a:cs typeface="Open Sans"/>
-              <a:sym typeface="Open Sans"/>
-            </a:endParaRPr>
-          </a:p>
-          <a:p>
-            <a:pPr marL="0" lvl="0" indent="0" algn="just" rtl="0">
-              <a:spcBef>
-                <a:spcPts val="1100"/>
-              </a:spcBef>
-              <a:spcAft>
-                <a:spcPts val="0"/>
-              </a:spcAft>
-              <a:buNone/>
-            </a:pPr>
-            <a:r>
-              <a:rPr lang="en" sz="1600" b="1" dirty="0">
-                <a:solidFill>
-                  <a:srgbClr val="525C65"/>
-                </a:solidFill>
-                <a:highlight>
-                  <a:schemeClr val="lt1"/>
-                </a:highlight>
-                <a:latin typeface="Open Sans"/>
-                <a:ea typeface="Open Sans"/>
-                <a:cs typeface="Open Sans"/>
-                <a:sym typeface="Open Sans"/>
-              </a:rPr>
-              <a:t>Replace example screenshot below with your own solutions (obviously feel free to take more space). </a:t>
-            </a:r>
-            <a:endParaRPr sz="1600" b="1" dirty="0">
-              <a:solidFill>
-                <a:srgbClr val="525C65"/>
-              </a:solidFill>
-              <a:highlight>
-                <a:schemeClr val="lt1"/>
-              </a:highlight>
-              <a:latin typeface="Open Sans"/>
-              <a:ea typeface="Open Sans"/>
-              <a:cs typeface="Open Sans"/>
-              <a:sym typeface="Open Sans"/>
-            </a:endParaRPr>
-          </a:p>
-          <a:p>
-            <a:pPr marL="0" lvl="0" indent="0" algn="just" rtl="0">
-              <a:spcBef>
-                <a:spcPts val="1600"/>
-              </a:spcBef>
-              <a:spcAft>
-                <a:spcPts val="0"/>
-              </a:spcAft>
-              <a:buNone/>
-            </a:pPr>
-            <a:r>
-              <a:rPr lang="en" sz="1600" b="1" dirty="0">
-                <a:solidFill>
-                  <a:srgbClr val="525C65"/>
-                </a:solidFill>
-                <a:highlight>
-                  <a:schemeClr val="lt1"/>
-                </a:highlight>
-                <a:latin typeface="Open Sans"/>
-                <a:ea typeface="Open Sans"/>
-                <a:cs typeface="Open Sans"/>
-                <a:sym typeface="Open Sans"/>
-              </a:rPr>
-              <a:t>Next, please write at least a paragraph explaining  your choice.</a:t>
-            </a:r>
-            <a:endParaRPr sz="1600" dirty="0">
-              <a:solidFill>
-                <a:srgbClr val="525C65"/>
-              </a:solidFill>
-              <a:highlight>
-                <a:schemeClr val="lt1"/>
-              </a:highlight>
-              <a:latin typeface="Open Sans"/>
-              <a:ea typeface="Open Sans"/>
-              <a:cs typeface="Open Sans"/>
-              <a:sym typeface="Open Sans"/>
-            </a:endParaRPr>
-          </a:p>
-          <a:p>
-            <a:pPr marL="241300" marR="241300" lvl="0" indent="0" algn="just" rtl="0">
-              <a:lnSpc>
-                <a:spcPct val="170000"/>
-              </a:lnSpc>
-              <a:spcBef>
-                <a:spcPts val="3800"/>
-              </a:spcBef>
-              <a:spcAft>
-                <a:spcPts val="0"/>
-              </a:spcAft>
-              <a:buNone/>
-            </a:pPr>
-            <a:endParaRPr sz="1600" dirty="0">
-              <a:solidFill>
-                <a:srgbClr val="525C65"/>
-              </a:solidFill>
-              <a:highlight>
-                <a:srgbClr val="FFFFFF"/>
-              </a:highlight>
-              <a:latin typeface="Open Sans"/>
-              <a:ea typeface="Open Sans"/>
-              <a:cs typeface="Open Sans"/>
-              <a:sym typeface="Open Sans"/>
-            </a:endParaRPr>
-          </a:p>
-          <a:p>
-            <a:pPr marL="241300" marR="241300" lvl="0" indent="0" algn="just" rtl="0">
-              <a:lnSpc>
-                <a:spcPct val="170000"/>
-              </a:lnSpc>
-              <a:spcBef>
-                <a:spcPts val="3800"/>
-              </a:spcBef>
-              <a:spcAft>
-                <a:spcPts val="0"/>
-              </a:spcAft>
-              <a:buNone/>
-            </a:pPr>
-            <a:endParaRPr sz="1600" dirty="0">
-              <a:solidFill>
-                <a:srgbClr val="525C65"/>
-              </a:solidFill>
-              <a:highlight>
-                <a:srgbClr val="FFFFFF"/>
-              </a:highlight>
-              <a:latin typeface="Open Sans"/>
-              <a:ea typeface="Open Sans"/>
-              <a:cs typeface="Open Sans"/>
-              <a:sym typeface="Open Sans"/>
-            </a:endParaRPr>
-          </a:p>
-          <a:p>
-            <a:pPr marL="241300" marR="241300" lvl="0" indent="0" algn="just" rtl="0">
-              <a:lnSpc>
-                <a:spcPct val="170000"/>
-              </a:lnSpc>
-              <a:spcBef>
-                <a:spcPts val="3800"/>
-              </a:spcBef>
-              <a:spcAft>
-                <a:spcPts val="0"/>
-              </a:spcAft>
-              <a:buNone/>
-            </a:pPr>
-            <a:endParaRPr sz="1600" dirty="0">
-              <a:solidFill>
-                <a:srgbClr val="525C65"/>
-              </a:solidFill>
-              <a:highlight>
-                <a:srgbClr val="FFFFFF"/>
-              </a:highlight>
-              <a:latin typeface="Open Sans"/>
-              <a:ea typeface="Open Sans"/>
-              <a:cs typeface="Open Sans"/>
-              <a:sym typeface="Open Sans"/>
-            </a:endParaRPr>
-          </a:p>
-          <a:p>
-            <a:pPr marL="241300" marR="241300" lvl="0" indent="0" algn="just" rtl="0">
-              <a:lnSpc>
-                <a:spcPct val="170000"/>
-              </a:lnSpc>
-              <a:spcBef>
-                <a:spcPts val="3800"/>
-              </a:spcBef>
-              <a:spcAft>
-                <a:spcPts val="0"/>
-              </a:spcAft>
-              <a:buNone/>
-            </a:pPr>
-            <a:endParaRPr sz="1600" dirty="0">
-              <a:solidFill>
-                <a:srgbClr val="525C65"/>
-              </a:solidFill>
-              <a:highlight>
-                <a:srgbClr val="FFFFFF"/>
-              </a:highlight>
-              <a:latin typeface="Open Sans"/>
-              <a:ea typeface="Open Sans"/>
-              <a:cs typeface="Open Sans"/>
-              <a:sym typeface="Open Sans"/>
-            </a:endParaRPr>
-          </a:p>
-          <a:p>
-            <a:pPr marL="241300" marR="241300" lvl="0" indent="0" algn="just" rtl="0">
-              <a:lnSpc>
-                <a:spcPct val="170000"/>
-              </a:lnSpc>
-              <a:spcBef>
-                <a:spcPts val="3800"/>
-              </a:spcBef>
-              <a:spcAft>
-                <a:spcPts val="0"/>
-              </a:spcAft>
-              <a:buNone/>
-            </a:pPr>
-            <a:endParaRPr sz="1600" dirty="0">
-              <a:solidFill>
-                <a:srgbClr val="525C65"/>
-              </a:solidFill>
-              <a:highlight>
-                <a:srgbClr val="FFFFFF"/>
-              </a:highlight>
-              <a:latin typeface="Open Sans"/>
-              <a:ea typeface="Open Sans"/>
-              <a:cs typeface="Open Sans"/>
-              <a:sym typeface="Open Sans"/>
-            </a:endParaRPr>
-          </a:p>
-          <a:p>
-            <a:pPr marL="0" marR="241300" lvl="0" indent="0" algn="just" rtl="0">
-              <a:lnSpc>
-                <a:spcPct val="170000"/>
-              </a:lnSpc>
-              <a:spcBef>
-                <a:spcPts val="3800"/>
-              </a:spcBef>
-              <a:spcAft>
-                <a:spcPts val="0"/>
-              </a:spcAft>
-              <a:buClr>
-                <a:schemeClr val="dk1"/>
-              </a:buClr>
-              <a:buSzPts val="1100"/>
-              <a:buFont typeface="Arial"/>
-              <a:buNone/>
-            </a:pPr>
-            <a:endParaRPr sz="1400" dirty="0">
-              <a:solidFill>
-                <a:srgbClr val="525C65"/>
-              </a:solidFill>
-              <a:highlight>
-                <a:srgbClr val="FFFFFF"/>
-              </a:highlight>
-              <a:latin typeface="Open Sans"/>
-              <a:ea typeface="Open Sans"/>
-              <a:cs typeface="Open Sans"/>
-              <a:sym typeface="Open Sans"/>
-            </a:endParaRPr>
-          </a:p>
-          <a:p>
-            <a:pPr marL="241300" marR="241300" lvl="0" indent="0" algn="just" rtl="0">
-              <a:lnSpc>
-                <a:spcPct val="170000"/>
-              </a:lnSpc>
-              <a:spcBef>
-                <a:spcPts val="3800"/>
-              </a:spcBef>
-              <a:spcAft>
-                <a:spcPts val="0"/>
-              </a:spcAft>
-              <a:buClr>
-                <a:schemeClr val="dk1"/>
-              </a:buClr>
-              <a:buSzPts val="1100"/>
-              <a:buFont typeface="Arial"/>
-              <a:buNone/>
-            </a:pPr>
-            <a:endParaRPr sz="1600" dirty="0">
-              <a:solidFill>
-                <a:srgbClr val="525C65"/>
-              </a:solidFill>
-              <a:highlight>
-                <a:srgbClr val="FFFFFF"/>
-              </a:highlight>
-              <a:latin typeface="Open Sans"/>
-              <a:ea typeface="Open Sans"/>
-              <a:cs typeface="Open Sans"/>
-              <a:sym typeface="Open Sans"/>
-            </a:endParaRPr>
-          </a:p>
-          <a:p>
-            <a:pPr marL="0" lvl="0" indent="0" algn="just" rtl="0">
-              <a:spcBef>
-                <a:spcPts val="0"/>
-              </a:spcBef>
-              <a:spcAft>
-                <a:spcPts val="0"/>
-              </a:spcAft>
-              <a:buNone/>
-            </a:pPr>
-            <a:endParaRPr sz="1600" dirty="0">
-              <a:solidFill>
-                <a:srgbClr val="525C65"/>
-              </a:solidFill>
-              <a:highlight>
-                <a:srgbClr val="FFFFFF"/>
-              </a:highlight>
-              <a:latin typeface="Open Sans"/>
-              <a:ea typeface="Open Sans"/>
-              <a:cs typeface="Open Sans"/>
-              <a:sym typeface="Open Sans"/>
-            </a:endParaRPr>
-          </a:p>
-          <a:p>
-            <a:pPr marL="0" lvl="0" indent="0" algn="just" rtl="0">
-              <a:spcBef>
-                <a:spcPts val="1600"/>
-              </a:spcBef>
-              <a:spcAft>
-                <a:spcPts val="0"/>
-              </a:spcAft>
-              <a:buNone/>
-            </a:pPr>
-            <a:endParaRPr sz="1600" dirty="0">
-              <a:solidFill>
-                <a:srgbClr val="525C65"/>
-              </a:solidFill>
-              <a:highlight>
-                <a:srgbClr val="FFFFFF"/>
-              </a:highlight>
-              <a:latin typeface="Open Sans"/>
-              <a:ea typeface="Open Sans"/>
-              <a:cs typeface="Open Sans"/>
-              <a:sym typeface="Open Sans"/>
-            </a:endParaRPr>
-          </a:p>
-          <a:p>
-            <a:pPr marL="0" lvl="0" indent="0" algn="just" rtl="0">
-              <a:spcBef>
-                <a:spcPts val="1600"/>
-              </a:spcBef>
-              <a:spcAft>
-                <a:spcPts val="1600"/>
-              </a:spcAft>
-              <a:buNone/>
-            </a:pPr>
-            <a:endParaRPr sz="1600" dirty="0">
-              <a:solidFill>
-                <a:srgbClr val="525C65"/>
-              </a:solidFill>
-              <a:highlight>
-                <a:srgbClr val="FFFFFF"/>
-              </a:highlight>
-              <a:latin typeface="Open Sans"/>
-              <a:ea typeface="Open Sans"/>
-              <a:cs typeface="Open Sans"/>
-              <a:sym typeface="Open Sans"/>
-            </a:endParaRPr>
           </a:p>
         </p:txBody>
       </p:sp>
       <p:pic>
         <p:nvPicPr>
-          <p:cNvPr id="276" name="Google Shape;276;p66"/>
-          <p:cNvPicPr preferRelativeResize="0"/>
+          <p:cNvPr id="8" name="Picture 7">
+            <a:extLst>
+              <a:ext uri="{FF2B5EF4-FFF2-40B4-BE49-F238E27FC236}">
+                <a16:creationId xmlns:a16="http://schemas.microsoft.com/office/drawing/2014/main" id="{AE3491BB-3730-2915-7AE9-7F7B3C8D387D}"/>
+              </a:ext>
+            </a:extLst>
+          </p:cNvPr>
+          <p:cNvPicPr>
+            <a:picLocks noChangeAspect="1"/>
+          </p:cNvPicPr>
           <p:nvPr/>
         </p:nvPicPr>
-        <p:blipFill rotWithShape="1">
-          <a:blip r:embed="rId3">
-            <a:alphaModFix/>
-          </a:blip>
-          <a:srcRect l="5866" t="3776" r="5654" b="7595"/>
-          <a:stretch/>
+        <p:blipFill>
+          <a:blip r:embed="rId3"/>
+          <a:stretch>
+            <a:fillRect/>
+          </a:stretch>
         </p:blipFill>
         <p:spPr>
           <a:xfrm>
-            <a:off x="954513" y="4876800"/>
-            <a:ext cx="5876925" cy="4171950"/>
+            <a:off x="18535" y="1102219"/>
+            <a:ext cx="7451124" cy="4740060"/>
           </a:xfrm>
           <a:prstGeom prst="rect">
             <a:avLst/>
           </a:prstGeom>
-          <a:noFill/>
-          <a:ln>
-            <a:noFill/>
-          </a:ln>
         </p:spPr>
       </p:pic>
     </p:spTree>

--- a/Modules/03-Data-Architect/projects/Project 4 - SneakerPark Data Governance/report/sneakerpark_data_governance.pptx
+++ b/Modules/03-Data-Architect/projects/Project 4 - SneakerPark Data Governance/report/sneakerpark_data_governance.pptx
@@ -8,56 +8,52 @@
     <p:sldMasterId id="2147483697" r:id="rId4"/>
   </p:sldMasterIdLst>
   <p:notesMasterIdLst>
-    <p:notesMasterId r:id="rId28"/>
+    <p:notesMasterId r:id="rId24"/>
   </p:notesMasterIdLst>
   <p:sldIdLst>
     <p:sldId id="256" r:id="rId5"/>
-    <p:sldId id="257" r:id="rId6"/>
-    <p:sldId id="258" r:id="rId7"/>
-    <p:sldId id="259" r:id="rId8"/>
-    <p:sldId id="260" r:id="rId9"/>
-    <p:sldId id="261" r:id="rId10"/>
-    <p:sldId id="262" r:id="rId11"/>
-    <p:sldId id="263" r:id="rId12"/>
-    <p:sldId id="264" r:id="rId13"/>
-    <p:sldId id="265" r:id="rId14"/>
-    <p:sldId id="266" r:id="rId15"/>
-    <p:sldId id="267" r:id="rId16"/>
-    <p:sldId id="268" r:id="rId17"/>
-    <p:sldId id="269" r:id="rId18"/>
-    <p:sldId id="270" r:id="rId19"/>
-    <p:sldId id="271" r:id="rId20"/>
-    <p:sldId id="272" r:id="rId21"/>
-    <p:sldId id="273" r:id="rId22"/>
-    <p:sldId id="274" r:id="rId23"/>
-    <p:sldId id="275" r:id="rId24"/>
-    <p:sldId id="276" r:id="rId25"/>
-    <p:sldId id="277" r:id="rId26"/>
-    <p:sldId id="278" r:id="rId27"/>
+    <p:sldId id="259" r:id="rId6"/>
+    <p:sldId id="260" r:id="rId7"/>
+    <p:sldId id="261" r:id="rId8"/>
+    <p:sldId id="262" r:id="rId9"/>
+    <p:sldId id="263" r:id="rId10"/>
+    <p:sldId id="264" r:id="rId11"/>
+    <p:sldId id="265" r:id="rId12"/>
+    <p:sldId id="266" r:id="rId13"/>
+    <p:sldId id="267" r:id="rId14"/>
+    <p:sldId id="268" r:id="rId15"/>
+    <p:sldId id="269" r:id="rId16"/>
+    <p:sldId id="270" r:id="rId17"/>
+    <p:sldId id="271" r:id="rId18"/>
+    <p:sldId id="272" r:id="rId19"/>
+    <p:sldId id="273" r:id="rId20"/>
+    <p:sldId id="274" r:id="rId21"/>
+    <p:sldId id="275" r:id="rId22"/>
+    <p:sldId id="276" r:id="rId23"/>
   </p:sldIdLst>
   <p:sldSz cx="7772400" cy="10058400"/>
   <p:notesSz cx="6858000" cy="9144000"/>
   <p:embeddedFontLst>
     <p:embeddedFont>
       <p:font typeface="Helvetica Neue" panose="020B0604020202020204" charset="0"/>
+      <p:regular r:id="rId25"/>
+      <p:bold r:id="rId26"/>
+      <p:italic r:id="rId27"/>
+      <p:boldItalic r:id="rId28"/>
+    </p:embeddedFont>
+    <p:embeddedFont>
+      <p:font typeface="Open Sans" panose="020B0606030504020204" pitchFamily="34" charset="0"/>
       <p:regular r:id="rId29"/>
       <p:bold r:id="rId30"/>
       <p:italic r:id="rId31"/>
       <p:boldItalic r:id="rId32"/>
     </p:embeddedFont>
     <p:embeddedFont>
-      <p:font typeface="Open Sans" panose="020B0606030504020204" pitchFamily="34" charset="0"/>
+      <p:font typeface="Open Sans Light" panose="020B0306030504020204" pitchFamily="34" charset="0"/>
       <p:regular r:id="rId33"/>
       <p:bold r:id="rId34"/>
       <p:italic r:id="rId35"/>
       <p:boldItalic r:id="rId36"/>
-    </p:embeddedFont>
-    <p:embeddedFont>
-      <p:font typeface="Open Sans Light" panose="020B0306030504020204" pitchFamily="34" charset="0"/>
-      <p:regular r:id="rId37"/>
-      <p:bold r:id="rId38"/>
-      <p:italic r:id="rId39"/>
-      <p:boldItalic r:id="rId40"/>
     </p:embeddedFont>
   </p:embeddedFontLst>
   <p:defaultTextStyle>
@@ -300,7 +296,7 @@
 <file path=ppt/revisionInfo.xml><?xml version="1.0" encoding="utf-8"?>
 <p1510:revInfo xmlns:a="http://schemas.openxmlformats.org/drawingml/2006/main" xmlns:r="http://schemas.openxmlformats.org/officeDocument/2006/relationships" xmlns:p1510="http://schemas.microsoft.com/office/powerpoint/2015/10/main">
   <p1510:revLst>
-    <p1510:client id="{7C95B268-E689-48BE-B304-A84222016C49}" v="12" dt="2026-06-01T05:32:44.556"/>
+    <p1510:client id="{7C95B268-E689-48BE-B304-A84222016C49}" v="63" dt="2026-06-02T05:08:33.114"/>
   </p1510:revLst>
 </p1510:revInfo>
 </file>
@@ -309,8 +305,8 @@
 <pc:chgInfo xmlns:a="http://schemas.openxmlformats.org/drawingml/2006/main" xmlns:r="http://schemas.openxmlformats.org/officeDocument/2006/relationships" xmlns:ac="http://schemas.microsoft.com/office/drawing/2013/main/command" xmlns:pc="http://schemas.microsoft.com/office/powerpoint/2013/main/command">
   <pc:docChgLst>
     <pc:chgData name="ARJUN AVALAKKI MOHAN" userId="be4ab9aaf12c5868" providerId="LiveId" clId="{C81E60EF-EF5F-4B4B-A4E1-3178676F15CC}"/>
-    <pc:docChg chg="custSel modSld">
-      <pc:chgData name="ARJUN AVALAKKI MOHAN" userId="be4ab9aaf12c5868" providerId="LiveId" clId="{C81E60EF-EF5F-4B4B-A4E1-3178676F15CC}" dt="2026-06-01T07:19:11.880" v="167" actId="1076"/>
+    <pc:docChg chg="undo custSel delSld modSld">
+      <pc:chgData name="ARJUN AVALAKKI MOHAN" userId="be4ab9aaf12c5868" providerId="LiveId" clId="{C81E60EF-EF5F-4B4B-A4E1-3178676F15CC}" dt="2026-06-02T05:08:38.603" v="607" actId="113"/>
       <pc:docMkLst>
         <pc:docMk/>
       </pc:docMkLst>
@@ -328,6 +324,20 @@
             <ac:spMk id="180" creationId="{00000000-0000-0000-0000-000000000000}"/>
           </ac:spMkLst>
         </pc:spChg>
+      </pc:sldChg>
+      <pc:sldChg chg="del">
+        <pc:chgData name="ARJUN AVALAKKI MOHAN" userId="be4ab9aaf12c5868" providerId="LiveId" clId="{C81E60EF-EF5F-4B4B-A4E1-3178676F15CC}" dt="2026-06-02T04:20:31.337" v="168" actId="47"/>
+        <pc:sldMkLst>
+          <pc:docMk/>
+          <pc:sldMk cId="0" sldId="257"/>
+        </pc:sldMkLst>
+      </pc:sldChg>
+      <pc:sldChg chg="del">
+        <pc:chgData name="ARJUN AVALAKKI MOHAN" userId="be4ab9aaf12c5868" providerId="LiveId" clId="{C81E60EF-EF5F-4B4B-A4E1-3178676F15CC}" dt="2026-06-02T04:20:32.733" v="169" actId="47"/>
+        <pc:sldMkLst>
+          <pc:docMk/>
+          <pc:sldMk cId="0" sldId="258"/>
+        </pc:sldMkLst>
       </pc:sldChg>
       <pc:sldChg chg="addSp delSp modSp mod">
         <pc:chgData name="ARJUN AVALAKKI MOHAN" userId="be4ab9aaf12c5868" providerId="LiveId" clId="{C81E60EF-EF5F-4B4B-A4E1-3178676F15CC}" dt="2026-05-27T04:15:22.659" v="86" actId="255"/>
@@ -353,13 +363,44 @@
         </pc:picChg>
       </pc:sldChg>
       <pc:sldChg chg="addSp delSp modSp mod modNotes">
-        <pc:chgData name="ARJUN AVALAKKI MOHAN" userId="be4ab9aaf12c5868" providerId="LiveId" clId="{C81E60EF-EF5F-4B4B-A4E1-3178676F15CC}" dt="2026-06-01T05:17:24.337" v="135" actId="20577"/>
+        <pc:chgData name="ARJUN AVALAKKI MOHAN" userId="be4ab9aaf12c5868" providerId="LiveId" clId="{C81E60EF-EF5F-4B4B-A4E1-3178676F15CC}" dt="2026-06-02T05:08:38.603" v="607" actId="113"/>
+        <pc:sldMkLst>
+          <pc:docMk/>
+          <pc:sldMk cId="0" sldId="265"/>
+        </pc:sldMkLst>
+        <pc:spChg chg="add del mod">
+          <ac:chgData name="ARJUN AVALAKKI MOHAN" userId="be4ab9aaf12c5868" providerId="LiveId" clId="{C81E60EF-EF5F-4B4B-A4E1-3178676F15CC}" dt="2026-06-02T05:07:57.440" v="597" actId="478"/>
+          <ac:spMkLst>
+            <pc:docMk/>
+            <pc:sldMk cId="0" sldId="265"/>
+            <ac:spMk id="3" creationId="{7B996978-7489-69AE-5274-7D68F8258D72}"/>
+          </ac:spMkLst>
+        </pc:spChg>
+        <pc:spChg chg="add mod">
+          <ac:chgData name="ARJUN AVALAKKI MOHAN" userId="be4ab9aaf12c5868" providerId="LiveId" clId="{C81E60EF-EF5F-4B4B-A4E1-3178676F15CC}" dt="2026-06-02T05:08:38.603" v="607" actId="113"/>
+          <ac:spMkLst>
+            <pc:docMk/>
+            <pc:sldMk cId="0" sldId="265"/>
+            <ac:spMk id="5" creationId="{1C653097-FEC9-05E6-DFA6-D0B3B22F3299}"/>
+          </ac:spMkLst>
+        </pc:spChg>
+        <pc:spChg chg="del mod">
+          <ac:chgData name="ARJUN AVALAKKI MOHAN" userId="be4ab9aaf12c5868" providerId="LiveId" clId="{C81E60EF-EF5F-4B4B-A4E1-3178676F15CC}" dt="2026-06-02T05:07:52.119" v="596" actId="478"/>
+          <ac:spMkLst>
+            <pc:docMk/>
+            <pc:sldMk cId="0" sldId="265"/>
+            <ac:spMk id="241" creationId="{00000000-0000-0000-0000-000000000000}"/>
+          </ac:spMkLst>
+        </pc:spChg>
+      </pc:sldChg>
+      <pc:sldChg chg="addSp delSp modSp mod modNotes">
+        <pc:chgData name="ARJUN AVALAKKI MOHAN" userId="be4ab9aaf12c5868" providerId="LiveId" clId="{C81E60EF-EF5F-4B4B-A4E1-3178676F15CC}" dt="2026-06-02T04:24:44.207" v="178" actId="108"/>
         <pc:sldMkLst>
           <pc:docMk/>
           <pc:sldMk cId="0" sldId="269"/>
         </pc:sldMkLst>
         <pc:spChg chg="add mod">
-          <ac:chgData name="ARJUN AVALAKKI MOHAN" userId="be4ab9aaf12c5868" providerId="LiveId" clId="{C81E60EF-EF5F-4B4B-A4E1-3178676F15CC}" dt="2026-06-01T05:17:24.337" v="135" actId="20577"/>
+          <ac:chgData name="ARJUN AVALAKKI MOHAN" userId="be4ab9aaf12c5868" providerId="LiveId" clId="{C81E60EF-EF5F-4B4B-A4E1-3178676F15CC}" dt="2026-06-02T04:24:44.207" v="178" actId="108"/>
           <ac:spMkLst>
             <pc:docMk/>
             <pc:sldMk cId="0" sldId="269"/>
@@ -400,7 +441,7 @@
         </pc:picChg>
       </pc:sldChg>
       <pc:sldChg chg="addSp delSp modSp mod">
-        <pc:chgData name="ARJUN AVALAKKI MOHAN" userId="be4ab9aaf12c5868" providerId="LiveId" clId="{C81E60EF-EF5F-4B4B-A4E1-3178676F15CC}" dt="2026-06-01T07:19:11.880" v="167" actId="1076"/>
+        <pc:chgData name="ARJUN AVALAKKI MOHAN" userId="be4ab9aaf12c5868" providerId="LiveId" clId="{C81E60EF-EF5F-4B4B-A4E1-3178676F15CC}" dt="2026-06-02T04:22:18.350" v="174" actId="122"/>
         <pc:sldMkLst>
           <pc:docMk/>
           <pc:sldMk cId="0" sldId="271"/>
@@ -414,7 +455,7 @@
           </ac:spMkLst>
         </pc:spChg>
         <pc:spChg chg="add mod">
-          <ac:chgData name="ARJUN AVALAKKI MOHAN" userId="be4ab9aaf12c5868" providerId="LiveId" clId="{C81E60EF-EF5F-4B4B-A4E1-3178676F15CC}" dt="2026-06-01T05:33:10.079" v="164" actId="1076"/>
+          <ac:chgData name="ARJUN AVALAKKI MOHAN" userId="be4ab9aaf12c5868" providerId="LiveId" clId="{C81E60EF-EF5F-4B4B-A4E1-3178676F15CC}" dt="2026-06-02T04:22:18.350" v="174" actId="122"/>
           <ac:spMkLst>
             <pc:docMk/>
             <pc:sldMk cId="0" sldId="271"/>
@@ -438,7 +479,7 @@
           </ac:spMkLst>
         </pc:spChg>
         <pc:picChg chg="add mod">
-          <ac:chgData name="ARJUN AVALAKKI MOHAN" userId="be4ab9aaf12c5868" providerId="LiveId" clId="{C81E60EF-EF5F-4B4B-A4E1-3178676F15CC}" dt="2026-06-01T07:19:11.880" v="167" actId="1076"/>
+          <ac:chgData name="ARJUN AVALAKKI MOHAN" userId="be4ab9aaf12c5868" providerId="LiveId" clId="{C81E60EF-EF5F-4B4B-A4E1-3178676F15CC}" dt="2026-06-02T04:22:04.696" v="171" actId="1076"/>
           <ac:picMkLst>
             <pc:docMk/>
             <pc:sldMk cId="0" sldId="271"/>
@@ -453,6 +494,105 @@
             <ac:picMk id="276" creationId="{00000000-0000-0000-0000-000000000000}"/>
           </ac:picMkLst>
         </pc:picChg>
+      </pc:sldChg>
+      <pc:sldChg chg="addSp modSp mod">
+        <pc:chgData name="ARJUN AVALAKKI MOHAN" userId="be4ab9aaf12c5868" providerId="LiveId" clId="{C81E60EF-EF5F-4B4B-A4E1-3178676F15CC}" dt="2026-06-02T04:36:48.803" v="346" actId="14100"/>
+        <pc:sldMkLst>
+          <pc:docMk/>
+          <pc:sldMk cId="0" sldId="272"/>
+        </pc:sldMkLst>
+        <pc:spChg chg="add mod">
+          <ac:chgData name="ARJUN AVALAKKI MOHAN" userId="be4ab9aaf12c5868" providerId="LiveId" clId="{C81E60EF-EF5F-4B4B-A4E1-3178676F15CC}" dt="2026-06-02T04:35:54.997" v="345" actId="6549"/>
+          <ac:spMkLst>
+            <pc:docMk/>
+            <pc:sldMk cId="0" sldId="272"/>
+            <ac:spMk id="3" creationId="{333F703D-50D5-0B2E-AA65-37926A25D14B}"/>
+          </ac:spMkLst>
+        </pc:spChg>
+        <pc:spChg chg="mod">
+          <ac:chgData name="ARJUN AVALAKKI MOHAN" userId="be4ab9aaf12c5868" providerId="LiveId" clId="{C81E60EF-EF5F-4B4B-A4E1-3178676F15CC}" dt="2026-06-02T04:36:48.803" v="346" actId="14100"/>
+          <ac:spMkLst>
+            <pc:docMk/>
+            <pc:sldMk cId="0" sldId="272"/>
+            <ac:spMk id="281" creationId="{00000000-0000-0000-0000-000000000000}"/>
+          </ac:spMkLst>
+        </pc:spChg>
+      </pc:sldChg>
+      <pc:sldChg chg="addSp delSp modSp mod">
+        <pc:chgData name="ARJUN AVALAKKI MOHAN" userId="be4ab9aaf12c5868" providerId="LiveId" clId="{C81E60EF-EF5F-4B4B-A4E1-3178676F15CC}" dt="2026-06-02T05:00:12.437" v="547"/>
+        <pc:sldMkLst>
+          <pc:docMk/>
+          <pc:sldMk cId="0" sldId="274"/>
+        </pc:sldMkLst>
+        <pc:spChg chg="add del mod">
+          <ac:chgData name="ARJUN AVALAKKI MOHAN" userId="be4ab9aaf12c5868" providerId="LiveId" clId="{C81E60EF-EF5F-4B4B-A4E1-3178676F15CC}" dt="2026-06-02T04:46:01.913" v="464" actId="478"/>
+          <ac:spMkLst>
+            <pc:docMk/>
+            <pc:sldMk cId="0" sldId="274"/>
+            <ac:spMk id="5" creationId="{62C9EB06-A0E3-DF57-C30E-0F25595172D1}"/>
+          </ac:spMkLst>
+        </pc:spChg>
+        <pc:spChg chg="del mod">
+          <ac:chgData name="ARJUN AVALAKKI MOHAN" userId="be4ab9aaf12c5868" providerId="LiveId" clId="{C81E60EF-EF5F-4B4B-A4E1-3178676F15CC}" dt="2026-06-02T04:45:58.715" v="463" actId="478"/>
+          <ac:spMkLst>
+            <pc:docMk/>
+            <pc:sldMk cId="0" sldId="274"/>
+            <ac:spMk id="292" creationId="{00000000-0000-0000-0000-000000000000}"/>
+          </ac:spMkLst>
+        </pc:spChg>
+        <pc:graphicFrameChg chg="add del mod modGraphic">
+          <ac:chgData name="ARJUN AVALAKKI MOHAN" userId="be4ab9aaf12c5868" providerId="LiveId" clId="{C81E60EF-EF5F-4B4B-A4E1-3178676F15CC}" dt="2026-06-02T04:45:40.809" v="460" actId="478"/>
+          <ac:graphicFrameMkLst>
+            <pc:docMk/>
+            <pc:sldMk cId="0" sldId="274"/>
+            <ac:graphicFrameMk id="2" creationId="{8F7FC879-E6FD-891D-D946-BC13E6FFADB6}"/>
+          </ac:graphicFrameMkLst>
+        </pc:graphicFrameChg>
+        <pc:graphicFrameChg chg="add mod modGraphic">
+          <ac:chgData name="ARJUN AVALAKKI MOHAN" userId="be4ab9aaf12c5868" providerId="LiveId" clId="{C81E60EF-EF5F-4B4B-A4E1-3178676F15CC}" dt="2026-06-02T05:00:12.437" v="547"/>
+          <ac:graphicFrameMkLst>
+            <pc:docMk/>
+            <pc:sldMk cId="0" sldId="274"/>
+            <ac:graphicFrameMk id="3" creationId="{0C10C70B-A6D6-9B57-1500-ABDB09F363B0}"/>
+          </ac:graphicFrameMkLst>
+        </pc:graphicFrameChg>
+      </pc:sldChg>
+      <pc:sldChg chg="addSp delSp modSp mod">
+        <pc:chgData name="ARJUN AVALAKKI MOHAN" userId="be4ab9aaf12c5868" providerId="LiveId" clId="{C81E60EF-EF5F-4B4B-A4E1-3178676F15CC}" dt="2026-06-02T05:05:10.293" v="590" actId="20577"/>
+        <pc:sldMkLst>
+          <pc:docMk/>
+          <pc:sldMk cId="0" sldId="276"/>
+        </pc:sldMkLst>
+        <pc:spChg chg="add mod">
+          <ac:chgData name="ARJUN AVALAKKI MOHAN" userId="be4ab9aaf12c5868" providerId="LiveId" clId="{C81E60EF-EF5F-4B4B-A4E1-3178676F15CC}" dt="2026-06-02T05:05:10.293" v="590" actId="20577"/>
+          <ac:spMkLst>
+            <pc:docMk/>
+            <pc:sldMk cId="0" sldId="276"/>
+            <ac:spMk id="3" creationId="{8782DC50-C671-C8A0-8A70-6A7C7D8B82F1}"/>
+          </ac:spMkLst>
+        </pc:spChg>
+        <pc:spChg chg="del">
+          <ac:chgData name="ARJUN AVALAKKI MOHAN" userId="be4ab9aaf12c5868" providerId="LiveId" clId="{C81E60EF-EF5F-4B4B-A4E1-3178676F15CC}" dt="2026-06-02T05:00:05.382" v="544" actId="478"/>
+          <ac:spMkLst>
+            <pc:docMk/>
+            <pc:sldMk cId="0" sldId="276"/>
+            <ac:spMk id="303" creationId="{00000000-0000-0000-0000-000000000000}"/>
+          </ac:spMkLst>
+        </pc:spChg>
+      </pc:sldChg>
+      <pc:sldChg chg="del">
+        <pc:chgData name="ARJUN AVALAKKI MOHAN" userId="be4ab9aaf12c5868" providerId="LiveId" clId="{C81E60EF-EF5F-4B4B-A4E1-3178676F15CC}" dt="2026-06-02T05:05:58.068" v="591" actId="47"/>
+        <pc:sldMkLst>
+          <pc:docMk/>
+          <pc:sldMk cId="0" sldId="277"/>
+        </pc:sldMkLst>
+      </pc:sldChg>
+      <pc:sldChg chg="del">
+        <pc:chgData name="ARJUN AVALAKKI MOHAN" userId="be4ab9aaf12c5868" providerId="LiveId" clId="{C81E60EF-EF5F-4B4B-A4E1-3178676F15CC}" dt="2026-06-02T05:06:00.133" v="592" actId="47"/>
+        <pc:sldMkLst>
+          <pc:docMk/>
+          <pc:sldMk cId="0" sldId="278"/>
+        </pc:sldMkLst>
       </pc:sldChg>
     </pc:docChg>
   </pc:docChgLst>
@@ -1009,218 +1149,6 @@
   <p:cSld>
     <p:spTree>
       <p:nvGrpSpPr>
-        <p:cNvPr id="1" name="Shape 237"/>
-        <p:cNvGrpSpPr/>
-        <p:nvPr/>
-      </p:nvGrpSpPr>
-      <p:grpSpPr>
-        <a:xfrm>
-          <a:off x="0" y="0"/>
-          <a:ext cx="0" cy="0"/>
-          <a:chOff x="0" y="0"/>
-          <a:chExt cx="0" cy="0"/>
-        </a:xfrm>
-      </p:grpSpPr>
-      <p:sp>
-        <p:nvSpPr>
-          <p:cNvPr id="238" name="Google Shape;238;g8d8c850c25_0_103:notes"/>
-          <p:cNvSpPr>
-            <a:spLocks noGrp="1" noRot="1" noChangeAspect="1"/>
-          </p:cNvSpPr>
-          <p:nvPr>
-            <p:ph type="sldImg" idx="2"/>
-          </p:nvPr>
-        </p:nvSpPr>
-        <p:spPr>
-          <a:xfrm>
-            <a:off x="2104459" y="685800"/>
-            <a:ext cx="2649600" cy="3429000"/>
-          </a:xfrm>
-          <a:custGeom>
-            <a:avLst/>
-            <a:gdLst/>
-            <a:ahLst/>
-            <a:cxnLst/>
-            <a:rect l="l" t="t" r="r" b="b"/>
-            <a:pathLst>
-              <a:path w="120000" h="120000" extrusionOk="0">
-                <a:moveTo>
-                  <a:pt x="0" y="0"/>
-                </a:moveTo>
-                <a:lnTo>
-                  <a:pt x="120000" y="0"/>
-                </a:lnTo>
-                <a:lnTo>
-                  <a:pt x="120000" y="120000"/>
-                </a:lnTo>
-                <a:lnTo>
-                  <a:pt x="0" y="120000"/>
-                </a:lnTo>
-                <a:close/>
-              </a:path>
-            </a:pathLst>
-          </a:custGeom>
-        </p:spPr>
-      </p:sp>
-      <p:sp>
-        <p:nvSpPr>
-          <p:cNvPr id="239" name="Google Shape;239;g8d8c850c25_0_103:notes"/>
-          <p:cNvSpPr txBox="1">
-            <a:spLocks noGrp="1"/>
-          </p:cNvSpPr>
-          <p:nvPr>
-            <p:ph type="body" idx="1"/>
-          </p:nvPr>
-        </p:nvSpPr>
-        <p:spPr>
-          <a:xfrm>
-            <a:off x="685800" y="4343400"/>
-            <a:ext cx="5486400" cy="4114800"/>
-          </a:xfrm>
-          <a:prstGeom prst="rect">
-            <a:avLst/>
-          </a:prstGeom>
-        </p:spPr>
-        <p:txBody>
-          <a:bodyPr spcFirstLastPara="1" wrap="square" lIns="91425" tIns="91425" rIns="91425" bIns="91425" anchor="t" anchorCtr="0">
-            <a:noAutofit/>
-          </a:bodyPr>
-          <a:lstStyle/>
-          <a:p>
-            <a:pPr marL="0" lvl="0" indent="0" algn="l" rtl="0">
-              <a:spcBef>
-                <a:spcPts val="0"/>
-              </a:spcBef>
-              <a:spcAft>
-                <a:spcPts val="0"/>
-              </a:spcAft>
-              <a:buNone/>
-            </a:pPr>
-            <a:endParaRPr/>
-          </a:p>
-        </p:txBody>
-      </p:sp>
-    </p:spTree>
-  </p:cSld>
-  <p:clrMapOvr>
-    <a:masterClrMapping/>
-  </p:clrMapOvr>
-</p:notes>
-</file>
-
-<file path=ppt/notesSlides/notesSlide11.xml><?xml version="1.0" encoding="utf-8"?>
-<p:notes xmlns:a="http://schemas.openxmlformats.org/drawingml/2006/main" xmlns:r="http://schemas.openxmlformats.org/officeDocument/2006/relationships" xmlns:p="http://schemas.openxmlformats.org/presentationml/2006/main" showMasterSp="0" showMasterPhAnim="0">
-  <p:cSld>
-    <p:spTree>
-      <p:nvGrpSpPr>
-        <p:cNvPr id="1" name="Shape 242"/>
-        <p:cNvGrpSpPr/>
-        <p:nvPr/>
-      </p:nvGrpSpPr>
-      <p:grpSpPr>
-        <a:xfrm>
-          <a:off x="0" y="0"/>
-          <a:ext cx="0" cy="0"/>
-          <a:chOff x="0" y="0"/>
-          <a:chExt cx="0" cy="0"/>
-        </a:xfrm>
-      </p:grpSpPr>
-      <p:sp>
-        <p:nvSpPr>
-          <p:cNvPr id="243" name="Google Shape;243;g64b864f3db_0_1:notes"/>
-          <p:cNvSpPr txBox="1">
-            <a:spLocks noGrp="1"/>
-          </p:cNvSpPr>
-          <p:nvPr>
-            <p:ph type="body" idx="1"/>
-          </p:nvPr>
-        </p:nvSpPr>
-        <p:spPr>
-          <a:xfrm>
-            <a:off x="914400" y="4343400"/>
-            <a:ext cx="5029200" cy="4114800"/>
-          </a:xfrm>
-          <a:prstGeom prst="rect">
-            <a:avLst/>
-          </a:prstGeom>
-          <a:noFill/>
-          <a:ln>
-            <a:noFill/>
-          </a:ln>
-        </p:spPr>
-        <p:txBody>
-          <a:bodyPr spcFirstLastPara="1" wrap="square" lIns="91425" tIns="91425" rIns="91425" bIns="91425" anchor="ctr" anchorCtr="0">
-            <a:noAutofit/>
-          </a:bodyPr>
-          <a:lstStyle/>
-          <a:p>
-            <a:pPr marL="0" lvl="0" indent="0" algn="l" rtl="0">
-              <a:spcBef>
-                <a:spcPts val="0"/>
-              </a:spcBef>
-              <a:spcAft>
-                <a:spcPts val="0"/>
-              </a:spcAft>
-              <a:buNone/>
-            </a:pPr>
-            <a:endParaRPr/>
-          </a:p>
-        </p:txBody>
-      </p:sp>
-      <p:sp>
-        <p:nvSpPr>
-          <p:cNvPr id="244" name="Google Shape;244;g64b864f3db_0_1:notes"/>
-          <p:cNvSpPr>
-            <a:spLocks noGrp="1" noRot="1" noChangeAspect="1"/>
-          </p:cNvSpPr>
-          <p:nvPr>
-            <p:ph type="sldImg" idx="2"/>
-          </p:nvPr>
-        </p:nvSpPr>
-        <p:spPr>
-          <a:xfrm>
-            <a:off x="2435369" y="685800"/>
-            <a:ext cx="1987200" cy="3429000"/>
-          </a:xfrm>
-          <a:custGeom>
-            <a:avLst/>
-            <a:gdLst/>
-            <a:ahLst/>
-            <a:cxnLst/>
-            <a:rect l="l" t="t" r="r" b="b"/>
-            <a:pathLst>
-              <a:path w="120000" h="120000" extrusionOk="0">
-                <a:moveTo>
-                  <a:pt x="0" y="0"/>
-                </a:moveTo>
-                <a:lnTo>
-                  <a:pt x="120000" y="0"/>
-                </a:lnTo>
-                <a:lnTo>
-                  <a:pt x="120000" y="120000"/>
-                </a:lnTo>
-                <a:lnTo>
-                  <a:pt x="0" y="120000"/>
-                </a:lnTo>
-                <a:close/>
-              </a:path>
-            </a:pathLst>
-          </a:custGeom>
-        </p:spPr>
-      </p:sp>
-    </p:spTree>
-  </p:cSld>
-  <p:clrMapOvr>
-    <a:masterClrMapping/>
-  </p:clrMapOvr>
-</p:notes>
-</file>
-
-<file path=ppt/notesSlides/notesSlide12.xml><?xml version="1.0" encoding="utf-8"?>
-<p:notes xmlns:a="http://schemas.openxmlformats.org/drawingml/2006/main" xmlns:r="http://schemas.openxmlformats.org/officeDocument/2006/relationships" xmlns:p="http://schemas.openxmlformats.org/presentationml/2006/main" showMasterSp="0" showMasterPhAnim="0">
-  <p:cSld>
-    <p:spTree>
-      <p:nvGrpSpPr>
         <p:cNvPr id="1" name="Shape 248"/>
         <p:cNvGrpSpPr/>
         <p:nvPr/>
@@ -1320,7 +1248,7 @@
 </p:notes>
 </file>
 
-<file path=ppt/notesSlides/notesSlide13.xml><?xml version="1.0" encoding="utf-8"?>
+<file path=ppt/notesSlides/notesSlide11.xml><?xml version="1.0" encoding="utf-8"?>
 <p:notes xmlns:a="http://schemas.openxmlformats.org/drawingml/2006/main" xmlns:r="http://schemas.openxmlformats.org/officeDocument/2006/relationships" xmlns:p="http://schemas.openxmlformats.org/presentationml/2006/main" showMasterSp="0" showMasterPhAnim="0">
   <p:cSld>
     <p:spTree>
@@ -1428,7 +1356,7 @@
 </p:notes>
 </file>
 
-<file path=ppt/notesSlides/notesSlide14.xml><?xml version="1.0" encoding="utf-8"?>
+<file path=ppt/notesSlides/notesSlide12.xml><?xml version="1.0" encoding="utf-8"?>
 <p:notes xmlns:a="http://schemas.openxmlformats.org/drawingml/2006/main" xmlns:r="http://schemas.openxmlformats.org/officeDocument/2006/relationships" xmlns:p="http://schemas.openxmlformats.org/presentationml/2006/main" showMasterSp="0" showMasterPhAnim="0">
   <p:cSld>
     <p:spTree>
@@ -1532,7 +1460,7 @@
 </p:notes>
 </file>
 
-<file path=ppt/notesSlides/notesSlide15.xml><?xml version="1.0" encoding="utf-8"?>
+<file path=ppt/notesSlides/notesSlide13.xml><?xml version="1.0" encoding="utf-8"?>
 <p:notes xmlns:a="http://schemas.openxmlformats.org/drawingml/2006/main" xmlns:r="http://schemas.openxmlformats.org/officeDocument/2006/relationships" xmlns:p="http://schemas.openxmlformats.org/presentationml/2006/main" showMasterSp="0" showMasterPhAnim="0">
   <p:cSld>
     <p:spTree>
@@ -1640,7 +1568,7 @@
 </p:notes>
 </file>
 
-<file path=ppt/notesSlides/notesSlide16.xml><?xml version="1.0" encoding="utf-8"?>
+<file path=ppt/notesSlides/notesSlide14.xml><?xml version="1.0" encoding="utf-8"?>
 <p:notes xmlns:a="http://schemas.openxmlformats.org/drawingml/2006/main" xmlns:r="http://schemas.openxmlformats.org/officeDocument/2006/relationships" xmlns:p="http://schemas.openxmlformats.org/presentationml/2006/main" showMasterSp="0" showMasterPhAnim="0">
   <p:cSld>
     <p:spTree>
@@ -1744,7 +1672,7 @@
 </p:notes>
 </file>
 
-<file path=ppt/notesSlides/notesSlide17.xml><?xml version="1.0" encoding="utf-8"?>
+<file path=ppt/notesSlides/notesSlide15.xml><?xml version="1.0" encoding="utf-8"?>
 <p:notes xmlns:a="http://schemas.openxmlformats.org/drawingml/2006/main" xmlns:r="http://schemas.openxmlformats.org/officeDocument/2006/relationships" xmlns:p="http://schemas.openxmlformats.org/presentationml/2006/main" showMasterSp="0" showMasterPhAnim="0">
   <p:cSld>
     <p:spTree>
@@ -1773,8 +1701,8 @@
         </p:nvSpPr>
         <p:spPr>
           <a:xfrm>
-            <a:off x="2104459" y="685800"/>
-            <a:ext cx="2649600" cy="3429000"/>
+            <a:off x="2105025" y="685800"/>
+            <a:ext cx="2649538" cy="3429000"/>
           </a:xfrm>
           <a:custGeom>
             <a:avLst/>
@@ -1848,7 +1776,7 @@
 </p:notes>
 </file>
 
-<file path=ppt/notesSlides/notesSlide18.xml><?xml version="1.0" encoding="utf-8"?>
+<file path=ppt/notesSlides/notesSlide16.xml><?xml version="1.0" encoding="utf-8"?>
 <p:notes xmlns:a="http://schemas.openxmlformats.org/drawingml/2006/main" xmlns:r="http://schemas.openxmlformats.org/officeDocument/2006/relationships" xmlns:p="http://schemas.openxmlformats.org/presentationml/2006/main" showMasterSp="0" showMasterPhAnim="0">
   <p:cSld>
     <p:spTree>
@@ -1956,7 +1884,7 @@
 </p:notes>
 </file>
 
-<file path=ppt/notesSlides/notesSlide19.xml><?xml version="1.0" encoding="utf-8"?>
+<file path=ppt/notesSlides/notesSlide17.xml><?xml version="1.0" encoding="utf-8"?>
 <p:notes xmlns:a="http://schemas.openxmlformats.org/drawingml/2006/main" xmlns:r="http://schemas.openxmlformats.org/officeDocument/2006/relationships" xmlns:p="http://schemas.openxmlformats.org/presentationml/2006/main" showMasterSp="0" showMasterPhAnim="0">
   <p:cSld>
     <p:spTree>
@@ -1985,8 +1913,8 @@
         </p:nvSpPr>
         <p:spPr>
           <a:xfrm>
-            <a:off x="2104459" y="685800"/>
-            <a:ext cx="2649600" cy="3429000"/>
+            <a:off x="2105025" y="685800"/>
+            <a:ext cx="2649538" cy="3429000"/>
           </a:xfrm>
           <a:custGeom>
             <a:avLst/>
@@ -2060,111 +1988,7 @@
 </p:notes>
 </file>
 
-<file path=ppt/notesSlides/notesSlide2.xml><?xml version="1.0" encoding="utf-8"?>
-<p:notes xmlns:a="http://schemas.openxmlformats.org/drawingml/2006/main" xmlns:r="http://schemas.openxmlformats.org/officeDocument/2006/relationships" xmlns:p="http://schemas.openxmlformats.org/presentationml/2006/main" showMasterSp="0" showMasterPhAnim="0">
-  <p:cSld>
-    <p:spTree>
-      <p:nvGrpSpPr>
-        <p:cNvPr id="1" name="Shape 181"/>
-        <p:cNvGrpSpPr/>
-        <p:nvPr/>
-      </p:nvGrpSpPr>
-      <p:grpSpPr>
-        <a:xfrm>
-          <a:off x="0" y="0"/>
-          <a:ext cx="0" cy="0"/>
-          <a:chOff x="0" y="0"/>
-          <a:chExt cx="0" cy="0"/>
-        </a:xfrm>
-      </p:grpSpPr>
-      <p:sp>
-        <p:nvSpPr>
-          <p:cNvPr id="182" name="Google Shape;182;g9cfc2a9a8d_0_5:notes"/>
-          <p:cNvSpPr>
-            <a:spLocks noGrp="1" noRot="1" noChangeAspect="1"/>
-          </p:cNvSpPr>
-          <p:nvPr>
-            <p:ph type="sldImg" idx="2"/>
-          </p:nvPr>
-        </p:nvSpPr>
-        <p:spPr>
-          <a:xfrm>
-            <a:off x="2104459" y="685800"/>
-            <a:ext cx="2649600" cy="3429000"/>
-          </a:xfrm>
-          <a:custGeom>
-            <a:avLst/>
-            <a:gdLst/>
-            <a:ahLst/>
-            <a:cxnLst/>
-            <a:rect l="l" t="t" r="r" b="b"/>
-            <a:pathLst>
-              <a:path w="120000" h="120000" extrusionOk="0">
-                <a:moveTo>
-                  <a:pt x="0" y="0"/>
-                </a:moveTo>
-                <a:lnTo>
-                  <a:pt x="120000" y="0"/>
-                </a:lnTo>
-                <a:lnTo>
-                  <a:pt x="120000" y="120000"/>
-                </a:lnTo>
-                <a:lnTo>
-                  <a:pt x="0" y="120000"/>
-                </a:lnTo>
-                <a:close/>
-              </a:path>
-            </a:pathLst>
-          </a:custGeom>
-        </p:spPr>
-      </p:sp>
-      <p:sp>
-        <p:nvSpPr>
-          <p:cNvPr id="183" name="Google Shape;183;g9cfc2a9a8d_0_5:notes"/>
-          <p:cNvSpPr txBox="1">
-            <a:spLocks noGrp="1"/>
-          </p:cNvSpPr>
-          <p:nvPr>
-            <p:ph type="body" idx="1"/>
-          </p:nvPr>
-        </p:nvSpPr>
-        <p:spPr>
-          <a:xfrm>
-            <a:off x="685800" y="4343400"/>
-            <a:ext cx="5486400" cy="4114800"/>
-          </a:xfrm>
-          <a:prstGeom prst="rect">
-            <a:avLst/>
-          </a:prstGeom>
-        </p:spPr>
-        <p:txBody>
-          <a:bodyPr spcFirstLastPara="1" wrap="square" lIns="91425" tIns="91425" rIns="91425" bIns="91425" anchor="t" anchorCtr="0">
-            <a:noAutofit/>
-          </a:bodyPr>
-          <a:lstStyle/>
-          <a:p>
-            <a:pPr marL="0" lvl="0" indent="0" algn="l" rtl="0">
-              <a:spcBef>
-                <a:spcPts val="0"/>
-              </a:spcBef>
-              <a:spcAft>
-                <a:spcPts val="0"/>
-              </a:spcAft>
-              <a:buNone/>
-            </a:pPr>
-            <a:endParaRPr/>
-          </a:p>
-        </p:txBody>
-      </p:sp>
-    </p:spTree>
-  </p:cSld>
-  <p:clrMapOvr>
-    <a:masterClrMapping/>
-  </p:clrMapOvr>
-</p:notes>
-</file>
-
-<file path=ppt/notesSlides/notesSlide20.xml><?xml version="1.0" encoding="utf-8"?>
+<file path=ppt/notesSlides/notesSlide18.xml><?xml version="1.0" encoding="utf-8"?>
 <p:notes xmlns:a="http://schemas.openxmlformats.org/drawingml/2006/main" xmlns:r="http://schemas.openxmlformats.org/officeDocument/2006/relationships" xmlns:p="http://schemas.openxmlformats.org/presentationml/2006/main" showMasterSp="0" showMasterPhAnim="0">
   <p:cSld>
     <p:spTree>
@@ -2272,7 +2096,7 @@
 </p:notes>
 </file>
 
-<file path=ppt/notesSlides/notesSlide21.xml><?xml version="1.0" encoding="utf-8"?>
+<file path=ppt/notesSlides/notesSlide19.xml><?xml version="1.0" encoding="utf-8"?>
 <p:notes xmlns:a="http://schemas.openxmlformats.org/drawingml/2006/main" xmlns:r="http://schemas.openxmlformats.org/officeDocument/2006/relationships" xmlns:p="http://schemas.openxmlformats.org/presentationml/2006/main" showMasterSp="0" showMasterPhAnim="0">
   <p:cSld>
     <p:spTree>
@@ -2301,8 +2125,8 @@
         </p:nvSpPr>
         <p:spPr>
           <a:xfrm>
-            <a:off x="2104480" y="685800"/>
-            <a:ext cx="2649600" cy="3429000"/>
+            <a:off x="2105025" y="685800"/>
+            <a:ext cx="2649538" cy="3429000"/>
           </a:xfrm>
           <a:custGeom>
             <a:avLst/>
@@ -2376,323 +2200,7 @@
 </p:notes>
 </file>
 
-<file path=ppt/notesSlides/notesSlide22.xml><?xml version="1.0" encoding="utf-8"?>
-<p:notes xmlns:a="http://schemas.openxmlformats.org/drawingml/2006/main" xmlns:r="http://schemas.openxmlformats.org/officeDocument/2006/relationships" xmlns:p="http://schemas.openxmlformats.org/presentationml/2006/main" showMasterSp="0" showMasterPhAnim="0">
-  <p:cSld>
-    <p:spTree>
-      <p:nvGrpSpPr>
-        <p:cNvPr id="1" name="Shape 304"/>
-        <p:cNvGrpSpPr/>
-        <p:nvPr/>
-      </p:nvGrpSpPr>
-      <p:grpSpPr>
-        <a:xfrm>
-          <a:off x="0" y="0"/>
-          <a:ext cx="0" cy="0"/>
-          <a:chOff x="0" y="0"/>
-          <a:chExt cx="0" cy="0"/>
-        </a:xfrm>
-      </p:grpSpPr>
-      <p:sp>
-        <p:nvSpPr>
-          <p:cNvPr id="305" name="Google Shape;305;g9b75228fd4_1_1:notes"/>
-          <p:cNvSpPr txBox="1">
-            <a:spLocks noGrp="1"/>
-          </p:cNvSpPr>
-          <p:nvPr>
-            <p:ph type="body" idx="1"/>
-          </p:nvPr>
-        </p:nvSpPr>
-        <p:spPr>
-          <a:xfrm>
-            <a:off x="914400" y="4343400"/>
-            <a:ext cx="5029200" cy="4114800"/>
-          </a:xfrm>
-          <a:prstGeom prst="rect">
-            <a:avLst/>
-          </a:prstGeom>
-          <a:noFill/>
-          <a:ln>
-            <a:noFill/>
-          </a:ln>
-        </p:spPr>
-        <p:txBody>
-          <a:bodyPr spcFirstLastPara="1" wrap="square" lIns="91425" tIns="91425" rIns="91425" bIns="91425" anchor="ctr" anchorCtr="0">
-            <a:noAutofit/>
-          </a:bodyPr>
-          <a:lstStyle/>
-          <a:p>
-            <a:pPr marL="0" lvl="0" indent="0" algn="l" rtl="0">
-              <a:spcBef>
-                <a:spcPts val="0"/>
-              </a:spcBef>
-              <a:spcAft>
-                <a:spcPts val="0"/>
-              </a:spcAft>
-              <a:buNone/>
-            </a:pPr>
-            <a:endParaRPr/>
-          </a:p>
-        </p:txBody>
-      </p:sp>
-      <p:sp>
-        <p:nvSpPr>
-          <p:cNvPr id="306" name="Google Shape;306;g9b75228fd4_1_1:notes"/>
-          <p:cNvSpPr>
-            <a:spLocks noGrp="1" noRot="1" noChangeAspect="1"/>
-          </p:cNvSpPr>
-          <p:nvPr>
-            <p:ph type="sldImg" idx="2"/>
-          </p:nvPr>
-        </p:nvSpPr>
-        <p:spPr>
-          <a:xfrm>
-            <a:off x="2435369" y="685800"/>
-            <a:ext cx="1987200" cy="3429000"/>
-          </a:xfrm>
-          <a:custGeom>
-            <a:avLst/>
-            <a:gdLst/>
-            <a:ahLst/>
-            <a:cxnLst/>
-            <a:rect l="l" t="t" r="r" b="b"/>
-            <a:pathLst>
-              <a:path w="120000" h="120000" extrusionOk="0">
-                <a:moveTo>
-                  <a:pt x="0" y="0"/>
-                </a:moveTo>
-                <a:lnTo>
-                  <a:pt x="120000" y="0"/>
-                </a:lnTo>
-                <a:lnTo>
-                  <a:pt x="120000" y="120000"/>
-                </a:lnTo>
-                <a:lnTo>
-                  <a:pt x="0" y="120000"/>
-                </a:lnTo>
-                <a:close/>
-              </a:path>
-            </a:pathLst>
-          </a:custGeom>
-        </p:spPr>
-      </p:sp>
-    </p:spTree>
-  </p:cSld>
-  <p:clrMapOvr>
-    <a:masterClrMapping/>
-  </p:clrMapOvr>
-</p:notes>
-</file>
-
-<file path=ppt/notesSlides/notesSlide23.xml><?xml version="1.0" encoding="utf-8"?>
-<p:notes xmlns:a="http://schemas.openxmlformats.org/drawingml/2006/main" xmlns:r="http://schemas.openxmlformats.org/officeDocument/2006/relationships" xmlns:p="http://schemas.openxmlformats.org/presentationml/2006/main" showMasterSp="0" showMasterPhAnim="0">
-  <p:cSld>
-    <p:spTree>
-      <p:nvGrpSpPr>
-        <p:cNvPr id="1" name="Shape 310"/>
-        <p:cNvGrpSpPr/>
-        <p:nvPr/>
-      </p:nvGrpSpPr>
-      <p:grpSpPr>
-        <a:xfrm>
-          <a:off x="0" y="0"/>
-          <a:ext cx="0" cy="0"/>
-          <a:chOff x="0" y="0"/>
-          <a:chExt cx="0" cy="0"/>
-        </a:xfrm>
-      </p:grpSpPr>
-      <p:sp>
-        <p:nvSpPr>
-          <p:cNvPr id="311" name="Google Shape;311;g9dd260ecd2_0_98:notes"/>
-          <p:cNvSpPr>
-            <a:spLocks noGrp="1" noRot="1" noChangeAspect="1"/>
-          </p:cNvSpPr>
-          <p:nvPr>
-            <p:ph type="sldImg" idx="2"/>
-          </p:nvPr>
-        </p:nvSpPr>
-        <p:spPr>
-          <a:xfrm>
-            <a:off x="2104459" y="685800"/>
-            <a:ext cx="2649600" cy="3429000"/>
-          </a:xfrm>
-          <a:custGeom>
-            <a:avLst/>
-            <a:gdLst/>
-            <a:ahLst/>
-            <a:cxnLst/>
-            <a:rect l="l" t="t" r="r" b="b"/>
-            <a:pathLst>
-              <a:path w="120000" h="120000" extrusionOk="0">
-                <a:moveTo>
-                  <a:pt x="0" y="0"/>
-                </a:moveTo>
-                <a:lnTo>
-                  <a:pt x="120000" y="0"/>
-                </a:lnTo>
-                <a:lnTo>
-                  <a:pt x="120000" y="120000"/>
-                </a:lnTo>
-                <a:lnTo>
-                  <a:pt x="0" y="120000"/>
-                </a:lnTo>
-                <a:close/>
-              </a:path>
-            </a:pathLst>
-          </a:custGeom>
-        </p:spPr>
-      </p:sp>
-      <p:sp>
-        <p:nvSpPr>
-          <p:cNvPr id="312" name="Google Shape;312;g9dd260ecd2_0_98:notes"/>
-          <p:cNvSpPr txBox="1">
-            <a:spLocks noGrp="1"/>
-          </p:cNvSpPr>
-          <p:nvPr>
-            <p:ph type="body" idx="1"/>
-          </p:nvPr>
-        </p:nvSpPr>
-        <p:spPr>
-          <a:xfrm>
-            <a:off x="685800" y="4343400"/>
-            <a:ext cx="5486400" cy="4114800"/>
-          </a:xfrm>
-          <a:prstGeom prst="rect">
-            <a:avLst/>
-          </a:prstGeom>
-        </p:spPr>
-        <p:txBody>
-          <a:bodyPr spcFirstLastPara="1" wrap="square" lIns="91425" tIns="91425" rIns="91425" bIns="91425" anchor="t" anchorCtr="0">
-            <a:noAutofit/>
-          </a:bodyPr>
-          <a:lstStyle/>
-          <a:p>
-            <a:pPr marL="0" lvl="0" indent="0" algn="l" rtl="0">
-              <a:spcBef>
-                <a:spcPts val="0"/>
-              </a:spcBef>
-              <a:spcAft>
-                <a:spcPts val="0"/>
-              </a:spcAft>
-              <a:buNone/>
-            </a:pPr>
-            <a:endParaRPr/>
-          </a:p>
-        </p:txBody>
-      </p:sp>
-    </p:spTree>
-  </p:cSld>
-  <p:clrMapOvr>
-    <a:masterClrMapping/>
-  </p:clrMapOvr>
-</p:notes>
-</file>
-
-<file path=ppt/notesSlides/notesSlide3.xml><?xml version="1.0" encoding="utf-8"?>
-<p:notes xmlns:a="http://schemas.openxmlformats.org/drawingml/2006/main" xmlns:r="http://schemas.openxmlformats.org/officeDocument/2006/relationships" xmlns:p="http://schemas.openxmlformats.org/presentationml/2006/main" showMasterSp="0" showMasterPhAnim="0">
-  <p:cSld>
-    <p:spTree>
-      <p:nvGrpSpPr>
-        <p:cNvPr id="1" name="Shape 189"/>
-        <p:cNvGrpSpPr/>
-        <p:nvPr/>
-      </p:nvGrpSpPr>
-      <p:grpSpPr>
-        <a:xfrm>
-          <a:off x="0" y="0"/>
-          <a:ext cx="0" cy="0"/>
-          <a:chOff x="0" y="0"/>
-          <a:chExt cx="0" cy="0"/>
-        </a:xfrm>
-      </p:grpSpPr>
-      <p:sp>
-        <p:nvSpPr>
-          <p:cNvPr id="190" name="Google Shape;190;g53cf50bd16_0_1:notes"/>
-          <p:cNvSpPr>
-            <a:spLocks noGrp="1" noRot="1" noChangeAspect="1"/>
-          </p:cNvSpPr>
-          <p:nvPr>
-            <p:ph type="sldImg" idx="2"/>
-          </p:nvPr>
-        </p:nvSpPr>
-        <p:spPr>
-          <a:xfrm>
-            <a:off x="2104459" y="685800"/>
-            <a:ext cx="2649600" cy="3429000"/>
-          </a:xfrm>
-          <a:custGeom>
-            <a:avLst/>
-            <a:gdLst/>
-            <a:ahLst/>
-            <a:cxnLst/>
-            <a:rect l="l" t="t" r="r" b="b"/>
-            <a:pathLst>
-              <a:path w="120000" h="120000" extrusionOk="0">
-                <a:moveTo>
-                  <a:pt x="0" y="0"/>
-                </a:moveTo>
-                <a:lnTo>
-                  <a:pt x="120000" y="0"/>
-                </a:lnTo>
-                <a:lnTo>
-                  <a:pt x="120000" y="120000"/>
-                </a:lnTo>
-                <a:lnTo>
-                  <a:pt x="0" y="120000"/>
-                </a:lnTo>
-                <a:close/>
-              </a:path>
-            </a:pathLst>
-          </a:custGeom>
-        </p:spPr>
-      </p:sp>
-      <p:sp>
-        <p:nvSpPr>
-          <p:cNvPr id="191" name="Google Shape;191;g53cf50bd16_0_1:notes"/>
-          <p:cNvSpPr txBox="1">
-            <a:spLocks noGrp="1"/>
-          </p:cNvSpPr>
-          <p:nvPr>
-            <p:ph type="body" idx="1"/>
-          </p:nvPr>
-        </p:nvSpPr>
-        <p:spPr>
-          <a:xfrm>
-            <a:off x="685800" y="4343400"/>
-            <a:ext cx="5486400" cy="4114800"/>
-          </a:xfrm>
-          <a:prstGeom prst="rect">
-            <a:avLst/>
-          </a:prstGeom>
-        </p:spPr>
-        <p:txBody>
-          <a:bodyPr spcFirstLastPara="1" wrap="square" lIns="91425" tIns="91425" rIns="91425" bIns="91425" anchor="t" anchorCtr="0">
-            <a:noAutofit/>
-          </a:bodyPr>
-          <a:lstStyle/>
-          <a:p>
-            <a:pPr marL="0" lvl="0" indent="0" algn="l" rtl="0">
-              <a:spcBef>
-                <a:spcPts val="0"/>
-              </a:spcBef>
-              <a:spcAft>
-                <a:spcPts val="0"/>
-              </a:spcAft>
-              <a:buNone/>
-            </a:pPr>
-            <a:endParaRPr/>
-          </a:p>
-        </p:txBody>
-      </p:sp>
-    </p:spTree>
-  </p:cSld>
-  <p:clrMapOvr>
-    <a:masterClrMapping/>
-  </p:clrMapOvr>
-</p:notes>
-</file>
-
-<file path=ppt/notesSlides/notesSlide4.xml><?xml version="1.0" encoding="utf-8"?>
+<file path=ppt/notesSlides/notesSlide2.xml><?xml version="1.0" encoding="utf-8"?>
 <p:notes xmlns:a="http://schemas.openxmlformats.org/drawingml/2006/main" xmlns:r="http://schemas.openxmlformats.org/officeDocument/2006/relationships" xmlns:p="http://schemas.openxmlformats.org/presentationml/2006/main" showMasterSp="0" showMasterPhAnim="0">
   <p:cSld>
     <p:spTree>
@@ -2796,7 +2304,7 @@
 </p:notes>
 </file>
 
-<file path=ppt/notesSlides/notesSlide5.xml><?xml version="1.0" encoding="utf-8"?>
+<file path=ppt/notesSlides/notesSlide3.xml><?xml version="1.0" encoding="utf-8"?>
 <p:notes xmlns:a="http://schemas.openxmlformats.org/drawingml/2006/main" xmlns:r="http://schemas.openxmlformats.org/officeDocument/2006/relationships" xmlns:p="http://schemas.openxmlformats.org/presentationml/2006/main" showMasterSp="0" showMasterPhAnim="0">
   <p:cSld>
     <p:spTree>
@@ -2900,7 +2408,7 @@
 </p:notes>
 </file>
 
-<file path=ppt/notesSlides/notesSlide6.xml><?xml version="1.0" encoding="utf-8"?>
+<file path=ppt/notesSlides/notesSlide4.xml><?xml version="1.0" encoding="utf-8"?>
 <p:notes xmlns:a="http://schemas.openxmlformats.org/drawingml/2006/main" xmlns:r="http://schemas.openxmlformats.org/officeDocument/2006/relationships" xmlns:p="http://schemas.openxmlformats.org/presentationml/2006/main" showMasterSp="0" showMasterPhAnim="0">
   <p:cSld>
     <p:spTree>
@@ -3008,7 +2516,7 @@
 </p:notes>
 </file>
 
-<file path=ppt/notesSlides/notesSlide7.xml><?xml version="1.0" encoding="utf-8"?>
+<file path=ppt/notesSlides/notesSlide5.xml><?xml version="1.0" encoding="utf-8"?>
 <p:notes xmlns:a="http://schemas.openxmlformats.org/drawingml/2006/main" xmlns:r="http://schemas.openxmlformats.org/officeDocument/2006/relationships" xmlns:p="http://schemas.openxmlformats.org/presentationml/2006/main" showMasterSp="0" showMasterPhAnim="0">
   <p:cSld>
     <p:spTree>
@@ -3112,7 +2620,7 @@
 </p:notes>
 </file>
 
-<file path=ppt/notesSlides/notesSlide8.xml><?xml version="1.0" encoding="utf-8"?>
+<file path=ppt/notesSlides/notesSlide6.xml><?xml version="1.0" encoding="utf-8"?>
 <p:notes xmlns:a="http://schemas.openxmlformats.org/drawingml/2006/main" xmlns:r="http://schemas.openxmlformats.org/officeDocument/2006/relationships" xmlns:p="http://schemas.openxmlformats.org/presentationml/2006/main" showMasterSp="0" showMasterPhAnim="0">
   <p:cSld>
     <p:spTree>
@@ -3216,7 +2724,7 @@
 </p:notes>
 </file>
 
-<file path=ppt/notesSlides/notesSlide9.xml><?xml version="1.0" encoding="utf-8"?>
+<file path=ppt/notesSlides/notesSlide7.xml><?xml version="1.0" encoding="utf-8"?>
 <p:notes xmlns:a="http://schemas.openxmlformats.org/drawingml/2006/main" xmlns:r="http://schemas.openxmlformats.org/officeDocument/2006/relationships" xmlns:p="http://schemas.openxmlformats.org/presentationml/2006/main" showMasterSp="0" showMasterPhAnim="0">
   <p:cSld>
     <p:spTree>
@@ -3278,6 +2786,218 @@
       <p:sp>
         <p:nvSpPr>
           <p:cNvPr id="233" name="Google Shape;233;g62fb0d8af8_0_0:notes"/>
+          <p:cNvSpPr>
+            <a:spLocks noGrp="1" noRot="1" noChangeAspect="1"/>
+          </p:cNvSpPr>
+          <p:nvPr>
+            <p:ph type="sldImg" idx="2"/>
+          </p:nvPr>
+        </p:nvSpPr>
+        <p:spPr>
+          <a:xfrm>
+            <a:off x="2435369" y="685800"/>
+            <a:ext cx="1987200" cy="3429000"/>
+          </a:xfrm>
+          <a:custGeom>
+            <a:avLst/>
+            <a:gdLst/>
+            <a:ahLst/>
+            <a:cxnLst/>
+            <a:rect l="l" t="t" r="r" b="b"/>
+            <a:pathLst>
+              <a:path w="120000" h="120000" extrusionOk="0">
+                <a:moveTo>
+                  <a:pt x="0" y="0"/>
+                </a:moveTo>
+                <a:lnTo>
+                  <a:pt x="120000" y="0"/>
+                </a:lnTo>
+                <a:lnTo>
+                  <a:pt x="120000" y="120000"/>
+                </a:lnTo>
+                <a:lnTo>
+                  <a:pt x="0" y="120000"/>
+                </a:lnTo>
+                <a:close/>
+              </a:path>
+            </a:pathLst>
+          </a:custGeom>
+        </p:spPr>
+      </p:sp>
+    </p:spTree>
+  </p:cSld>
+  <p:clrMapOvr>
+    <a:masterClrMapping/>
+  </p:clrMapOvr>
+</p:notes>
+</file>
+
+<file path=ppt/notesSlides/notesSlide8.xml><?xml version="1.0" encoding="utf-8"?>
+<p:notes xmlns:a="http://schemas.openxmlformats.org/drawingml/2006/main" xmlns:r="http://schemas.openxmlformats.org/officeDocument/2006/relationships" xmlns:p="http://schemas.openxmlformats.org/presentationml/2006/main" showMasterSp="0" showMasterPhAnim="0">
+  <p:cSld>
+    <p:spTree>
+      <p:nvGrpSpPr>
+        <p:cNvPr id="1" name="Shape 237"/>
+        <p:cNvGrpSpPr/>
+        <p:nvPr/>
+      </p:nvGrpSpPr>
+      <p:grpSpPr>
+        <a:xfrm>
+          <a:off x="0" y="0"/>
+          <a:ext cx="0" cy="0"/>
+          <a:chOff x="0" y="0"/>
+          <a:chExt cx="0" cy="0"/>
+        </a:xfrm>
+      </p:grpSpPr>
+      <p:sp>
+        <p:nvSpPr>
+          <p:cNvPr id="238" name="Google Shape;238;g8d8c850c25_0_103:notes"/>
+          <p:cNvSpPr>
+            <a:spLocks noGrp="1" noRot="1" noChangeAspect="1"/>
+          </p:cNvSpPr>
+          <p:nvPr>
+            <p:ph type="sldImg" idx="2"/>
+          </p:nvPr>
+        </p:nvSpPr>
+        <p:spPr>
+          <a:xfrm>
+            <a:off x="2105025" y="685800"/>
+            <a:ext cx="2649538" cy="3429000"/>
+          </a:xfrm>
+          <a:custGeom>
+            <a:avLst/>
+            <a:gdLst/>
+            <a:ahLst/>
+            <a:cxnLst/>
+            <a:rect l="l" t="t" r="r" b="b"/>
+            <a:pathLst>
+              <a:path w="120000" h="120000" extrusionOk="0">
+                <a:moveTo>
+                  <a:pt x="0" y="0"/>
+                </a:moveTo>
+                <a:lnTo>
+                  <a:pt x="120000" y="0"/>
+                </a:lnTo>
+                <a:lnTo>
+                  <a:pt x="120000" y="120000"/>
+                </a:lnTo>
+                <a:lnTo>
+                  <a:pt x="0" y="120000"/>
+                </a:lnTo>
+                <a:close/>
+              </a:path>
+            </a:pathLst>
+          </a:custGeom>
+        </p:spPr>
+      </p:sp>
+      <p:sp>
+        <p:nvSpPr>
+          <p:cNvPr id="239" name="Google Shape;239;g8d8c850c25_0_103:notes"/>
+          <p:cNvSpPr txBox="1">
+            <a:spLocks noGrp="1"/>
+          </p:cNvSpPr>
+          <p:nvPr>
+            <p:ph type="body" idx="1"/>
+          </p:nvPr>
+        </p:nvSpPr>
+        <p:spPr>
+          <a:xfrm>
+            <a:off x="685800" y="4343400"/>
+            <a:ext cx="5486400" cy="4114800"/>
+          </a:xfrm>
+          <a:prstGeom prst="rect">
+            <a:avLst/>
+          </a:prstGeom>
+        </p:spPr>
+        <p:txBody>
+          <a:bodyPr spcFirstLastPara="1" wrap="square" lIns="91425" tIns="91425" rIns="91425" bIns="91425" anchor="t" anchorCtr="0">
+            <a:noAutofit/>
+          </a:bodyPr>
+          <a:lstStyle/>
+          <a:p>
+            <a:pPr marL="0" lvl="0" indent="0" algn="l" rtl="0">
+              <a:spcBef>
+                <a:spcPts val="0"/>
+              </a:spcBef>
+              <a:spcAft>
+                <a:spcPts val="0"/>
+              </a:spcAft>
+              <a:buNone/>
+            </a:pPr>
+            <a:endParaRPr/>
+          </a:p>
+        </p:txBody>
+      </p:sp>
+    </p:spTree>
+  </p:cSld>
+  <p:clrMapOvr>
+    <a:masterClrMapping/>
+  </p:clrMapOvr>
+</p:notes>
+</file>
+
+<file path=ppt/notesSlides/notesSlide9.xml><?xml version="1.0" encoding="utf-8"?>
+<p:notes xmlns:a="http://schemas.openxmlformats.org/drawingml/2006/main" xmlns:r="http://schemas.openxmlformats.org/officeDocument/2006/relationships" xmlns:p="http://schemas.openxmlformats.org/presentationml/2006/main" showMasterSp="0" showMasterPhAnim="0">
+  <p:cSld>
+    <p:spTree>
+      <p:nvGrpSpPr>
+        <p:cNvPr id="1" name="Shape 242"/>
+        <p:cNvGrpSpPr/>
+        <p:nvPr/>
+      </p:nvGrpSpPr>
+      <p:grpSpPr>
+        <a:xfrm>
+          <a:off x="0" y="0"/>
+          <a:ext cx="0" cy="0"/>
+          <a:chOff x="0" y="0"/>
+          <a:chExt cx="0" cy="0"/>
+        </a:xfrm>
+      </p:grpSpPr>
+      <p:sp>
+        <p:nvSpPr>
+          <p:cNvPr id="243" name="Google Shape;243;g64b864f3db_0_1:notes"/>
+          <p:cNvSpPr txBox="1">
+            <a:spLocks noGrp="1"/>
+          </p:cNvSpPr>
+          <p:nvPr>
+            <p:ph type="body" idx="1"/>
+          </p:nvPr>
+        </p:nvSpPr>
+        <p:spPr>
+          <a:xfrm>
+            <a:off x="914400" y="4343400"/>
+            <a:ext cx="5029200" cy="4114800"/>
+          </a:xfrm>
+          <a:prstGeom prst="rect">
+            <a:avLst/>
+          </a:prstGeom>
+          <a:noFill/>
+          <a:ln>
+            <a:noFill/>
+          </a:ln>
+        </p:spPr>
+        <p:txBody>
+          <a:bodyPr spcFirstLastPara="1" wrap="square" lIns="91425" tIns="91425" rIns="91425" bIns="91425" anchor="ctr" anchorCtr="0">
+            <a:noAutofit/>
+          </a:bodyPr>
+          <a:lstStyle/>
+          <a:p>
+            <a:pPr marL="0" lvl="0" indent="0" algn="l" rtl="0">
+              <a:spcBef>
+                <a:spcPts val="0"/>
+              </a:spcBef>
+              <a:spcAft>
+                <a:spcPts val="0"/>
+              </a:spcAft>
+              <a:buNone/>
+            </a:pPr>
+            <a:endParaRPr/>
+          </a:p>
+        </p:txBody>
+      </p:sp>
+      <p:sp>
+        <p:nvSpPr>
+          <p:cNvPr id="244" name="Google Shape;244;g64b864f3db_0_1:notes"/>
           <p:cNvSpPr>
             <a:spLocks noGrp="1" noRot="1" noChangeAspect="1"/>
           </p:cNvSpPr>
@@ -27439,428 +27159,6 @@
   <p:cSld>
     <p:spTree>
       <p:nvGrpSpPr>
-        <p:cNvPr id="1" name="Shape 240"/>
-        <p:cNvGrpSpPr/>
-        <p:nvPr/>
-      </p:nvGrpSpPr>
-      <p:grpSpPr>
-        <a:xfrm>
-          <a:off x="0" y="0"/>
-          <a:ext cx="0" cy="0"/>
-          <a:chOff x="0" y="0"/>
-          <a:chExt cx="0" cy="0"/>
-        </a:xfrm>
-      </p:grpSpPr>
-      <p:sp>
-        <p:nvSpPr>
-          <p:cNvPr id="241" name="Google Shape;241;p60"/>
-          <p:cNvSpPr txBox="1">
-            <a:spLocks noGrp="1"/>
-          </p:cNvSpPr>
-          <p:nvPr>
-            <p:ph type="body" idx="1"/>
-          </p:nvPr>
-        </p:nvSpPr>
-        <p:spPr>
-          <a:xfrm>
-            <a:off x="264900" y="110600"/>
-            <a:ext cx="7366800" cy="1041900"/>
-          </a:xfrm>
-          <a:prstGeom prst="rect">
-            <a:avLst/>
-          </a:prstGeom>
-        </p:spPr>
-        <p:txBody>
-          <a:bodyPr spcFirstLastPara="1" wrap="square" lIns="91425" tIns="91425" rIns="91425" bIns="91425" anchor="t" anchorCtr="0">
-            <a:noAutofit/>
-          </a:bodyPr>
-          <a:lstStyle/>
-          <a:p>
-            <a:pPr marL="241300" marR="241300" lvl="0" indent="0" algn="just" rtl="0">
-              <a:lnSpc>
-                <a:spcPct val="170000"/>
-              </a:lnSpc>
-              <a:spcBef>
-                <a:spcPts val="3800"/>
-              </a:spcBef>
-              <a:spcAft>
-                <a:spcPts val="0"/>
-              </a:spcAft>
-              <a:buNone/>
-            </a:pPr>
-            <a:r>
-              <a:rPr lang="en" sz="1600">
-                <a:solidFill>
-                  <a:srgbClr val="525C65"/>
-                </a:solidFill>
-                <a:highlight>
-                  <a:srgbClr val="FFFFFF"/>
-                </a:highlight>
-                <a:latin typeface="Open Sans"/>
-                <a:ea typeface="Open Sans"/>
-                <a:cs typeface="Open Sans"/>
-                <a:sym typeface="Open Sans"/>
-              </a:rPr>
-              <a:t>Create the first version of the Metadata Catalog by documenting the metadata from all systems in the "Data Dictionary" and the “Enterprise Data Catalog” tabs of the provided Sheets template.</a:t>
-            </a:r>
-            <a:endParaRPr sz="1600">
-              <a:solidFill>
-                <a:srgbClr val="525C65"/>
-              </a:solidFill>
-              <a:highlight>
-                <a:srgbClr val="FFFFFF"/>
-              </a:highlight>
-              <a:latin typeface="Open Sans"/>
-              <a:ea typeface="Open Sans"/>
-              <a:cs typeface="Open Sans"/>
-              <a:sym typeface="Open Sans"/>
-            </a:endParaRPr>
-          </a:p>
-          <a:p>
-            <a:pPr marL="241300" marR="241300" lvl="0" indent="0" algn="just" rtl="0">
-              <a:lnSpc>
-                <a:spcPct val="170000"/>
-              </a:lnSpc>
-              <a:spcBef>
-                <a:spcPts val="3800"/>
-              </a:spcBef>
-              <a:spcAft>
-                <a:spcPts val="1100"/>
-              </a:spcAft>
-              <a:buClr>
-                <a:schemeClr val="dk1"/>
-              </a:buClr>
-              <a:buSzPts val="1100"/>
-              <a:buFont typeface="Arial"/>
-              <a:buNone/>
-            </a:pPr>
-            <a:r>
-              <a:rPr lang="en" sz="1600">
-                <a:solidFill>
-                  <a:srgbClr val="525C65"/>
-                </a:solidFill>
-                <a:highlight>
-                  <a:srgbClr val="FFFFFF"/>
-                </a:highlight>
-                <a:latin typeface="Open Sans"/>
-                <a:ea typeface="Open Sans"/>
-                <a:cs typeface="Open Sans"/>
-                <a:sym typeface="Open Sans"/>
-              </a:rPr>
-              <a:t>Please note that you are required to fill out </a:t>
-            </a:r>
-            <a:r>
-              <a:rPr lang="en" sz="1600" b="1">
-                <a:solidFill>
-                  <a:srgbClr val="525C65"/>
-                </a:solidFill>
-                <a:highlight>
-                  <a:srgbClr val="FFFFFF"/>
-                </a:highlight>
-                <a:latin typeface="Open Sans"/>
-                <a:ea typeface="Open Sans"/>
-                <a:cs typeface="Open Sans"/>
-                <a:sym typeface="Open Sans"/>
-              </a:rPr>
-              <a:t>all fields</a:t>
-            </a:r>
-            <a:r>
-              <a:rPr lang="en" sz="1600">
-                <a:solidFill>
-                  <a:srgbClr val="525C65"/>
-                </a:solidFill>
-                <a:highlight>
-                  <a:srgbClr val="FFFFFF"/>
-                </a:highlight>
-                <a:latin typeface="Open Sans"/>
-                <a:ea typeface="Open Sans"/>
-                <a:cs typeface="Open Sans"/>
-                <a:sym typeface="Open Sans"/>
-              </a:rPr>
-              <a:t> in </a:t>
-            </a:r>
-            <a:r>
-              <a:rPr lang="en" sz="1600" b="1">
-                <a:solidFill>
-                  <a:srgbClr val="525C65"/>
-                </a:solidFill>
-                <a:highlight>
-                  <a:srgbClr val="FFFFFF"/>
-                </a:highlight>
-                <a:latin typeface="Open Sans"/>
-                <a:ea typeface="Open Sans"/>
-                <a:cs typeface="Open Sans"/>
-                <a:sym typeface="Open Sans"/>
-              </a:rPr>
-              <a:t>both tabs</a:t>
-            </a:r>
-            <a:r>
-              <a:rPr lang="en" sz="1600">
-                <a:solidFill>
-                  <a:srgbClr val="525C65"/>
-                </a:solidFill>
-                <a:highlight>
-                  <a:srgbClr val="FFFFFF"/>
-                </a:highlight>
-                <a:latin typeface="Open Sans"/>
-                <a:ea typeface="Open Sans"/>
-                <a:cs typeface="Open Sans"/>
-                <a:sym typeface="Open Sans"/>
-              </a:rPr>
-              <a:t>.</a:t>
-            </a:r>
-            <a:endParaRPr sz="1600">
-              <a:solidFill>
-                <a:srgbClr val="525C65"/>
-              </a:solidFill>
-            </a:endParaRPr>
-          </a:p>
-        </p:txBody>
-      </p:sp>
-    </p:spTree>
-  </p:cSld>
-  <p:clrMapOvr>
-    <a:masterClrMapping/>
-  </p:clrMapOvr>
-</p:sld>
-</file>
-
-<file path=ppt/slides/slide11.xml><?xml version="1.0" encoding="utf-8"?>
-<p:sld xmlns:a="http://schemas.openxmlformats.org/drawingml/2006/main" xmlns:r="http://schemas.openxmlformats.org/officeDocument/2006/relationships" xmlns:p="http://schemas.openxmlformats.org/presentationml/2006/main">
-  <p:cSld>
-    <p:bg>
-      <p:bgPr>
-        <a:solidFill>
-          <a:srgbClr val="02B4E5"/>
-        </a:solidFill>
-        <a:effectLst/>
-      </p:bgPr>
-    </p:bg>
-    <p:spTree>
-      <p:nvGrpSpPr>
-        <p:cNvPr id="1" name="Shape 245"/>
-        <p:cNvGrpSpPr/>
-        <p:nvPr/>
-      </p:nvGrpSpPr>
-      <p:grpSpPr>
-        <a:xfrm>
-          <a:off x="0" y="0"/>
-          <a:ext cx="0" cy="0"/>
-          <a:chOff x="0" y="0"/>
-          <a:chExt cx="0" cy="0"/>
-        </a:xfrm>
-      </p:grpSpPr>
-      <p:sp>
-        <p:nvSpPr>
-          <p:cNvPr id="246" name="Google Shape;246;p61"/>
-          <p:cNvSpPr/>
-          <p:nvPr/>
-        </p:nvSpPr>
-        <p:spPr>
-          <a:xfrm>
-            <a:off x="1051200" y="4003550"/>
-            <a:ext cx="5670000" cy="2460000"/>
-          </a:xfrm>
-          <a:prstGeom prst="rect">
-            <a:avLst/>
-          </a:prstGeom>
-          <a:noFill/>
-          <a:ln>
-            <a:noFill/>
-          </a:ln>
-        </p:spPr>
-        <p:txBody>
-          <a:bodyPr spcFirstLastPara="1" wrap="square" lIns="26775" tIns="26775" rIns="26775" bIns="26775" anchor="t" anchorCtr="0">
-            <a:noAutofit/>
-          </a:bodyPr>
-          <a:lstStyle/>
-          <a:p>
-            <a:pPr marL="0" marR="0" lvl="0" indent="0" algn="ctr" rtl="0">
-              <a:lnSpc>
-                <a:spcPct val="150000"/>
-              </a:lnSpc>
-              <a:spcBef>
-                <a:spcPts val="0"/>
-              </a:spcBef>
-              <a:spcAft>
-                <a:spcPts val="0"/>
-              </a:spcAft>
-              <a:buClr>
-                <a:srgbClr val="FFFFFF"/>
-              </a:buClr>
-              <a:buFont typeface="Open Sans"/>
-              <a:buNone/>
-            </a:pPr>
-            <a:r>
-              <a:rPr lang="en" sz="3000" b="1">
-                <a:solidFill>
-                  <a:srgbClr val="FFFFFF"/>
-                </a:solidFill>
-                <a:latin typeface="Open Sans"/>
-                <a:ea typeface="Open Sans"/>
-                <a:cs typeface="Open Sans"/>
-                <a:sym typeface="Open Sans"/>
-              </a:rPr>
-              <a:t>Step 3</a:t>
-            </a:r>
-            <a:endParaRPr sz="3000" b="1">
-              <a:solidFill>
-                <a:srgbClr val="FFFFFF"/>
-              </a:solidFill>
-              <a:latin typeface="Open Sans"/>
-              <a:ea typeface="Open Sans"/>
-              <a:cs typeface="Open Sans"/>
-              <a:sym typeface="Open Sans"/>
-            </a:endParaRPr>
-          </a:p>
-          <a:p>
-            <a:pPr marL="0" marR="0" lvl="0" indent="0" algn="ctr" rtl="0">
-              <a:lnSpc>
-                <a:spcPct val="150000"/>
-              </a:lnSpc>
-              <a:spcBef>
-                <a:spcPts val="0"/>
-              </a:spcBef>
-              <a:spcAft>
-                <a:spcPts val="0"/>
-              </a:spcAft>
-              <a:buClr>
-                <a:srgbClr val="FFFFFF"/>
-              </a:buClr>
-              <a:buFont typeface="Open Sans"/>
-              <a:buNone/>
-            </a:pPr>
-            <a:r>
-              <a:rPr lang="en" sz="3000">
-                <a:solidFill>
-                  <a:srgbClr val="FFFFFF"/>
-                </a:solidFill>
-                <a:latin typeface="Open Sans"/>
-                <a:ea typeface="Open Sans"/>
-                <a:cs typeface="Open Sans"/>
-                <a:sym typeface="Open Sans"/>
-              </a:rPr>
-              <a:t>Data Quality</a:t>
-            </a:r>
-            <a:endParaRPr sz="3000">
-              <a:solidFill>
-                <a:srgbClr val="FFFFFF"/>
-              </a:solidFill>
-              <a:latin typeface="Open Sans"/>
-              <a:ea typeface="Open Sans"/>
-              <a:cs typeface="Open Sans"/>
-              <a:sym typeface="Open Sans"/>
-            </a:endParaRPr>
-          </a:p>
-          <a:p>
-            <a:pPr marL="0" marR="0" lvl="0" indent="0" algn="ctr" rtl="0">
-              <a:lnSpc>
-                <a:spcPct val="150000"/>
-              </a:lnSpc>
-              <a:spcBef>
-                <a:spcPts val="0"/>
-              </a:spcBef>
-              <a:spcAft>
-                <a:spcPts val="0"/>
-              </a:spcAft>
-              <a:buClr>
-                <a:srgbClr val="FFFFFF"/>
-              </a:buClr>
-              <a:buFont typeface="Open Sans"/>
-              <a:buNone/>
-            </a:pPr>
-            <a:r>
-              <a:rPr lang="en" sz="3000">
-                <a:solidFill>
-                  <a:srgbClr val="FFFFFF"/>
-                </a:solidFill>
-                <a:latin typeface="Open Sans"/>
-                <a:ea typeface="Open Sans"/>
-                <a:cs typeface="Open Sans"/>
-                <a:sym typeface="Open Sans"/>
-              </a:rPr>
-              <a:t>Part 1: Profiling and Cleansing</a:t>
-            </a:r>
-            <a:endParaRPr sz="3000">
-              <a:solidFill>
-                <a:srgbClr val="FFFFFF"/>
-              </a:solidFill>
-              <a:latin typeface="Open Sans"/>
-              <a:ea typeface="Open Sans"/>
-              <a:cs typeface="Open Sans"/>
-              <a:sym typeface="Open Sans"/>
-            </a:endParaRPr>
-          </a:p>
-        </p:txBody>
-      </p:sp>
-      <p:sp>
-        <p:nvSpPr>
-          <p:cNvPr id="247" name="Google Shape;247;p61"/>
-          <p:cNvSpPr/>
-          <p:nvPr/>
-        </p:nvSpPr>
-        <p:spPr>
-          <a:xfrm>
-            <a:off x="3582591" y="3663029"/>
-            <a:ext cx="607200" cy="74400"/>
-          </a:xfrm>
-          <a:prstGeom prst="rect">
-            <a:avLst/>
-          </a:prstGeom>
-          <a:solidFill>
-            <a:schemeClr val="lt1"/>
-          </a:solidFill>
-          <a:ln>
-            <a:noFill/>
-          </a:ln>
-        </p:spPr>
-        <p:txBody>
-          <a:bodyPr spcFirstLastPara="1" wrap="square" lIns="26775" tIns="26775" rIns="26775" bIns="26775" anchor="ctr" anchorCtr="0">
-            <a:noAutofit/>
-          </a:bodyPr>
-          <a:lstStyle/>
-          <a:p>
-            <a:pPr marL="0" marR="0" lvl="0" indent="0" algn="ctr" rtl="0">
-              <a:lnSpc>
-                <a:spcPct val="100000"/>
-              </a:lnSpc>
-              <a:spcBef>
-                <a:spcPts val="0"/>
-              </a:spcBef>
-              <a:spcAft>
-                <a:spcPts val="0"/>
-              </a:spcAft>
-              <a:buClr>
-                <a:srgbClr val="FFFFFF"/>
-              </a:buClr>
-              <a:buFont typeface="Helvetica Neue"/>
-              <a:buNone/>
-            </a:pPr>
-            <a:endParaRPr sz="1200" b="0" i="0" u="none" strike="noStrike" cap="none">
-              <a:solidFill>
-                <a:srgbClr val="02B4E5"/>
-              </a:solidFill>
-              <a:latin typeface="Helvetica Neue"/>
-              <a:ea typeface="Helvetica Neue"/>
-              <a:cs typeface="Helvetica Neue"/>
-              <a:sym typeface="Helvetica Neue"/>
-            </a:endParaRPr>
-          </a:p>
-        </p:txBody>
-      </p:sp>
-    </p:spTree>
-  </p:cSld>
-  <p:clrMapOvr>
-    <a:masterClrMapping/>
-  </p:clrMapOvr>
-</p:sld>
-</file>
-
-<file path=ppt/slides/slide12.xml><?xml version="1.0" encoding="utf-8"?>
-<p:sld xmlns:a="http://schemas.openxmlformats.org/drawingml/2006/main" xmlns:r="http://schemas.openxmlformats.org/officeDocument/2006/relationships" xmlns:p="http://schemas.openxmlformats.org/presentationml/2006/main">
-  <p:cSld>
-    <p:spTree>
-      <p:nvGrpSpPr>
         <p:cNvPr id="1" name="Shape 251"/>
         <p:cNvGrpSpPr/>
         <p:nvPr/>
@@ -28105,7 +27403,7 @@
 </p:sld>
 </file>
 
-<file path=ppt/slides/slide13.xml><?xml version="1.0" encoding="utf-8"?>
+<file path=ppt/slides/slide11.xml><?xml version="1.0" encoding="utf-8"?>
 <p:sld xmlns:a="http://schemas.openxmlformats.org/drawingml/2006/main" xmlns:r="http://schemas.openxmlformats.org/officeDocument/2006/relationships" xmlns:p="http://schemas.openxmlformats.org/presentationml/2006/main">
   <p:cSld>
     <p:bg>
@@ -28336,7 +27634,7 @@
 </p:sld>
 </file>
 
-<file path=ppt/slides/slide14.xml><?xml version="1.0" encoding="utf-8"?>
+<file path=ppt/slides/slide12.xml><?xml version="1.0" encoding="utf-8"?>
 <p:sld xmlns:a="http://schemas.openxmlformats.org/drawingml/2006/main" xmlns:r="http://schemas.openxmlformats.org/officeDocument/2006/relationships" xmlns:p="http://schemas.openxmlformats.org/presentationml/2006/main">
   <p:cSld>
     <p:spTree>
@@ -28382,28 +27680,52 @@
           <a:lstStyle/>
           <a:p>
             <a:r>
-              <a:rPr lang="en-GB" dirty="0"/>
+              <a:rPr lang="en-GB" dirty="0">
+                <a:latin typeface="Open Sans" panose="020B0606030504020204" pitchFamily="34" charset="0"/>
+                <a:ea typeface="Open Sans" panose="020B0606030504020204" pitchFamily="34" charset="0"/>
+                <a:cs typeface="Open Sans" panose="020B0606030504020204" pitchFamily="34" charset="0"/>
+              </a:rPr>
               <a:t>The dashboard highlights data quality issues identified during profiling of the </a:t>
             </a:r>
             <a:r>
-              <a:rPr lang="en-GB" dirty="0" err="1"/>
+              <a:rPr lang="en-GB" dirty="0" err="1">
+                <a:latin typeface="Open Sans" panose="020B0606030504020204" pitchFamily="34" charset="0"/>
+                <a:ea typeface="Open Sans" panose="020B0606030504020204" pitchFamily="34" charset="0"/>
+                <a:cs typeface="Open Sans" panose="020B0606030504020204" pitchFamily="34" charset="0"/>
+              </a:rPr>
               <a:t>SneakerPark</a:t>
             </a:r>
             <a:r>
-              <a:rPr lang="en-GB" dirty="0"/>
+              <a:rPr lang="en-GB" dirty="0">
+                <a:latin typeface="Open Sans" panose="020B0606030504020204" pitchFamily="34" charset="0"/>
+                <a:ea typeface="Open Sans" panose="020B0606030504020204" pitchFamily="34" charset="0"/>
+                <a:cs typeface="Open Sans" panose="020B0606030504020204" pitchFamily="34" charset="0"/>
+              </a:rPr>
               <a:t> data. The most significant issues are invalid customer email addresses and inconsistencies between listing information and inventory item data. Missing shipping addresses were identified in a smaller number of order records. </a:t>
             </a:r>
             <a:r>
-              <a:rPr lang="en-US" dirty="0"/>
+              <a:rPr lang="en-US" dirty="0">
+                <a:latin typeface="Open Sans" panose="020B0606030504020204" pitchFamily="34" charset="0"/>
+                <a:ea typeface="Open Sans" panose="020B0606030504020204" pitchFamily="34" charset="0"/>
+                <a:cs typeface="Open Sans" panose="020B0606030504020204" pitchFamily="34" charset="0"/>
+              </a:rPr>
               <a:t>While no duplicate customer accounts were found in the current dataset, this remains a potential future risk as the business continues to grow.</a:t>
             </a:r>
           </a:p>
           <a:p>
-            <a:endParaRPr lang="en-US" dirty="0"/>
+            <a:endParaRPr lang="en-US" dirty="0">
+              <a:latin typeface="Open Sans" panose="020B0606030504020204" pitchFamily="34" charset="0"/>
+              <a:ea typeface="Open Sans" panose="020B0606030504020204" pitchFamily="34" charset="0"/>
+              <a:cs typeface="Open Sans" panose="020B0606030504020204" pitchFamily="34" charset="0"/>
+            </a:endParaRPr>
           </a:p>
           <a:p>
             <a:r>
-              <a:rPr lang="en-GB" dirty="0"/>
+              <a:rPr lang="en-GB" dirty="0">
+                <a:latin typeface="Open Sans" panose="020B0606030504020204" pitchFamily="34" charset="0"/>
+                <a:ea typeface="Open Sans" panose="020B0606030504020204" pitchFamily="34" charset="0"/>
+                <a:cs typeface="Open Sans" panose="020B0606030504020204" pitchFamily="34" charset="0"/>
+              </a:rPr>
               <a:t>These metrics should be monitored regularly to ensure compliance with data quality rules and to support future Master Data Management initiatives.</a:t>
             </a:r>
           </a:p>
@@ -28477,7 +27799,7 @@
 </p:sld>
 </file>
 
-<file path=ppt/slides/slide15.xml><?xml version="1.0" encoding="utf-8"?>
+<file path=ppt/slides/slide13.xml><?xml version="1.0" encoding="utf-8"?>
 <p:sld xmlns:a="http://schemas.openxmlformats.org/drawingml/2006/main" xmlns:r="http://schemas.openxmlformats.org/officeDocument/2006/relationships" xmlns:p="http://schemas.openxmlformats.org/presentationml/2006/main">
   <p:cSld>
     <p:bg>
@@ -28708,7 +28030,7 @@
 </p:sld>
 </file>
 
-<file path=ppt/slides/slide16.xml><?xml version="1.0" encoding="utf-8"?>
+<file path=ppt/slides/slide14.xml><?xml version="1.0" encoding="utf-8"?>
 <p:sld xmlns:a="http://schemas.openxmlformats.org/drawingml/2006/main" xmlns:r="http://schemas.openxmlformats.org/officeDocument/2006/relationships" xmlns:p="http://schemas.openxmlformats.org/presentationml/2006/main">
   <p:cSld>
     <p:spTree>
@@ -28739,8 +28061,8 @@
         </p:nvSpPr>
         <p:spPr>
           <a:xfrm>
-            <a:off x="18535" y="342029"/>
-            <a:ext cx="7735330" cy="400110"/>
+            <a:off x="37070" y="737445"/>
+            <a:ext cx="7735330" cy="707886"/>
           </a:xfrm>
           <a:prstGeom prst="rect">
             <a:avLst/>
@@ -28753,6 +28075,7 @@
           </a:bodyPr>
           <a:lstStyle/>
           <a:p>
+            <a:pPr algn="ctr"/>
             <a:r>
               <a:rPr lang="en-GB" sz="2000" b="1" dirty="0">
                 <a:solidFill>
@@ -28765,7 +28088,24 @@
                 <a:ea typeface="Open Sans"/>
                 <a:cs typeface="Open Sans"/>
               </a:rPr>
-              <a:t>SNEAKERPARK HYBRID (COEXISTENCE) MDM ARCHITECTURE</a:t>
+              <a:t>SNEAKERPARK HYBRID (COEXISTENCE) </a:t>
+            </a:r>
+          </a:p>
+          <a:p>
+            <a:pPr algn="ctr"/>
+            <a:r>
+              <a:rPr lang="en-GB" sz="2000" b="1" dirty="0">
+                <a:solidFill>
+                  <a:schemeClr val="tx1"/>
+                </a:solidFill>
+                <a:highlight>
+                  <a:schemeClr val="lt1"/>
+                </a:highlight>
+                <a:latin typeface="Open Sans"/>
+                <a:ea typeface="Open Sans"/>
+                <a:cs typeface="Open Sans"/>
+              </a:rPr>
+              <a:t>MDM ARCHITECTURE</a:t>
             </a:r>
           </a:p>
         </p:txBody>
@@ -28792,8 +28132,8 @@
         </p:blipFill>
         <p:spPr>
           <a:xfrm>
-            <a:off x="18535" y="1102219"/>
-            <a:ext cx="7451124" cy="4740060"/>
+            <a:off x="160638" y="2412035"/>
+            <a:ext cx="7451124" cy="5508646"/>
           </a:xfrm>
           <a:prstGeom prst="rect">
             <a:avLst/>
@@ -28808,7 +28148,7 @@
 </p:sld>
 </file>
 
-<file path=ppt/slides/slide17.xml><?xml version="1.0" encoding="utf-8"?>
+<file path=ppt/slides/slide15.xml><?xml version="1.0" encoding="utf-8"?>
 <p:sld xmlns:a="http://schemas.openxmlformats.org/drawingml/2006/main" xmlns:r="http://schemas.openxmlformats.org/officeDocument/2006/relationships" xmlns:p="http://schemas.openxmlformats.org/presentationml/2006/main">
   <p:cSld>
     <p:spTree>
@@ -28838,7 +28178,7 @@
         <p:spPr>
           <a:xfrm>
             <a:off x="465150" y="524225"/>
-            <a:ext cx="6842100" cy="1371300"/>
+            <a:ext cx="6842100" cy="538456"/>
           </a:xfrm>
           <a:prstGeom prst="rect">
             <a:avLst/>
@@ -28865,7 +28205,7 @@
               <a:buNone/>
             </a:pPr>
             <a:r>
-              <a:rPr lang="en" sz="2200" b="1">
+              <a:rPr lang="en" sz="2200" b="1" dirty="0">
                 <a:solidFill>
                   <a:srgbClr val="525C65"/>
                 </a:solidFill>
@@ -28879,18 +28219,302 @@
               </a:rPr>
               <a:t>Explanation:</a:t>
             </a:r>
-            <a:endParaRPr sz="2200">
-              <a:solidFill>
-                <a:srgbClr val="525C65"/>
-              </a:solidFill>
-              <a:highlight>
-                <a:srgbClr val="FFFFFF"/>
-              </a:highlight>
-              <a:latin typeface="Open Sans"/>
-              <a:ea typeface="Open Sans"/>
-              <a:cs typeface="Open Sans"/>
-              <a:sym typeface="Open Sans"/>
+          </a:p>
+        </p:txBody>
+      </p:sp>
+      <p:sp>
+        <p:nvSpPr>
+          <p:cNvPr id="3" name="TextBox 2">
+            <a:extLst>
+              <a:ext uri="{FF2B5EF4-FFF2-40B4-BE49-F238E27FC236}">
+                <a16:creationId xmlns:a16="http://schemas.microsoft.com/office/drawing/2014/main" id="{333F703D-50D5-0B2E-AA65-37926A25D14B}"/>
+              </a:ext>
+            </a:extLst>
+          </p:cNvPr>
+          <p:cNvSpPr txBox="1"/>
+          <p:nvPr/>
+        </p:nvSpPr>
+        <p:spPr>
+          <a:xfrm>
+            <a:off x="465150" y="1209875"/>
+            <a:ext cx="6842099" cy="8710077"/>
+          </a:xfrm>
+          <a:prstGeom prst="rect">
+            <a:avLst/>
+          </a:prstGeom>
+          <a:noFill/>
+        </p:spPr>
+        <p:txBody>
+          <a:bodyPr wrap="square">
+            <a:spAutoFit/>
+          </a:bodyPr>
+          <a:lstStyle/>
+          <a:p>
+            <a:r>
+              <a:rPr lang="en-GB" dirty="0">
+                <a:latin typeface="Open Sans" panose="020B0606030504020204" pitchFamily="34" charset="0"/>
+                <a:ea typeface="Open Sans" panose="020B0606030504020204" pitchFamily="34" charset="0"/>
+                <a:cs typeface="Open Sans" panose="020B0606030504020204" pitchFamily="34" charset="0"/>
+              </a:rPr>
+              <a:t>I chose the Hybrid (Co-Existence) MDM approach because </a:t>
+            </a:r>
+            <a:r>
+              <a:rPr lang="en-GB" dirty="0" err="1">
+                <a:latin typeface="Open Sans" panose="020B0606030504020204" pitchFamily="34" charset="0"/>
+                <a:ea typeface="Open Sans" panose="020B0606030504020204" pitchFamily="34" charset="0"/>
+                <a:cs typeface="Open Sans" panose="020B0606030504020204" pitchFamily="34" charset="0"/>
+              </a:rPr>
+              <a:t>SneakerPark</a:t>
+            </a:r>
+            <a:r>
+              <a:rPr lang="en-GB" dirty="0">
+                <a:latin typeface="Open Sans" panose="020B0606030504020204" pitchFamily="34" charset="0"/>
+                <a:ea typeface="Open Sans" panose="020B0606030504020204" pitchFamily="34" charset="0"/>
+                <a:cs typeface="Open Sans" panose="020B0606030504020204" pitchFamily="34" charset="0"/>
+              </a:rPr>
+              <a:t> already has several systems that manage different parts of the business, such as customers, listings, inventory, orders and customer service. Replacing these systems with a fully centralised solution would require significant changes and could disrupt existing operations. The Hybrid approach allows these systems to continue working as they do today while sharing trusted master data through a central MDM Hub.</a:t>
+            </a:r>
+          </a:p>
+          <a:p>
+            <a:endParaRPr lang="en-GB" dirty="0">
+              <a:latin typeface="Open Sans" panose="020B0606030504020204" pitchFamily="34" charset="0"/>
+              <a:ea typeface="Open Sans" panose="020B0606030504020204" pitchFamily="34" charset="0"/>
+              <a:cs typeface="Open Sans" panose="020B0606030504020204" pitchFamily="34" charset="0"/>
             </a:endParaRPr>
+          </a:p>
+          <a:p>
+            <a:pPr marL="285750" indent="-285750">
+              <a:buFont typeface="Arial" panose="020B0604020202020204" pitchFamily="34" charset="0"/>
+              <a:buChar char="•"/>
+            </a:pPr>
+            <a:r>
+              <a:rPr lang="en-GB" dirty="0">
+                <a:latin typeface="Open Sans" panose="020B0606030504020204" pitchFamily="34" charset="0"/>
+                <a:ea typeface="Open Sans" panose="020B0606030504020204" pitchFamily="34" charset="0"/>
+                <a:cs typeface="Open Sans" panose="020B0606030504020204" pitchFamily="34" charset="0"/>
+              </a:rPr>
+              <a:t>The source systems continue to create and maintain operational data, while important customer and product information is shared with the MDM Hub.</a:t>
+            </a:r>
+          </a:p>
+          <a:p>
+            <a:endParaRPr lang="en-GB" dirty="0">
+              <a:latin typeface="Open Sans" panose="020B0606030504020204" pitchFamily="34" charset="0"/>
+              <a:ea typeface="Open Sans" panose="020B0606030504020204" pitchFamily="34" charset="0"/>
+              <a:cs typeface="Open Sans" panose="020B0606030504020204" pitchFamily="34" charset="0"/>
+            </a:endParaRPr>
+          </a:p>
+          <a:p>
+            <a:pPr marL="285750" indent="-285750">
+              <a:buFont typeface="Arial" panose="020B0604020202020204" pitchFamily="34" charset="0"/>
+              <a:buChar char="•"/>
+            </a:pPr>
+            <a:r>
+              <a:rPr lang="en-GB" dirty="0">
+                <a:latin typeface="Open Sans" panose="020B0606030504020204" pitchFamily="34" charset="0"/>
+                <a:ea typeface="Open Sans" panose="020B0606030504020204" pitchFamily="34" charset="0"/>
+                <a:cs typeface="Open Sans" panose="020B0606030504020204" pitchFamily="34" charset="0"/>
+              </a:rPr>
+              <a:t>Data from the source systems is first loaded into a staging area. During this process, the data is validated, standardised and checked for duplicates. This helps improve data quality before the information is loaded into the MDM Hub.</a:t>
+            </a:r>
+          </a:p>
+          <a:p>
+            <a:pPr marL="285750" indent="-285750">
+              <a:buFont typeface="Arial" panose="020B0604020202020204" pitchFamily="34" charset="0"/>
+              <a:buChar char="•"/>
+            </a:pPr>
+            <a:endParaRPr lang="en-GB" dirty="0">
+              <a:latin typeface="Open Sans" panose="020B0606030504020204" pitchFamily="34" charset="0"/>
+              <a:ea typeface="Open Sans" panose="020B0606030504020204" pitchFamily="34" charset="0"/>
+              <a:cs typeface="Open Sans" panose="020B0606030504020204" pitchFamily="34" charset="0"/>
+            </a:endParaRPr>
+          </a:p>
+          <a:p>
+            <a:pPr marL="285750" indent="-285750">
+              <a:buFont typeface="Arial" panose="020B0604020202020204" pitchFamily="34" charset="0"/>
+              <a:buChar char="•"/>
+            </a:pPr>
+            <a:r>
+              <a:rPr lang="en-GB" dirty="0">
+                <a:latin typeface="Open Sans" panose="020B0606030504020204" pitchFamily="34" charset="0"/>
+                <a:ea typeface="Open Sans" panose="020B0606030504020204" pitchFamily="34" charset="0"/>
+                <a:cs typeface="Open Sans" panose="020B0606030504020204" pitchFamily="34" charset="0"/>
+              </a:rPr>
+              <a:t>The MDM Hub acts as the central location for trusted master data. It stores the Golden Records for customers and sneaker items and applies data quality, matching and deduplication rules. This creates a single source of truth that can be used across the business. </a:t>
+            </a:r>
+          </a:p>
+          <a:p>
+            <a:pPr marL="285750" indent="-285750">
+              <a:buFont typeface="Arial" panose="020B0604020202020204" pitchFamily="34" charset="0"/>
+              <a:buChar char="•"/>
+            </a:pPr>
+            <a:endParaRPr lang="en-GB" dirty="0">
+              <a:latin typeface="Open Sans" panose="020B0606030504020204" pitchFamily="34" charset="0"/>
+              <a:ea typeface="Open Sans" panose="020B0606030504020204" pitchFamily="34" charset="0"/>
+              <a:cs typeface="Open Sans" panose="020B0606030504020204" pitchFamily="34" charset="0"/>
+            </a:endParaRPr>
+          </a:p>
+          <a:p>
+            <a:pPr marL="285750" indent="-285750">
+              <a:buFont typeface="Arial" panose="020B0604020202020204" pitchFamily="34" charset="0"/>
+              <a:buChar char="•"/>
+            </a:pPr>
+            <a:r>
+              <a:rPr lang="en-GB" dirty="0">
+                <a:latin typeface="Open Sans" panose="020B0606030504020204" pitchFamily="34" charset="0"/>
+                <a:ea typeface="Open Sans" panose="020B0606030504020204" pitchFamily="34" charset="0"/>
+                <a:cs typeface="Open Sans" panose="020B0606030504020204" pitchFamily="34" charset="0"/>
+              </a:rPr>
+              <a:t>This architecture also supports bi-directional synchronisation. When master data is corrected, standardised or merged within the MDM Hub, trusted data can be synchronised back to operational systems to improve consistency across the organisation.</a:t>
+            </a:r>
+          </a:p>
+          <a:p>
+            <a:pPr marL="285750" indent="-285750">
+              <a:buFont typeface="Arial" panose="020B0604020202020204" pitchFamily="34" charset="0"/>
+              <a:buChar char="•"/>
+            </a:pPr>
+            <a:endParaRPr lang="en-GB" dirty="0">
+              <a:latin typeface="Open Sans" panose="020B0606030504020204" pitchFamily="34" charset="0"/>
+              <a:ea typeface="Open Sans" panose="020B0606030504020204" pitchFamily="34" charset="0"/>
+              <a:cs typeface="Open Sans" panose="020B0606030504020204" pitchFamily="34" charset="0"/>
+            </a:endParaRPr>
+          </a:p>
+          <a:p>
+            <a:pPr marL="285750" indent="-285750">
+              <a:buFont typeface="Arial" panose="020B0604020202020204" pitchFamily="34" charset="0"/>
+              <a:buChar char="•"/>
+            </a:pPr>
+            <a:r>
+              <a:rPr lang="en-GB" dirty="0">
+                <a:latin typeface="Open Sans" panose="020B0606030504020204" pitchFamily="34" charset="0"/>
+                <a:ea typeface="Open Sans" panose="020B0606030504020204" pitchFamily="34" charset="0"/>
+                <a:cs typeface="Open Sans" panose="020B0606030504020204" pitchFamily="34" charset="0"/>
+              </a:rPr>
+              <a:t>The trusted data from the MDM Hub can then be used by “Analytics Dashboard”, “Customer Insights” and “AI Recommendation Engine”</a:t>
+            </a:r>
+          </a:p>
+          <a:p>
+            <a:pPr marL="285750" indent="-285750">
+              <a:buFont typeface="Arial" panose="020B0604020202020204" pitchFamily="34" charset="0"/>
+              <a:buChar char="•"/>
+            </a:pPr>
+            <a:endParaRPr lang="en-GB" dirty="0">
+              <a:latin typeface="Open Sans" panose="020B0606030504020204" pitchFamily="34" charset="0"/>
+              <a:ea typeface="Open Sans" panose="020B0606030504020204" pitchFamily="34" charset="0"/>
+              <a:cs typeface="Open Sans" panose="020B0606030504020204" pitchFamily="34" charset="0"/>
+            </a:endParaRPr>
+          </a:p>
+          <a:p>
+            <a:r>
+              <a:rPr lang="en-GB" u="sng" dirty="0">
+                <a:latin typeface="Open Sans" panose="020B0606030504020204" pitchFamily="34" charset="0"/>
+                <a:ea typeface="Open Sans" panose="020B0606030504020204" pitchFamily="34" charset="0"/>
+                <a:cs typeface="Open Sans" panose="020B0606030504020204" pitchFamily="34" charset="0"/>
+              </a:rPr>
+              <a:t>The main benefits of this approach are:</a:t>
+            </a:r>
+          </a:p>
+          <a:p>
+            <a:pPr marL="285750" indent="-285750">
+              <a:buFont typeface="Arial" panose="020B0604020202020204" pitchFamily="34" charset="0"/>
+              <a:buChar char="•"/>
+            </a:pPr>
+            <a:r>
+              <a:rPr lang="en-GB" dirty="0">
+                <a:latin typeface="Open Sans" panose="020B0606030504020204" pitchFamily="34" charset="0"/>
+                <a:ea typeface="Open Sans" panose="020B0606030504020204" pitchFamily="34" charset="0"/>
+                <a:cs typeface="Open Sans" panose="020B0606030504020204" pitchFamily="34" charset="0"/>
+              </a:rPr>
+              <a:t>Improved data quality and consistency.</a:t>
+            </a:r>
+          </a:p>
+          <a:p>
+            <a:pPr marL="285750" indent="-285750">
+              <a:buFont typeface="Arial" panose="020B0604020202020204" pitchFamily="34" charset="0"/>
+              <a:buChar char="•"/>
+            </a:pPr>
+            <a:r>
+              <a:rPr lang="en-GB" dirty="0">
+                <a:latin typeface="Open Sans" panose="020B0606030504020204" pitchFamily="34" charset="0"/>
+                <a:ea typeface="Open Sans" panose="020B0606030504020204" pitchFamily="34" charset="0"/>
+                <a:cs typeface="Open Sans" panose="020B0606030504020204" pitchFamily="34" charset="0"/>
+              </a:rPr>
+              <a:t>Reduced duplicate records.</a:t>
+            </a:r>
+          </a:p>
+          <a:p>
+            <a:pPr marL="285750" indent="-285750">
+              <a:buFont typeface="Arial" panose="020B0604020202020204" pitchFamily="34" charset="0"/>
+              <a:buChar char="•"/>
+            </a:pPr>
+            <a:r>
+              <a:rPr lang="en-GB" dirty="0">
+                <a:latin typeface="Open Sans" panose="020B0606030504020204" pitchFamily="34" charset="0"/>
+                <a:ea typeface="Open Sans" panose="020B0606030504020204" pitchFamily="34" charset="0"/>
+                <a:cs typeface="Open Sans" panose="020B0606030504020204" pitchFamily="34" charset="0"/>
+              </a:rPr>
+              <a:t>A single source of truth for customer and product data.</a:t>
+            </a:r>
+          </a:p>
+          <a:p>
+            <a:pPr marL="285750" indent="-285750">
+              <a:buFont typeface="Arial" panose="020B0604020202020204" pitchFamily="34" charset="0"/>
+              <a:buChar char="•"/>
+            </a:pPr>
+            <a:r>
+              <a:rPr lang="en-GB" dirty="0">
+                <a:latin typeface="Open Sans" panose="020B0606030504020204" pitchFamily="34" charset="0"/>
+                <a:ea typeface="Open Sans" panose="020B0606030504020204" pitchFamily="34" charset="0"/>
+                <a:cs typeface="Open Sans" panose="020B0606030504020204" pitchFamily="34" charset="0"/>
+              </a:rPr>
+              <a:t>Minimal impact on existing systems.</a:t>
+            </a:r>
+          </a:p>
+          <a:p>
+            <a:pPr marL="285750" indent="-285750">
+              <a:buFont typeface="Arial" panose="020B0604020202020204" pitchFamily="34" charset="0"/>
+              <a:buChar char="•"/>
+            </a:pPr>
+            <a:r>
+              <a:rPr lang="en-GB" dirty="0">
+                <a:latin typeface="Open Sans" panose="020B0606030504020204" pitchFamily="34" charset="0"/>
+                <a:ea typeface="Open Sans" panose="020B0606030504020204" pitchFamily="34" charset="0"/>
+                <a:cs typeface="Open Sans" panose="020B0606030504020204" pitchFamily="34" charset="0"/>
+              </a:rPr>
+              <a:t>Better support for reporting, analytics and future AI initiatives.</a:t>
+            </a:r>
+          </a:p>
+          <a:p>
+            <a:endParaRPr lang="en-GB" dirty="0">
+              <a:latin typeface="Open Sans" panose="020B0606030504020204" pitchFamily="34" charset="0"/>
+              <a:ea typeface="Open Sans" panose="020B0606030504020204" pitchFamily="34" charset="0"/>
+              <a:cs typeface="Open Sans" panose="020B0606030504020204" pitchFamily="34" charset="0"/>
+            </a:endParaRPr>
+          </a:p>
+          <a:p>
+            <a:r>
+              <a:rPr lang="en-GB" dirty="0">
+                <a:latin typeface="Open Sans" panose="020B0606030504020204" pitchFamily="34" charset="0"/>
+                <a:ea typeface="Open Sans" panose="020B0606030504020204" pitchFamily="34" charset="0"/>
+                <a:cs typeface="Open Sans" panose="020B0606030504020204" pitchFamily="34" charset="0"/>
+              </a:rPr>
+              <a:t>Overall, the Hybrid (Co-Existence) MDM approach provides a practical way for </a:t>
+            </a:r>
+            <a:r>
+              <a:rPr lang="en-GB" dirty="0" err="1">
+                <a:latin typeface="Open Sans" panose="020B0606030504020204" pitchFamily="34" charset="0"/>
+                <a:ea typeface="Open Sans" panose="020B0606030504020204" pitchFamily="34" charset="0"/>
+                <a:cs typeface="Open Sans" panose="020B0606030504020204" pitchFamily="34" charset="0"/>
+              </a:rPr>
+              <a:t>SneakerPark</a:t>
+            </a:r>
+            <a:r>
+              <a:rPr lang="en-GB" dirty="0">
+                <a:latin typeface="Open Sans" panose="020B0606030504020204" pitchFamily="34" charset="0"/>
+                <a:ea typeface="Open Sans" panose="020B0606030504020204" pitchFamily="34" charset="0"/>
+                <a:cs typeface="Open Sans" panose="020B0606030504020204" pitchFamily="34" charset="0"/>
+              </a:rPr>
+              <a:t> to improve data quality and governance without making major changes to its existing systems.</a:t>
+            </a:r>
           </a:p>
         </p:txBody>
       </p:sp>
@@ -28902,7 +28526,7 @@
 </p:sld>
 </file>
 
-<file path=ppt/slides/slide18.xml><?xml version="1.0" encoding="utf-8"?>
+<file path=ppt/slides/slide16.xml><?xml version="1.0" encoding="utf-8"?>
 <p:sld xmlns:a="http://schemas.openxmlformats.org/drawingml/2006/main" xmlns:r="http://schemas.openxmlformats.org/officeDocument/2006/relationships" xmlns:p="http://schemas.openxmlformats.org/presentationml/2006/main">
   <p:cSld>
     <p:bg>
@@ -28969,7 +28593,7 @@
               <a:buNone/>
             </a:pPr>
             <a:r>
-              <a:rPr lang="en" sz="3000" b="1">
+              <a:rPr lang="en" sz="3000" b="1" dirty="0">
                 <a:solidFill>
                   <a:srgbClr val="FFFFFF"/>
                 </a:solidFill>
@@ -28980,7 +28604,7 @@
               </a:rPr>
               <a:t>Step 6</a:t>
             </a:r>
-            <a:endParaRPr sz="3000" b="1">
+            <a:endParaRPr sz="3000" b="1" dirty="0">
               <a:solidFill>
                 <a:srgbClr val="FFFFFF"/>
               </a:solidFill>
@@ -29008,7 +28632,7 @@
               <a:buNone/>
             </a:pPr>
             <a:r>
-              <a:rPr lang="en" sz="3000">
+              <a:rPr lang="en" sz="3000" dirty="0">
                 <a:solidFill>
                   <a:srgbClr val="FFFFFF"/>
                 </a:solidFill>
@@ -29019,7 +28643,7 @@
               </a:rPr>
               <a:t>Master Data Management</a:t>
             </a:r>
-            <a:endParaRPr sz="3000">
+            <a:endParaRPr sz="3000" dirty="0">
               <a:solidFill>
                 <a:srgbClr val="FFFFFF"/>
               </a:solidFill>
@@ -29047,7 +28671,7 @@
               <a:buNone/>
             </a:pPr>
             <a:r>
-              <a:rPr lang="en" sz="3000">
+              <a:rPr lang="en" sz="3000" dirty="0">
                 <a:solidFill>
                   <a:schemeClr val="lt1"/>
                 </a:solidFill>
@@ -29058,7 +28682,7 @@
               </a:rPr>
               <a:t>Part 2: Master Record</a:t>
             </a:r>
-            <a:endParaRPr sz="3000">
+            <a:endParaRPr sz="3000" dirty="0">
               <a:solidFill>
                 <a:srgbClr val="FFFFFF"/>
               </a:solidFill>
@@ -29133,7 +28757,7 @@
 </p:sld>
 </file>
 
-<file path=ppt/slides/slide19.xml><?xml version="1.0" encoding="utf-8"?>
+<file path=ppt/slides/slide17.xml><?xml version="1.0" encoding="utf-8"?>
 <p:sld xmlns:a="http://schemas.openxmlformats.org/drawingml/2006/main" xmlns:r="http://schemas.openxmlformats.org/officeDocument/2006/relationships" xmlns:p="http://schemas.openxmlformats.org/presentationml/2006/main">
   <p:cSld>
     <p:spTree>
@@ -29150,414 +28774,1268 @@
           <a:chExt cx="0" cy="0"/>
         </a:xfrm>
       </p:grpSpPr>
-      <p:sp>
-        <p:nvSpPr>
-          <p:cNvPr id="292" name="Google Shape;292;p69"/>
-          <p:cNvSpPr txBox="1">
-            <a:spLocks noGrp="1"/>
-          </p:cNvSpPr>
+      <p:graphicFrame>
+        <p:nvGraphicFramePr>
+          <p:cNvPr id="3" name="Table 2">
+            <a:extLst>
+              <a:ext uri="{FF2B5EF4-FFF2-40B4-BE49-F238E27FC236}">
+                <a16:creationId xmlns:a16="http://schemas.microsoft.com/office/drawing/2014/main" id="{0C10C70B-A6D6-9B57-1500-ABDB09F363B0}"/>
+              </a:ext>
+            </a:extLst>
+          </p:cNvPr>
+          <p:cNvGraphicFramePr>
+            <a:graphicFrameLocks noGrp="1"/>
+          </p:cNvGraphicFramePr>
           <p:nvPr>
-            <p:ph type="body" idx="1"/>
+            <p:extLst>
+              <p:ext uri="{D42A27DB-BD31-4B8C-83A1-F6EECF244321}">
+                <p14:modId xmlns:p14="http://schemas.microsoft.com/office/powerpoint/2010/main" val="1758836253"/>
+              </p:ext>
+            </p:extLst>
           </p:nvPr>
-        </p:nvSpPr>
-        <p:spPr>
-          <a:xfrm>
-            <a:off x="432450" y="717975"/>
-            <a:ext cx="6907500" cy="4777800"/>
-          </a:xfrm>
-          <a:prstGeom prst="rect">
-            <a:avLst/>
-          </a:prstGeom>
-        </p:spPr>
-        <p:txBody>
-          <a:bodyPr spcFirstLastPara="1" wrap="square" lIns="91425" tIns="91425" rIns="91425" bIns="91425" anchor="t" anchorCtr="0">
-            <a:noAutofit/>
-          </a:bodyPr>
-          <a:lstStyle/>
-          <a:p>
-            <a:pPr marL="0" lvl="0" indent="0" algn="just" rtl="0">
-              <a:spcBef>
-                <a:spcPts val="0"/>
-              </a:spcBef>
-              <a:spcAft>
-                <a:spcPts val="0"/>
-              </a:spcAft>
-              <a:buNone/>
-            </a:pPr>
-            <a:r>
-              <a:rPr lang="en" sz="1600">
-                <a:solidFill>
-                  <a:srgbClr val="525C65"/>
-                </a:solidFill>
-                <a:highlight>
-                  <a:srgbClr val="FFFFFF"/>
-                </a:highlight>
-                <a:latin typeface="Open Sans"/>
-                <a:ea typeface="Open Sans"/>
-                <a:cs typeface="Open Sans"/>
-                <a:sym typeface="Open Sans"/>
-              </a:rPr>
-              <a:t>In this step, you will define a set of </a:t>
-            </a:r>
-            <a:r>
-              <a:rPr lang="en" sz="1600" b="1">
-                <a:solidFill>
-                  <a:srgbClr val="525C65"/>
-                </a:solidFill>
-                <a:highlight>
-                  <a:srgbClr val="FFFFFF"/>
-                </a:highlight>
-                <a:latin typeface="Open Sans"/>
-                <a:ea typeface="Open Sans"/>
-                <a:cs typeface="Open Sans"/>
-                <a:sym typeface="Open Sans"/>
-              </a:rPr>
-              <a:t>matching rules</a:t>
-            </a:r>
-            <a:r>
-              <a:rPr lang="en" sz="1600">
-                <a:solidFill>
-                  <a:srgbClr val="525C65"/>
-                </a:solidFill>
-                <a:highlight>
-                  <a:srgbClr val="FFFFFF"/>
-                </a:highlight>
-                <a:latin typeface="Open Sans"/>
-                <a:ea typeface="Open Sans"/>
-                <a:cs typeface="Open Sans"/>
-                <a:sym typeface="Open Sans"/>
-              </a:rPr>
-              <a:t> that will be used by the SneakerPark's MDM Hub to match item and customer entities between the company's different systems.</a:t>
-            </a:r>
-            <a:endParaRPr sz="1600">
-              <a:solidFill>
-                <a:srgbClr val="525C65"/>
-              </a:solidFill>
-              <a:highlight>
-                <a:srgbClr val="FFFFFF"/>
-              </a:highlight>
-              <a:latin typeface="Open Sans"/>
-              <a:ea typeface="Open Sans"/>
-              <a:cs typeface="Open Sans"/>
-              <a:sym typeface="Open Sans"/>
-            </a:endParaRPr>
-          </a:p>
-          <a:p>
-            <a:pPr marL="0" lvl="0" indent="0" algn="just" rtl="0">
-              <a:spcBef>
-                <a:spcPts val="1600"/>
-              </a:spcBef>
-              <a:spcAft>
-                <a:spcPts val="0"/>
-              </a:spcAft>
-              <a:buNone/>
-            </a:pPr>
-            <a:r>
-              <a:rPr lang="en" sz="1600" b="1">
-                <a:solidFill>
-                  <a:srgbClr val="525C65"/>
-                </a:solidFill>
-                <a:highlight>
-                  <a:srgbClr val="FFFFFF"/>
-                </a:highlight>
-                <a:latin typeface="Open Sans"/>
-                <a:ea typeface="Open Sans"/>
-                <a:cs typeface="Open Sans"/>
-                <a:sym typeface="Open Sans"/>
-              </a:rPr>
-              <a:t>Please come up with 4 rules - 2 for Items and 2 for Customers </a:t>
-            </a:r>
-            <a:r>
-              <a:rPr lang="en" sz="1600">
-                <a:solidFill>
-                  <a:srgbClr val="525C65"/>
-                </a:solidFill>
-                <a:highlight>
-                  <a:srgbClr val="FFFFFF"/>
-                </a:highlight>
-                <a:latin typeface="Open Sans"/>
-                <a:ea typeface="Open Sans"/>
-                <a:cs typeface="Open Sans"/>
-                <a:sym typeface="Open Sans"/>
-              </a:rPr>
-              <a:t>and list them below.</a:t>
-            </a:r>
-            <a:endParaRPr sz="1600">
-              <a:solidFill>
-                <a:srgbClr val="525C65"/>
-              </a:solidFill>
-              <a:highlight>
-                <a:srgbClr val="FFFFFF"/>
-              </a:highlight>
-              <a:latin typeface="Open Sans"/>
-              <a:ea typeface="Open Sans"/>
-              <a:cs typeface="Open Sans"/>
-              <a:sym typeface="Open Sans"/>
-            </a:endParaRPr>
-          </a:p>
-          <a:p>
-            <a:pPr marL="241300" marR="241300" lvl="0" indent="0" algn="just" rtl="0">
-              <a:lnSpc>
-                <a:spcPct val="170000"/>
-              </a:lnSpc>
-              <a:spcBef>
-                <a:spcPts val="3800"/>
-              </a:spcBef>
-              <a:spcAft>
-                <a:spcPts val="0"/>
-              </a:spcAft>
-              <a:buNone/>
-            </a:pPr>
-            <a:endParaRPr sz="1600">
-              <a:solidFill>
-                <a:srgbClr val="525C65"/>
-              </a:solidFill>
-              <a:highlight>
-                <a:srgbClr val="FFFFFF"/>
-              </a:highlight>
-              <a:latin typeface="Open Sans"/>
-              <a:ea typeface="Open Sans"/>
-              <a:cs typeface="Open Sans"/>
-              <a:sym typeface="Open Sans"/>
-            </a:endParaRPr>
-          </a:p>
-          <a:p>
-            <a:pPr marL="241300" marR="241300" lvl="0" indent="0" algn="just" rtl="0">
-              <a:lnSpc>
-                <a:spcPct val="170000"/>
-              </a:lnSpc>
-              <a:spcBef>
-                <a:spcPts val="3800"/>
-              </a:spcBef>
-              <a:spcAft>
-                <a:spcPts val="0"/>
-              </a:spcAft>
-              <a:buNone/>
-            </a:pPr>
-            <a:endParaRPr sz="1600">
-              <a:solidFill>
-                <a:srgbClr val="525C65"/>
-              </a:solidFill>
-              <a:highlight>
-                <a:srgbClr val="FFFFFF"/>
-              </a:highlight>
-              <a:latin typeface="Open Sans"/>
-              <a:ea typeface="Open Sans"/>
-              <a:cs typeface="Open Sans"/>
-              <a:sym typeface="Open Sans"/>
-            </a:endParaRPr>
-          </a:p>
-          <a:p>
-            <a:pPr marL="241300" marR="241300" lvl="0" indent="0" algn="just" rtl="0">
-              <a:lnSpc>
-                <a:spcPct val="170000"/>
-              </a:lnSpc>
-              <a:spcBef>
-                <a:spcPts val="3800"/>
-              </a:spcBef>
-              <a:spcAft>
-                <a:spcPts val="0"/>
-              </a:spcAft>
-              <a:buNone/>
-            </a:pPr>
-            <a:endParaRPr sz="1600">
-              <a:solidFill>
-                <a:srgbClr val="525C65"/>
-              </a:solidFill>
-              <a:highlight>
-                <a:srgbClr val="FFFFFF"/>
-              </a:highlight>
-              <a:latin typeface="Open Sans"/>
-              <a:ea typeface="Open Sans"/>
-              <a:cs typeface="Open Sans"/>
-              <a:sym typeface="Open Sans"/>
-            </a:endParaRPr>
-          </a:p>
-          <a:p>
-            <a:pPr marL="241300" marR="241300" lvl="0" indent="0" algn="just" rtl="0">
-              <a:lnSpc>
-                <a:spcPct val="170000"/>
-              </a:lnSpc>
-              <a:spcBef>
-                <a:spcPts val="3800"/>
-              </a:spcBef>
-              <a:spcAft>
-                <a:spcPts val="0"/>
-              </a:spcAft>
-              <a:buNone/>
-            </a:pPr>
-            <a:endParaRPr sz="1600">
-              <a:solidFill>
-                <a:srgbClr val="525C65"/>
-              </a:solidFill>
-              <a:highlight>
-                <a:srgbClr val="FFFFFF"/>
-              </a:highlight>
-              <a:latin typeface="Open Sans"/>
-              <a:ea typeface="Open Sans"/>
-              <a:cs typeface="Open Sans"/>
-              <a:sym typeface="Open Sans"/>
-            </a:endParaRPr>
-          </a:p>
-          <a:p>
-            <a:pPr marL="241300" marR="241300" lvl="0" indent="0" algn="just" rtl="0">
-              <a:lnSpc>
-                <a:spcPct val="170000"/>
-              </a:lnSpc>
-              <a:spcBef>
-                <a:spcPts val="3800"/>
-              </a:spcBef>
-              <a:spcAft>
-                <a:spcPts val="0"/>
-              </a:spcAft>
-              <a:buNone/>
-            </a:pPr>
-            <a:endParaRPr sz="1600">
-              <a:solidFill>
-                <a:srgbClr val="525C65"/>
-              </a:solidFill>
-              <a:highlight>
-                <a:srgbClr val="FFFFFF"/>
-              </a:highlight>
-              <a:latin typeface="Open Sans"/>
-              <a:ea typeface="Open Sans"/>
-              <a:cs typeface="Open Sans"/>
-              <a:sym typeface="Open Sans"/>
-            </a:endParaRPr>
-          </a:p>
-          <a:p>
-            <a:pPr marL="0" marR="241300" lvl="0" indent="0" algn="just" rtl="0">
-              <a:lnSpc>
-                <a:spcPct val="170000"/>
-              </a:lnSpc>
-              <a:spcBef>
-                <a:spcPts val="3800"/>
-              </a:spcBef>
-              <a:spcAft>
-                <a:spcPts val="0"/>
-              </a:spcAft>
-              <a:buClr>
-                <a:schemeClr val="dk1"/>
-              </a:buClr>
-              <a:buSzPts val="1100"/>
-              <a:buFont typeface="Arial"/>
-              <a:buNone/>
-            </a:pPr>
-            <a:endParaRPr sz="1400">
-              <a:solidFill>
-                <a:srgbClr val="525C65"/>
-              </a:solidFill>
-              <a:highlight>
-                <a:srgbClr val="FFFFFF"/>
-              </a:highlight>
-              <a:latin typeface="Open Sans"/>
-              <a:ea typeface="Open Sans"/>
-              <a:cs typeface="Open Sans"/>
-              <a:sym typeface="Open Sans"/>
-            </a:endParaRPr>
-          </a:p>
-          <a:p>
-            <a:pPr marL="241300" marR="241300" lvl="0" indent="0" algn="just" rtl="0">
-              <a:lnSpc>
-                <a:spcPct val="170000"/>
-              </a:lnSpc>
-              <a:spcBef>
-                <a:spcPts val="3800"/>
-              </a:spcBef>
-              <a:spcAft>
-                <a:spcPts val="0"/>
-              </a:spcAft>
-              <a:buClr>
-                <a:schemeClr val="dk1"/>
-              </a:buClr>
-              <a:buSzPts val="1100"/>
-              <a:buFont typeface="Arial"/>
-              <a:buNone/>
-            </a:pPr>
-            <a:endParaRPr sz="1600">
-              <a:solidFill>
-                <a:srgbClr val="525C65"/>
-              </a:solidFill>
-              <a:highlight>
-                <a:srgbClr val="FFFFFF"/>
-              </a:highlight>
-              <a:latin typeface="Open Sans"/>
-              <a:ea typeface="Open Sans"/>
-              <a:cs typeface="Open Sans"/>
-              <a:sym typeface="Open Sans"/>
-            </a:endParaRPr>
-          </a:p>
-          <a:p>
-            <a:pPr marL="0" lvl="0" indent="0" algn="just" rtl="0">
-              <a:spcBef>
-                <a:spcPts val="0"/>
-              </a:spcBef>
-              <a:spcAft>
-                <a:spcPts val="0"/>
-              </a:spcAft>
-              <a:buNone/>
-            </a:pPr>
-            <a:endParaRPr sz="1600">
-              <a:solidFill>
-                <a:srgbClr val="525C65"/>
-              </a:solidFill>
-              <a:highlight>
-                <a:srgbClr val="FFFFFF"/>
-              </a:highlight>
-              <a:latin typeface="Open Sans"/>
-              <a:ea typeface="Open Sans"/>
-              <a:cs typeface="Open Sans"/>
-              <a:sym typeface="Open Sans"/>
-            </a:endParaRPr>
-          </a:p>
-          <a:p>
-            <a:pPr marL="0" lvl="0" indent="0" algn="just" rtl="0">
-              <a:spcBef>
-                <a:spcPts val="1600"/>
-              </a:spcBef>
-              <a:spcAft>
-                <a:spcPts val="0"/>
-              </a:spcAft>
-              <a:buNone/>
-            </a:pPr>
-            <a:endParaRPr sz="1600">
-              <a:solidFill>
-                <a:srgbClr val="525C65"/>
-              </a:solidFill>
-              <a:highlight>
-                <a:srgbClr val="FFFFFF"/>
-              </a:highlight>
-              <a:latin typeface="Open Sans"/>
-              <a:ea typeface="Open Sans"/>
-              <a:cs typeface="Open Sans"/>
-              <a:sym typeface="Open Sans"/>
-            </a:endParaRPr>
-          </a:p>
-          <a:p>
-            <a:pPr marL="0" lvl="0" indent="0" algn="just" rtl="0">
-              <a:spcBef>
-                <a:spcPts val="1600"/>
-              </a:spcBef>
-              <a:spcAft>
-                <a:spcPts val="1600"/>
-              </a:spcAft>
-              <a:buNone/>
-            </a:pPr>
-            <a:endParaRPr sz="1600">
-              <a:solidFill>
-                <a:srgbClr val="525C65"/>
-              </a:solidFill>
-              <a:highlight>
-                <a:srgbClr val="FFFFFF"/>
-              </a:highlight>
-              <a:latin typeface="Open Sans"/>
-              <a:ea typeface="Open Sans"/>
-              <a:cs typeface="Open Sans"/>
-              <a:sym typeface="Open Sans"/>
-            </a:endParaRPr>
-          </a:p>
-        </p:txBody>
-      </p:sp>
+        </p:nvGraphicFramePr>
+        <p:xfrm>
+          <a:off x="321257" y="1496082"/>
+          <a:ext cx="7129885" cy="4790440"/>
+        </p:xfrm>
+        <a:graphic>
+          <a:graphicData uri="http://schemas.openxmlformats.org/drawingml/2006/table">
+            <a:tbl>
+              <a:tblPr firstRow="1" bandRow="1">
+                <a:tableStyleId>{F5AB1C69-6EDB-4FF4-983F-18BD219EF322}</a:tableStyleId>
+              </a:tblPr>
+              <a:tblGrid>
+                <a:gridCol w="1099770">
+                  <a:extLst>
+                    <a:ext uri="{9D8B030D-6E8A-4147-A177-3AD203B41FA5}">
+                      <a16:colId xmlns:a16="http://schemas.microsoft.com/office/drawing/2014/main" val="2765338642"/>
+                    </a:ext>
+                  </a:extLst>
+                </a:gridCol>
+                <a:gridCol w="1421027">
+                  <a:extLst>
+                    <a:ext uri="{9D8B030D-6E8A-4147-A177-3AD203B41FA5}">
+                      <a16:colId xmlns:a16="http://schemas.microsoft.com/office/drawing/2014/main" val="1496962417"/>
+                    </a:ext>
+                  </a:extLst>
+                </a:gridCol>
+                <a:gridCol w="4609088">
+                  <a:extLst>
+                    <a:ext uri="{9D8B030D-6E8A-4147-A177-3AD203B41FA5}">
+                      <a16:colId xmlns:a16="http://schemas.microsoft.com/office/drawing/2014/main" val="2449496560"/>
+                    </a:ext>
+                  </a:extLst>
+                </a:gridCol>
+              </a:tblGrid>
+              <a:tr h="370840">
+                <a:tc>
+                  <a:txBody>
+                    <a:bodyPr/>
+                    <a:lstStyle/>
+                    <a:p>
+                      <a:r>
+                        <a:rPr lang="en-US" sz="1400" dirty="0"/>
+                        <a:t>Entity</a:t>
+                      </a:r>
+                      <a:endParaRPr lang="en-GB" sz="1400" dirty="0"/>
+                    </a:p>
+                  </a:txBody>
+                  <a:tcPr>
+                    <a:lnL w="12700" cap="flat" cmpd="sng" algn="ctr">
+                      <a:solidFill>
+                        <a:schemeClr val="tx1"/>
+                      </a:solidFill>
+                      <a:prstDash val="solid"/>
+                      <a:round/>
+                      <a:headEnd type="none" w="med" len="med"/>
+                      <a:tailEnd type="none" w="med" len="med"/>
+                    </a:lnL>
+                    <a:lnR w="12700" cap="flat" cmpd="sng" algn="ctr">
+                      <a:solidFill>
+                        <a:schemeClr val="tx1"/>
+                      </a:solidFill>
+                      <a:prstDash val="solid"/>
+                      <a:round/>
+                      <a:headEnd type="none" w="med" len="med"/>
+                      <a:tailEnd type="none" w="med" len="med"/>
+                    </a:lnR>
+                    <a:lnT w="12700" cap="flat" cmpd="sng" algn="ctr">
+                      <a:solidFill>
+                        <a:schemeClr val="tx1"/>
+                      </a:solidFill>
+                      <a:prstDash val="solid"/>
+                      <a:round/>
+                      <a:headEnd type="none" w="med" len="med"/>
+                      <a:tailEnd type="none" w="med" len="med"/>
+                    </a:lnT>
+                    <a:lnB w="12700" cap="flat" cmpd="sng" algn="ctr">
+                      <a:solidFill>
+                        <a:schemeClr val="tx1"/>
+                      </a:solidFill>
+                      <a:prstDash val="solid"/>
+                      <a:round/>
+                      <a:headEnd type="none" w="med" len="med"/>
+                      <a:tailEnd type="none" w="med" len="med"/>
+                    </a:lnB>
+                  </a:tcPr>
+                </a:tc>
+                <a:tc>
+                  <a:txBody>
+                    <a:bodyPr/>
+                    <a:lstStyle/>
+                    <a:p>
+                      <a:r>
+                        <a:rPr lang="en-US" sz="1400" dirty="0"/>
+                        <a:t>Rule Name</a:t>
+                      </a:r>
+                      <a:endParaRPr lang="en-GB" sz="1400" dirty="0"/>
+                    </a:p>
+                  </a:txBody>
+                  <a:tcPr>
+                    <a:lnL w="12700" cap="flat" cmpd="sng" algn="ctr">
+                      <a:solidFill>
+                        <a:schemeClr val="tx1"/>
+                      </a:solidFill>
+                      <a:prstDash val="solid"/>
+                      <a:round/>
+                      <a:headEnd type="none" w="med" len="med"/>
+                      <a:tailEnd type="none" w="med" len="med"/>
+                    </a:lnL>
+                    <a:lnR w="12700" cap="flat" cmpd="sng" algn="ctr">
+                      <a:solidFill>
+                        <a:schemeClr val="tx1"/>
+                      </a:solidFill>
+                      <a:prstDash val="solid"/>
+                      <a:round/>
+                      <a:headEnd type="none" w="med" len="med"/>
+                      <a:tailEnd type="none" w="med" len="med"/>
+                    </a:lnR>
+                    <a:lnT w="12700" cap="flat" cmpd="sng" algn="ctr">
+                      <a:solidFill>
+                        <a:schemeClr val="tx1"/>
+                      </a:solidFill>
+                      <a:prstDash val="solid"/>
+                      <a:round/>
+                      <a:headEnd type="none" w="med" len="med"/>
+                      <a:tailEnd type="none" w="med" len="med"/>
+                    </a:lnT>
+                    <a:lnB w="12700" cap="flat" cmpd="sng" algn="ctr">
+                      <a:solidFill>
+                        <a:schemeClr val="tx1"/>
+                      </a:solidFill>
+                      <a:prstDash val="solid"/>
+                      <a:round/>
+                      <a:headEnd type="none" w="med" len="med"/>
+                      <a:tailEnd type="none" w="med" len="med"/>
+                    </a:lnB>
+                  </a:tcPr>
+                </a:tc>
+                <a:tc>
+                  <a:txBody>
+                    <a:bodyPr/>
+                    <a:lstStyle/>
+                    <a:p>
+                      <a:r>
+                        <a:rPr lang="en-US" sz="1400" dirty="0"/>
+                        <a:t>Matching Rule</a:t>
+                      </a:r>
+                      <a:endParaRPr lang="en-GB" sz="1400" dirty="0"/>
+                    </a:p>
+                  </a:txBody>
+                  <a:tcPr>
+                    <a:lnL w="12700" cap="flat" cmpd="sng" algn="ctr">
+                      <a:solidFill>
+                        <a:schemeClr val="tx1"/>
+                      </a:solidFill>
+                      <a:prstDash val="solid"/>
+                      <a:round/>
+                      <a:headEnd type="none" w="med" len="med"/>
+                      <a:tailEnd type="none" w="med" len="med"/>
+                    </a:lnL>
+                    <a:lnR w="12700" cap="flat" cmpd="sng" algn="ctr">
+                      <a:solidFill>
+                        <a:schemeClr val="tx1"/>
+                      </a:solidFill>
+                      <a:prstDash val="solid"/>
+                      <a:round/>
+                      <a:headEnd type="none" w="med" len="med"/>
+                      <a:tailEnd type="none" w="med" len="med"/>
+                    </a:lnR>
+                    <a:lnT w="12700" cap="flat" cmpd="sng" algn="ctr">
+                      <a:solidFill>
+                        <a:schemeClr val="tx1"/>
+                      </a:solidFill>
+                      <a:prstDash val="solid"/>
+                      <a:round/>
+                      <a:headEnd type="none" w="med" len="med"/>
+                      <a:tailEnd type="none" w="med" len="med"/>
+                    </a:lnT>
+                    <a:lnB w="12700" cap="flat" cmpd="sng" algn="ctr">
+                      <a:solidFill>
+                        <a:schemeClr val="tx1"/>
+                      </a:solidFill>
+                      <a:prstDash val="solid"/>
+                      <a:round/>
+                      <a:headEnd type="none" w="med" len="med"/>
+                      <a:tailEnd type="none" w="med" len="med"/>
+                    </a:lnB>
+                  </a:tcPr>
+                </a:tc>
+                <a:extLst>
+                  <a:ext uri="{0D108BD9-81ED-4DB2-BD59-A6C34878D82A}">
+                    <a16:rowId xmlns:a16="http://schemas.microsoft.com/office/drawing/2014/main" val="2448077537"/>
+                  </a:ext>
+                </a:extLst>
+              </a:tr>
+              <a:tr h="370840">
+                <a:tc>
+                  <a:txBody>
+                    <a:bodyPr/>
+                    <a:lstStyle/>
+                    <a:p>
+                      <a:r>
+                        <a:rPr lang="en-US" sz="1400" b="0" i="0" u="none" strike="noStrike" cap="none" dirty="0">
+                          <a:solidFill>
+                            <a:srgbClr val="000000"/>
+                          </a:solidFill>
+                          <a:latin typeface="Open Sans" panose="020B0606030504020204" pitchFamily="34" charset="0"/>
+                          <a:ea typeface="Open Sans" panose="020B0606030504020204" pitchFamily="34" charset="0"/>
+                          <a:cs typeface="Open Sans" panose="020B0606030504020204" pitchFamily="34" charset="0"/>
+                          <a:sym typeface="Arial"/>
+                        </a:rPr>
+                        <a:t>Customer</a:t>
+                      </a:r>
+                      <a:endParaRPr lang="en-GB" sz="1400" b="0" i="0" u="none" strike="noStrike" cap="none" dirty="0">
+                        <a:solidFill>
+                          <a:srgbClr val="000000"/>
+                        </a:solidFill>
+                        <a:latin typeface="Open Sans" panose="020B0606030504020204" pitchFamily="34" charset="0"/>
+                        <a:ea typeface="Open Sans" panose="020B0606030504020204" pitchFamily="34" charset="0"/>
+                        <a:cs typeface="Open Sans" panose="020B0606030504020204" pitchFamily="34" charset="0"/>
+                        <a:sym typeface="Arial"/>
+                      </a:endParaRPr>
+                    </a:p>
+                  </a:txBody>
+                  <a:tcPr>
+                    <a:lnL w="12700" cap="flat" cmpd="sng" algn="ctr">
+                      <a:solidFill>
+                        <a:schemeClr val="tx1"/>
+                      </a:solidFill>
+                      <a:prstDash val="solid"/>
+                      <a:round/>
+                      <a:headEnd type="none" w="med" len="med"/>
+                      <a:tailEnd type="none" w="med" len="med"/>
+                    </a:lnL>
+                    <a:lnR w="12700" cap="flat" cmpd="sng" algn="ctr">
+                      <a:solidFill>
+                        <a:schemeClr val="tx1"/>
+                      </a:solidFill>
+                      <a:prstDash val="solid"/>
+                      <a:round/>
+                      <a:headEnd type="none" w="med" len="med"/>
+                      <a:tailEnd type="none" w="med" len="med"/>
+                    </a:lnR>
+                    <a:lnT w="12700" cap="flat" cmpd="sng" algn="ctr">
+                      <a:solidFill>
+                        <a:schemeClr val="tx1"/>
+                      </a:solidFill>
+                      <a:prstDash val="solid"/>
+                      <a:round/>
+                      <a:headEnd type="none" w="med" len="med"/>
+                      <a:tailEnd type="none" w="med" len="med"/>
+                    </a:lnT>
+                    <a:lnB w="12700" cap="flat" cmpd="sng" algn="ctr">
+                      <a:solidFill>
+                        <a:schemeClr val="tx1"/>
+                      </a:solidFill>
+                      <a:prstDash val="solid"/>
+                      <a:round/>
+                      <a:headEnd type="none" w="med" len="med"/>
+                      <a:tailEnd type="none" w="med" len="med"/>
+                    </a:lnB>
+                  </a:tcPr>
+                </a:tc>
+                <a:tc>
+                  <a:txBody>
+                    <a:bodyPr/>
+                    <a:lstStyle/>
+                    <a:p>
+                      <a:r>
+                        <a:rPr lang="en-GB" sz="1400" b="0" i="0" u="none" strike="noStrike" cap="none" dirty="0">
+                          <a:solidFill>
+                            <a:srgbClr val="000000"/>
+                          </a:solidFill>
+                          <a:latin typeface="Open Sans" panose="020B0606030504020204" pitchFamily="34" charset="0"/>
+                          <a:ea typeface="Open Sans" panose="020B0606030504020204" pitchFamily="34" charset="0"/>
+                          <a:cs typeface="Open Sans" panose="020B0606030504020204" pitchFamily="34" charset="0"/>
+                          <a:sym typeface="Arial"/>
+                        </a:rPr>
+                        <a:t>Customer Email Match</a:t>
+                      </a:r>
+                    </a:p>
+                  </a:txBody>
+                  <a:tcPr>
+                    <a:lnL w="12700" cap="flat" cmpd="sng" algn="ctr">
+                      <a:solidFill>
+                        <a:schemeClr val="tx1"/>
+                      </a:solidFill>
+                      <a:prstDash val="solid"/>
+                      <a:round/>
+                      <a:headEnd type="none" w="med" len="med"/>
+                      <a:tailEnd type="none" w="med" len="med"/>
+                    </a:lnL>
+                    <a:lnR w="12700" cap="flat" cmpd="sng" algn="ctr">
+                      <a:solidFill>
+                        <a:schemeClr val="tx1"/>
+                      </a:solidFill>
+                      <a:prstDash val="solid"/>
+                      <a:round/>
+                      <a:headEnd type="none" w="med" len="med"/>
+                      <a:tailEnd type="none" w="med" len="med"/>
+                    </a:lnR>
+                    <a:lnT w="12700" cap="flat" cmpd="sng" algn="ctr">
+                      <a:solidFill>
+                        <a:schemeClr val="tx1"/>
+                      </a:solidFill>
+                      <a:prstDash val="solid"/>
+                      <a:round/>
+                      <a:headEnd type="none" w="med" len="med"/>
+                      <a:tailEnd type="none" w="med" len="med"/>
+                    </a:lnT>
+                    <a:lnB w="12700" cap="flat" cmpd="sng" algn="ctr">
+                      <a:solidFill>
+                        <a:schemeClr val="tx1"/>
+                      </a:solidFill>
+                      <a:prstDash val="solid"/>
+                      <a:round/>
+                      <a:headEnd type="none" w="med" len="med"/>
+                      <a:tailEnd type="none" w="med" len="med"/>
+                    </a:lnB>
+                  </a:tcPr>
+                </a:tc>
+                <a:tc>
+                  <a:txBody>
+                    <a:bodyPr/>
+                    <a:lstStyle/>
+                    <a:p>
+                      <a:pPr marL="285750" marR="0" lvl="0" indent="-285750" algn="l" defTabSz="914400" rtl="0" eaLnBrk="1" fontAlgn="auto" latinLnBrk="0" hangingPunct="1">
+                        <a:lnSpc>
+                          <a:spcPct val="100000"/>
+                        </a:lnSpc>
+                        <a:spcBef>
+                          <a:spcPts val="0"/>
+                        </a:spcBef>
+                        <a:spcAft>
+                          <a:spcPts val="0"/>
+                        </a:spcAft>
+                        <a:buClr>
+                          <a:srgbClr val="000000"/>
+                        </a:buClr>
+                        <a:buSzTx/>
+                        <a:buFont typeface="Arial" panose="020B0604020202020204" pitchFamily="34" charset="0"/>
+                        <a:buChar char="•"/>
+                        <a:tabLst/>
+                        <a:defRPr/>
+                      </a:pPr>
+                      <a:r>
+                        <a:rPr lang="en-GB" sz="1400" b="0" i="0" u="none" strike="noStrike" cap="none" dirty="0">
+                          <a:solidFill>
+                            <a:srgbClr val="000000"/>
+                          </a:solidFill>
+                          <a:latin typeface="Open Sans" panose="020B0606030504020204" pitchFamily="34" charset="0"/>
+                          <a:ea typeface="Open Sans" panose="020B0606030504020204" pitchFamily="34" charset="0"/>
+                          <a:cs typeface="Open Sans" panose="020B0606030504020204" pitchFamily="34" charset="0"/>
+                          <a:sym typeface="Arial"/>
+                        </a:rPr>
+                        <a:t>Match customer records when the Email Address is identical across multiple systems.</a:t>
+                      </a:r>
+                    </a:p>
+                    <a:p>
+                      <a:pPr marL="285750" marR="0" lvl="0" indent="-285750" algn="l" defTabSz="914400" rtl="0" eaLnBrk="1" fontAlgn="auto" latinLnBrk="0" hangingPunct="1">
+                        <a:lnSpc>
+                          <a:spcPct val="100000"/>
+                        </a:lnSpc>
+                        <a:spcBef>
+                          <a:spcPts val="0"/>
+                        </a:spcBef>
+                        <a:spcAft>
+                          <a:spcPts val="0"/>
+                        </a:spcAft>
+                        <a:buClr>
+                          <a:srgbClr val="000000"/>
+                        </a:buClr>
+                        <a:buSzTx/>
+                        <a:buFont typeface="Arial" panose="020B0604020202020204" pitchFamily="34" charset="0"/>
+                        <a:buChar char="•"/>
+                        <a:tabLst/>
+                        <a:defRPr/>
+                      </a:pPr>
+                      <a:r>
+                        <a:rPr lang="en-GB" sz="1400" b="0" i="0" u="none" strike="noStrike" cap="none" dirty="0">
+                          <a:solidFill>
+                            <a:srgbClr val="000000"/>
+                          </a:solidFill>
+                          <a:latin typeface="Open Sans" panose="020B0606030504020204" pitchFamily="34" charset="0"/>
+                          <a:ea typeface="Open Sans" panose="020B0606030504020204" pitchFamily="34" charset="0"/>
+                          <a:cs typeface="Open Sans" panose="020B0606030504020204" pitchFamily="34" charset="0"/>
+                          <a:sym typeface="Arial"/>
+                        </a:rPr>
+                        <a:t>Provides a high-confidence match because email addresses are expected to be unique for each customer.</a:t>
+                      </a:r>
+                    </a:p>
+                    <a:p>
+                      <a:endParaRPr lang="en-GB" sz="1400" b="0" i="0" u="none" strike="noStrike" cap="none" dirty="0">
+                        <a:solidFill>
+                          <a:srgbClr val="000000"/>
+                        </a:solidFill>
+                        <a:latin typeface="Open Sans" panose="020B0606030504020204" pitchFamily="34" charset="0"/>
+                        <a:ea typeface="Open Sans" panose="020B0606030504020204" pitchFamily="34" charset="0"/>
+                        <a:cs typeface="Open Sans" panose="020B0606030504020204" pitchFamily="34" charset="0"/>
+                        <a:sym typeface="Arial"/>
+                      </a:endParaRPr>
+                    </a:p>
+                  </a:txBody>
+                  <a:tcPr>
+                    <a:lnL w="12700" cap="flat" cmpd="sng" algn="ctr">
+                      <a:solidFill>
+                        <a:schemeClr val="tx1"/>
+                      </a:solidFill>
+                      <a:prstDash val="solid"/>
+                      <a:round/>
+                      <a:headEnd type="none" w="med" len="med"/>
+                      <a:tailEnd type="none" w="med" len="med"/>
+                    </a:lnL>
+                    <a:lnR w="12700" cap="flat" cmpd="sng" algn="ctr">
+                      <a:solidFill>
+                        <a:schemeClr val="tx1"/>
+                      </a:solidFill>
+                      <a:prstDash val="solid"/>
+                      <a:round/>
+                      <a:headEnd type="none" w="med" len="med"/>
+                      <a:tailEnd type="none" w="med" len="med"/>
+                    </a:lnR>
+                    <a:lnT w="12700" cap="flat" cmpd="sng" algn="ctr">
+                      <a:solidFill>
+                        <a:schemeClr val="tx1"/>
+                      </a:solidFill>
+                      <a:prstDash val="solid"/>
+                      <a:round/>
+                      <a:headEnd type="none" w="med" len="med"/>
+                      <a:tailEnd type="none" w="med" len="med"/>
+                    </a:lnT>
+                    <a:lnB w="12700" cap="flat" cmpd="sng" algn="ctr">
+                      <a:solidFill>
+                        <a:schemeClr val="tx1"/>
+                      </a:solidFill>
+                      <a:prstDash val="solid"/>
+                      <a:round/>
+                      <a:headEnd type="none" w="med" len="med"/>
+                      <a:tailEnd type="none" w="med" len="med"/>
+                    </a:lnB>
+                  </a:tcPr>
+                </a:tc>
+                <a:extLst>
+                  <a:ext uri="{0D108BD9-81ED-4DB2-BD59-A6C34878D82A}">
+                    <a16:rowId xmlns:a16="http://schemas.microsoft.com/office/drawing/2014/main" val="473429706"/>
+                  </a:ext>
+                </a:extLst>
+              </a:tr>
+              <a:tr h="370840">
+                <a:tc>
+                  <a:txBody>
+                    <a:bodyPr/>
+                    <a:lstStyle/>
+                    <a:p>
+                      <a:pPr marL="0" marR="0" lvl="0" indent="0" algn="l" defTabSz="914400" rtl="0" eaLnBrk="1" fontAlgn="auto" latinLnBrk="0" hangingPunct="1">
+                        <a:lnSpc>
+                          <a:spcPct val="100000"/>
+                        </a:lnSpc>
+                        <a:spcBef>
+                          <a:spcPts val="0"/>
+                        </a:spcBef>
+                        <a:spcAft>
+                          <a:spcPts val="0"/>
+                        </a:spcAft>
+                        <a:buClr>
+                          <a:srgbClr val="000000"/>
+                        </a:buClr>
+                        <a:buSzTx/>
+                        <a:buFont typeface="Arial"/>
+                        <a:buNone/>
+                        <a:tabLst/>
+                        <a:defRPr/>
+                      </a:pPr>
+                      <a:r>
+                        <a:rPr lang="en-US" sz="1400" b="0" i="0" u="none" strike="noStrike" cap="none" dirty="0">
+                          <a:solidFill>
+                            <a:srgbClr val="000000"/>
+                          </a:solidFill>
+                          <a:latin typeface="Open Sans" panose="020B0606030504020204" pitchFamily="34" charset="0"/>
+                          <a:ea typeface="Open Sans" panose="020B0606030504020204" pitchFamily="34" charset="0"/>
+                          <a:cs typeface="Open Sans" panose="020B0606030504020204" pitchFamily="34" charset="0"/>
+                          <a:sym typeface="Arial"/>
+                        </a:rPr>
+                        <a:t>Customer</a:t>
+                      </a:r>
+                      <a:endParaRPr lang="en-GB" sz="1400" b="0" i="0" u="none" strike="noStrike" cap="none" dirty="0">
+                        <a:solidFill>
+                          <a:srgbClr val="000000"/>
+                        </a:solidFill>
+                        <a:latin typeface="Open Sans" panose="020B0606030504020204" pitchFamily="34" charset="0"/>
+                        <a:ea typeface="Open Sans" panose="020B0606030504020204" pitchFamily="34" charset="0"/>
+                        <a:cs typeface="Open Sans" panose="020B0606030504020204" pitchFamily="34" charset="0"/>
+                        <a:sym typeface="Arial"/>
+                      </a:endParaRPr>
+                    </a:p>
+                  </a:txBody>
+                  <a:tcPr>
+                    <a:lnL w="12700" cap="flat" cmpd="sng" algn="ctr">
+                      <a:solidFill>
+                        <a:schemeClr val="tx1"/>
+                      </a:solidFill>
+                      <a:prstDash val="solid"/>
+                      <a:round/>
+                      <a:headEnd type="none" w="med" len="med"/>
+                      <a:tailEnd type="none" w="med" len="med"/>
+                    </a:lnL>
+                    <a:lnR w="12700" cap="flat" cmpd="sng" algn="ctr">
+                      <a:solidFill>
+                        <a:schemeClr val="tx1"/>
+                      </a:solidFill>
+                      <a:prstDash val="solid"/>
+                      <a:round/>
+                      <a:headEnd type="none" w="med" len="med"/>
+                      <a:tailEnd type="none" w="med" len="med"/>
+                    </a:lnR>
+                    <a:lnT w="12700" cap="flat" cmpd="sng" algn="ctr">
+                      <a:solidFill>
+                        <a:schemeClr val="tx1"/>
+                      </a:solidFill>
+                      <a:prstDash val="solid"/>
+                      <a:round/>
+                      <a:headEnd type="none" w="med" len="med"/>
+                      <a:tailEnd type="none" w="med" len="med"/>
+                    </a:lnT>
+                    <a:lnB w="12700" cap="flat" cmpd="sng" algn="ctr">
+                      <a:solidFill>
+                        <a:schemeClr val="tx1"/>
+                      </a:solidFill>
+                      <a:prstDash val="solid"/>
+                      <a:round/>
+                      <a:headEnd type="none" w="med" len="med"/>
+                      <a:tailEnd type="none" w="med" len="med"/>
+                    </a:lnB>
+                  </a:tcPr>
+                </a:tc>
+                <a:tc>
+                  <a:txBody>
+                    <a:bodyPr/>
+                    <a:lstStyle/>
+                    <a:p>
+                      <a:pPr marL="0" marR="0" lvl="0" indent="0" algn="l" defTabSz="914400" rtl="0" eaLnBrk="1" fontAlgn="auto" latinLnBrk="0" hangingPunct="1">
+                        <a:lnSpc>
+                          <a:spcPct val="100000"/>
+                        </a:lnSpc>
+                        <a:spcBef>
+                          <a:spcPts val="0"/>
+                        </a:spcBef>
+                        <a:spcAft>
+                          <a:spcPts val="0"/>
+                        </a:spcAft>
+                        <a:buClr>
+                          <a:srgbClr val="000000"/>
+                        </a:buClr>
+                        <a:buSzTx/>
+                        <a:buFont typeface="Arial"/>
+                        <a:buNone/>
+                        <a:tabLst/>
+                        <a:defRPr/>
+                      </a:pPr>
+                      <a:r>
+                        <a:rPr lang="en-GB" sz="1400" b="0" i="0" u="none" strike="noStrike" cap="none" dirty="0">
+                          <a:solidFill>
+                            <a:srgbClr val="000000"/>
+                          </a:solidFill>
+                          <a:latin typeface="Open Sans" panose="020B0606030504020204" pitchFamily="34" charset="0"/>
+                          <a:ea typeface="Open Sans" panose="020B0606030504020204" pitchFamily="34" charset="0"/>
+                          <a:cs typeface="Open Sans" panose="020B0606030504020204" pitchFamily="34" charset="0"/>
+                          <a:sym typeface="Arial"/>
+                        </a:rPr>
+                        <a:t>Customer Name &amp; Address Match</a:t>
+                      </a:r>
+                    </a:p>
+                  </a:txBody>
+                  <a:tcPr>
+                    <a:lnL w="12700" cap="flat" cmpd="sng" algn="ctr">
+                      <a:solidFill>
+                        <a:schemeClr val="tx1"/>
+                      </a:solidFill>
+                      <a:prstDash val="solid"/>
+                      <a:round/>
+                      <a:headEnd type="none" w="med" len="med"/>
+                      <a:tailEnd type="none" w="med" len="med"/>
+                    </a:lnL>
+                    <a:lnR w="12700" cap="flat" cmpd="sng" algn="ctr">
+                      <a:solidFill>
+                        <a:schemeClr val="tx1"/>
+                      </a:solidFill>
+                      <a:prstDash val="solid"/>
+                      <a:round/>
+                      <a:headEnd type="none" w="med" len="med"/>
+                      <a:tailEnd type="none" w="med" len="med"/>
+                    </a:lnR>
+                    <a:lnT w="12700" cap="flat" cmpd="sng" algn="ctr">
+                      <a:solidFill>
+                        <a:schemeClr val="tx1"/>
+                      </a:solidFill>
+                      <a:prstDash val="solid"/>
+                      <a:round/>
+                      <a:headEnd type="none" w="med" len="med"/>
+                      <a:tailEnd type="none" w="med" len="med"/>
+                    </a:lnT>
+                    <a:lnB w="12700" cap="flat" cmpd="sng" algn="ctr">
+                      <a:solidFill>
+                        <a:schemeClr val="tx1"/>
+                      </a:solidFill>
+                      <a:prstDash val="solid"/>
+                      <a:round/>
+                      <a:headEnd type="none" w="med" len="med"/>
+                      <a:tailEnd type="none" w="med" len="med"/>
+                    </a:lnB>
+                  </a:tcPr>
+                </a:tc>
+                <a:tc>
+                  <a:txBody>
+                    <a:bodyPr/>
+                    <a:lstStyle/>
+                    <a:p>
+                      <a:pPr marL="285750" marR="0" lvl="0" indent="-285750" algn="l" defTabSz="914400" rtl="0" eaLnBrk="1" fontAlgn="auto" latinLnBrk="0" hangingPunct="1">
+                        <a:lnSpc>
+                          <a:spcPct val="100000"/>
+                        </a:lnSpc>
+                        <a:spcBef>
+                          <a:spcPts val="0"/>
+                        </a:spcBef>
+                        <a:spcAft>
+                          <a:spcPts val="0"/>
+                        </a:spcAft>
+                        <a:buClr>
+                          <a:srgbClr val="000000"/>
+                        </a:buClr>
+                        <a:buSzTx/>
+                        <a:buFont typeface="Arial" panose="020B0604020202020204" pitchFamily="34" charset="0"/>
+                        <a:buChar char="•"/>
+                        <a:tabLst/>
+                        <a:defRPr/>
+                      </a:pPr>
+                      <a:r>
+                        <a:rPr lang="en-GB" sz="1400" b="0" i="0" u="none" strike="noStrike" cap="none" dirty="0">
+                          <a:solidFill>
+                            <a:srgbClr val="000000"/>
+                          </a:solidFill>
+                          <a:latin typeface="Open Sans" panose="020B0606030504020204" pitchFamily="34" charset="0"/>
+                          <a:ea typeface="Open Sans" panose="020B0606030504020204" pitchFamily="34" charset="0"/>
+                          <a:cs typeface="Open Sans" panose="020B0606030504020204" pitchFamily="34" charset="0"/>
+                          <a:sym typeface="Arial"/>
+                        </a:rPr>
+                        <a:t>Match customer records when both the Customer Name and Postal Address are identical.</a:t>
+                      </a:r>
+                    </a:p>
+                    <a:p>
+                      <a:pPr marL="285750" marR="0" lvl="0" indent="-285750" algn="l" defTabSz="914400" rtl="0" eaLnBrk="1" fontAlgn="auto" latinLnBrk="0" hangingPunct="1">
+                        <a:lnSpc>
+                          <a:spcPct val="100000"/>
+                        </a:lnSpc>
+                        <a:spcBef>
+                          <a:spcPts val="0"/>
+                        </a:spcBef>
+                        <a:spcAft>
+                          <a:spcPts val="0"/>
+                        </a:spcAft>
+                        <a:buClr>
+                          <a:srgbClr val="000000"/>
+                        </a:buClr>
+                        <a:buSzTx/>
+                        <a:buFont typeface="Arial" panose="020B0604020202020204" pitchFamily="34" charset="0"/>
+                        <a:buChar char="•"/>
+                        <a:tabLst/>
+                        <a:defRPr/>
+                      </a:pPr>
+                      <a:r>
+                        <a:rPr lang="en-GB" sz="1400" b="0" i="0" u="none" strike="noStrike" cap="none" dirty="0">
+                          <a:solidFill>
+                            <a:srgbClr val="000000"/>
+                          </a:solidFill>
+                          <a:latin typeface="Open Sans" panose="020B0606030504020204" pitchFamily="34" charset="0"/>
+                          <a:ea typeface="Open Sans" panose="020B0606030504020204" pitchFamily="34" charset="0"/>
+                          <a:cs typeface="Open Sans" panose="020B0606030504020204" pitchFamily="34" charset="0"/>
+                          <a:sym typeface="Arial"/>
+                        </a:rPr>
+                        <a:t>This will be used as a fallback when email addresses are missing, invalid, or have changed.</a:t>
+                      </a:r>
+                    </a:p>
+                  </a:txBody>
+                  <a:tcPr>
+                    <a:lnL w="12700" cap="flat" cmpd="sng" algn="ctr">
+                      <a:solidFill>
+                        <a:schemeClr val="tx1"/>
+                      </a:solidFill>
+                      <a:prstDash val="solid"/>
+                      <a:round/>
+                      <a:headEnd type="none" w="med" len="med"/>
+                      <a:tailEnd type="none" w="med" len="med"/>
+                    </a:lnL>
+                    <a:lnR w="12700" cap="flat" cmpd="sng" algn="ctr">
+                      <a:solidFill>
+                        <a:schemeClr val="tx1"/>
+                      </a:solidFill>
+                      <a:prstDash val="solid"/>
+                      <a:round/>
+                      <a:headEnd type="none" w="med" len="med"/>
+                      <a:tailEnd type="none" w="med" len="med"/>
+                    </a:lnR>
+                    <a:lnT w="12700" cap="flat" cmpd="sng" algn="ctr">
+                      <a:solidFill>
+                        <a:schemeClr val="tx1"/>
+                      </a:solidFill>
+                      <a:prstDash val="solid"/>
+                      <a:round/>
+                      <a:headEnd type="none" w="med" len="med"/>
+                      <a:tailEnd type="none" w="med" len="med"/>
+                    </a:lnT>
+                    <a:lnB w="12700" cap="flat" cmpd="sng" algn="ctr">
+                      <a:solidFill>
+                        <a:schemeClr val="tx1"/>
+                      </a:solidFill>
+                      <a:prstDash val="solid"/>
+                      <a:round/>
+                      <a:headEnd type="none" w="med" len="med"/>
+                      <a:tailEnd type="none" w="med" len="med"/>
+                    </a:lnB>
+                  </a:tcPr>
+                </a:tc>
+                <a:extLst>
+                  <a:ext uri="{0D108BD9-81ED-4DB2-BD59-A6C34878D82A}">
+                    <a16:rowId xmlns:a16="http://schemas.microsoft.com/office/drawing/2014/main" val="2963222371"/>
+                  </a:ext>
+                </a:extLst>
+              </a:tr>
+              <a:tr h="370840">
+                <a:tc>
+                  <a:txBody>
+                    <a:bodyPr/>
+                    <a:lstStyle/>
+                    <a:p>
+                      <a:pPr marL="0" marR="0" lvl="0" indent="0" algn="l" defTabSz="914400" rtl="0" eaLnBrk="1" fontAlgn="auto" latinLnBrk="0" hangingPunct="1">
+                        <a:lnSpc>
+                          <a:spcPct val="100000"/>
+                        </a:lnSpc>
+                        <a:spcBef>
+                          <a:spcPts val="0"/>
+                        </a:spcBef>
+                        <a:spcAft>
+                          <a:spcPts val="0"/>
+                        </a:spcAft>
+                        <a:buClr>
+                          <a:srgbClr val="000000"/>
+                        </a:buClr>
+                        <a:buSzTx/>
+                        <a:buFont typeface="Arial"/>
+                        <a:buNone/>
+                        <a:tabLst/>
+                        <a:defRPr/>
+                      </a:pPr>
+                      <a:r>
+                        <a:rPr lang="en-GB" sz="1400" b="0" i="0" u="none" strike="noStrike" cap="none" dirty="0">
+                          <a:solidFill>
+                            <a:srgbClr val="000000"/>
+                          </a:solidFill>
+                          <a:latin typeface="Open Sans" panose="020B0606030504020204" pitchFamily="34" charset="0"/>
+                          <a:ea typeface="Open Sans" panose="020B0606030504020204" pitchFamily="34" charset="0"/>
+                          <a:cs typeface="Open Sans" panose="020B0606030504020204" pitchFamily="34" charset="0"/>
+                          <a:sym typeface="Arial"/>
+                        </a:rPr>
+                        <a:t>Sneaker Item</a:t>
+                      </a:r>
+                    </a:p>
+                  </a:txBody>
+                  <a:tcPr>
+                    <a:lnL w="12700" cap="flat" cmpd="sng" algn="ctr">
+                      <a:solidFill>
+                        <a:schemeClr val="tx1"/>
+                      </a:solidFill>
+                      <a:prstDash val="solid"/>
+                      <a:round/>
+                      <a:headEnd type="none" w="med" len="med"/>
+                      <a:tailEnd type="none" w="med" len="med"/>
+                    </a:lnL>
+                    <a:lnR w="12700" cap="flat" cmpd="sng" algn="ctr">
+                      <a:solidFill>
+                        <a:schemeClr val="tx1"/>
+                      </a:solidFill>
+                      <a:prstDash val="solid"/>
+                      <a:round/>
+                      <a:headEnd type="none" w="med" len="med"/>
+                      <a:tailEnd type="none" w="med" len="med"/>
+                    </a:lnR>
+                    <a:lnT w="12700" cap="flat" cmpd="sng" algn="ctr">
+                      <a:solidFill>
+                        <a:schemeClr val="tx1"/>
+                      </a:solidFill>
+                      <a:prstDash val="solid"/>
+                      <a:round/>
+                      <a:headEnd type="none" w="med" len="med"/>
+                      <a:tailEnd type="none" w="med" len="med"/>
+                    </a:lnT>
+                    <a:lnB w="12700" cap="flat" cmpd="sng" algn="ctr">
+                      <a:solidFill>
+                        <a:schemeClr val="tx1"/>
+                      </a:solidFill>
+                      <a:prstDash val="solid"/>
+                      <a:round/>
+                      <a:headEnd type="none" w="med" len="med"/>
+                      <a:tailEnd type="none" w="med" len="med"/>
+                    </a:lnB>
+                  </a:tcPr>
+                </a:tc>
+                <a:tc>
+                  <a:txBody>
+                    <a:bodyPr/>
+                    <a:lstStyle/>
+                    <a:p>
+                      <a:pPr marL="0" marR="0" lvl="0" indent="0" algn="l" defTabSz="914400" rtl="0" eaLnBrk="1" fontAlgn="auto" latinLnBrk="0" hangingPunct="1">
+                        <a:lnSpc>
+                          <a:spcPct val="100000"/>
+                        </a:lnSpc>
+                        <a:spcBef>
+                          <a:spcPts val="0"/>
+                        </a:spcBef>
+                        <a:spcAft>
+                          <a:spcPts val="0"/>
+                        </a:spcAft>
+                        <a:buClr>
+                          <a:srgbClr val="000000"/>
+                        </a:buClr>
+                        <a:buSzTx/>
+                        <a:buFont typeface="Arial"/>
+                        <a:buNone/>
+                        <a:tabLst/>
+                        <a:defRPr/>
+                      </a:pPr>
+                      <a:r>
+                        <a:rPr lang="en-GB" sz="1400" b="0" i="0" u="none" strike="noStrike" cap="none" dirty="0">
+                          <a:solidFill>
+                            <a:srgbClr val="000000"/>
+                          </a:solidFill>
+                          <a:latin typeface="Open Sans" panose="020B0606030504020204" pitchFamily="34" charset="0"/>
+                          <a:ea typeface="Open Sans" panose="020B0606030504020204" pitchFamily="34" charset="0"/>
+                          <a:cs typeface="Open Sans" panose="020B0606030504020204" pitchFamily="34" charset="0"/>
+                          <a:sym typeface="Arial"/>
+                        </a:rPr>
+                        <a:t>Item ID Match</a:t>
+                      </a:r>
+                    </a:p>
+                  </a:txBody>
+                  <a:tcPr>
+                    <a:lnL w="12700" cap="flat" cmpd="sng" algn="ctr">
+                      <a:solidFill>
+                        <a:schemeClr val="tx1"/>
+                      </a:solidFill>
+                      <a:prstDash val="solid"/>
+                      <a:round/>
+                      <a:headEnd type="none" w="med" len="med"/>
+                      <a:tailEnd type="none" w="med" len="med"/>
+                    </a:lnL>
+                    <a:lnR w="12700" cap="flat" cmpd="sng" algn="ctr">
+                      <a:solidFill>
+                        <a:schemeClr val="tx1"/>
+                      </a:solidFill>
+                      <a:prstDash val="solid"/>
+                      <a:round/>
+                      <a:headEnd type="none" w="med" len="med"/>
+                      <a:tailEnd type="none" w="med" len="med"/>
+                    </a:lnR>
+                    <a:lnT w="12700" cap="flat" cmpd="sng" algn="ctr">
+                      <a:solidFill>
+                        <a:schemeClr val="tx1"/>
+                      </a:solidFill>
+                      <a:prstDash val="solid"/>
+                      <a:round/>
+                      <a:headEnd type="none" w="med" len="med"/>
+                      <a:tailEnd type="none" w="med" len="med"/>
+                    </a:lnT>
+                    <a:lnB w="12700" cap="flat" cmpd="sng" algn="ctr">
+                      <a:solidFill>
+                        <a:schemeClr val="tx1"/>
+                      </a:solidFill>
+                      <a:prstDash val="solid"/>
+                      <a:round/>
+                      <a:headEnd type="none" w="med" len="med"/>
+                      <a:tailEnd type="none" w="med" len="med"/>
+                    </a:lnB>
+                  </a:tcPr>
+                </a:tc>
+                <a:tc>
+                  <a:txBody>
+                    <a:bodyPr/>
+                    <a:lstStyle/>
+                    <a:p>
+                      <a:pPr marL="285750" indent="-285750">
+                        <a:buFont typeface="Arial" panose="020B0604020202020204" pitchFamily="34" charset="0"/>
+                        <a:buChar char="•"/>
+                      </a:pPr>
+                      <a:r>
+                        <a:rPr lang="en-GB" sz="1400" b="0" i="0" u="none" strike="noStrike" cap="none" dirty="0">
+                          <a:solidFill>
+                            <a:srgbClr val="000000"/>
+                          </a:solidFill>
+                          <a:latin typeface="Open Sans" panose="020B0606030504020204" pitchFamily="34" charset="0"/>
+                          <a:ea typeface="Open Sans" panose="020B0606030504020204" pitchFamily="34" charset="0"/>
+                          <a:cs typeface="Open Sans" panose="020B0606030504020204" pitchFamily="34" charset="0"/>
+                          <a:sym typeface="Arial"/>
+                        </a:rPr>
+                        <a:t>Match sneaker item records when the Item ID is identical across systems.</a:t>
+                      </a:r>
+                    </a:p>
+                    <a:p>
+                      <a:pPr marL="285750" indent="-285750">
+                        <a:buFont typeface="Arial" panose="020B0604020202020204" pitchFamily="34" charset="0"/>
+                        <a:buChar char="•"/>
+                      </a:pPr>
+                      <a:r>
+                        <a:rPr lang="en-GB" sz="1400" b="0" i="0" u="none" strike="noStrike" cap="none" dirty="0">
+                          <a:solidFill>
+                            <a:srgbClr val="000000"/>
+                          </a:solidFill>
+                          <a:latin typeface="Open Sans" panose="020B0606030504020204" pitchFamily="34" charset="0"/>
+                          <a:ea typeface="Open Sans" panose="020B0606030504020204" pitchFamily="34" charset="0"/>
+                          <a:cs typeface="Open Sans" panose="020B0606030504020204" pitchFamily="34" charset="0"/>
+                          <a:sym typeface="Arial"/>
+                        </a:rPr>
+                        <a:t>Provides a direct and reliable match for the same sneaker item.</a:t>
+                      </a:r>
+                    </a:p>
+                  </a:txBody>
+                  <a:tcPr anchor="ctr">
+                    <a:lnL w="12700" cap="flat" cmpd="sng" algn="ctr">
+                      <a:solidFill>
+                        <a:schemeClr val="tx1"/>
+                      </a:solidFill>
+                      <a:prstDash val="solid"/>
+                      <a:round/>
+                      <a:headEnd type="none" w="med" len="med"/>
+                      <a:tailEnd type="none" w="med" len="med"/>
+                    </a:lnL>
+                    <a:lnR w="12700" cap="flat" cmpd="sng" algn="ctr">
+                      <a:solidFill>
+                        <a:schemeClr val="tx1"/>
+                      </a:solidFill>
+                      <a:prstDash val="solid"/>
+                      <a:round/>
+                      <a:headEnd type="none" w="med" len="med"/>
+                      <a:tailEnd type="none" w="med" len="med"/>
+                    </a:lnR>
+                    <a:lnT w="12700" cap="flat" cmpd="sng" algn="ctr">
+                      <a:solidFill>
+                        <a:schemeClr val="tx1"/>
+                      </a:solidFill>
+                      <a:prstDash val="solid"/>
+                      <a:round/>
+                      <a:headEnd type="none" w="med" len="med"/>
+                      <a:tailEnd type="none" w="med" len="med"/>
+                    </a:lnT>
+                    <a:lnB w="12700" cap="flat" cmpd="sng" algn="ctr">
+                      <a:solidFill>
+                        <a:schemeClr val="tx1"/>
+                      </a:solidFill>
+                      <a:prstDash val="solid"/>
+                      <a:round/>
+                      <a:headEnd type="none" w="med" len="med"/>
+                      <a:tailEnd type="none" w="med" len="med"/>
+                    </a:lnB>
+                  </a:tcPr>
+                </a:tc>
+                <a:extLst>
+                  <a:ext uri="{0D108BD9-81ED-4DB2-BD59-A6C34878D82A}">
+                    <a16:rowId xmlns:a16="http://schemas.microsoft.com/office/drawing/2014/main" val="3798995461"/>
+                  </a:ext>
+                </a:extLst>
+              </a:tr>
+              <a:tr h="0">
+                <a:tc>
+                  <a:txBody>
+                    <a:bodyPr/>
+                    <a:lstStyle/>
+                    <a:p>
+                      <a:pPr marL="0" marR="0" lvl="0" indent="0" algn="l" defTabSz="914400" rtl="0" eaLnBrk="1" fontAlgn="auto" latinLnBrk="0" hangingPunct="1">
+                        <a:lnSpc>
+                          <a:spcPct val="100000"/>
+                        </a:lnSpc>
+                        <a:spcBef>
+                          <a:spcPts val="0"/>
+                        </a:spcBef>
+                        <a:spcAft>
+                          <a:spcPts val="0"/>
+                        </a:spcAft>
+                        <a:buClr>
+                          <a:srgbClr val="000000"/>
+                        </a:buClr>
+                        <a:buSzTx/>
+                        <a:buFont typeface="Arial"/>
+                        <a:buNone/>
+                        <a:tabLst/>
+                        <a:defRPr/>
+                      </a:pPr>
+                      <a:r>
+                        <a:rPr lang="en-GB" sz="1400" b="0" i="0" u="none" strike="noStrike" cap="none" dirty="0">
+                          <a:solidFill>
+                            <a:srgbClr val="000000"/>
+                          </a:solidFill>
+                          <a:latin typeface="Open Sans" panose="020B0606030504020204" pitchFamily="34" charset="0"/>
+                          <a:ea typeface="Open Sans" panose="020B0606030504020204" pitchFamily="34" charset="0"/>
+                          <a:cs typeface="Open Sans" panose="020B0606030504020204" pitchFamily="34" charset="0"/>
+                          <a:sym typeface="Arial"/>
+                        </a:rPr>
+                        <a:t>Sneaker Item</a:t>
+                      </a:r>
+                    </a:p>
+                  </a:txBody>
+                  <a:tcPr>
+                    <a:lnL w="12700" cap="flat" cmpd="sng" algn="ctr">
+                      <a:solidFill>
+                        <a:schemeClr val="tx1"/>
+                      </a:solidFill>
+                      <a:prstDash val="solid"/>
+                      <a:round/>
+                      <a:headEnd type="none" w="med" len="med"/>
+                      <a:tailEnd type="none" w="med" len="med"/>
+                    </a:lnL>
+                    <a:lnR w="12700" cap="flat" cmpd="sng" algn="ctr">
+                      <a:solidFill>
+                        <a:schemeClr val="tx1"/>
+                      </a:solidFill>
+                      <a:prstDash val="solid"/>
+                      <a:round/>
+                      <a:headEnd type="none" w="med" len="med"/>
+                      <a:tailEnd type="none" w="med" len="med"/>
+                    </a:lnR>
+                    <a:lnT w="12700" cap="flat" cmpd="sng" algn="ctr">
+                      <a:solidFill>
+                        <a:schemeClr val="tx1"/>
+                      </a:solidFill>
+                      <a:prstDash val="solid"/>
+                      <a:round/>
+                      <a:headEnd type="none" w="med" len="med"/>
+                      <a:tailEnd type="none" w="med" len="med"/>
+                    </a:lnT>
+                    <a:lnB w="12700" cap="flat" cmpd="sng" algn="ctr">
+                      <a:solidFill>
+                        <a:schemeClr val="tx1"/>
+                      </a:solidFill>
+                      <a:prstDash val="solid"/>
+                      <a:round/>
+                      <a:headEnd type="none" w="med" len="med"/>
+                      <a:tailEnd type="none" w="med" len="med"/>
+                    </a:lnB>
+                  </a:tcPr>
+                </a:tc>
+                <a:tc>
+                  <a:txBody>
+                    <a:bodyPr/>
+                    <a:lstStyle/>
+                    <a:p>
+                      <a:pPr marL="0" marR="0" lvl="0" indent="0" algn="l" defTabSz="914400" rtl="0" eaLnBrk="1" fontAlgn="auto" latinLnBrk="0" hangingPunct="1">
+                        <a:lnSpc>
+                          <a:spcPct val="100000"/>
+                        </a:lnSpc>
+                        <a:spcBef>
+                          <a:spcPts val="0"/>
+                        </a:spcBef>
+                        <a:spcAft>
+                          <a:spcPts val="0"/>
+                        </a:spcAft>
+                        <a:buClr>
+                          <a:srgbClr val="000000"/>
+                        </a:buClr>
+                        <a:buSzTx/>
+                        <a:buFont typeface="Arial"/>
+                        <a:buNone/>
+                        <a:tabLst/>
+                        <a:defRPr/>
+                      </a:pPr>
+                      <a:r>
+                        <a:rPr lang="en-GB" sz="1400" b="0" i="0" u="none" strike="noStrike" cap="none" dirty="0">
+                          <a:solidFill>
+                            <a:srgbClr val="000000"/>
+                          </a:solidFill>
+                          <a:latin typeface="Open Sans" panose="020B0606030504020204" pitchFamily="34" charset="0"/>
+                          <a:ea typeface="Open Sans" panose="020B0606030504020204" pitchFamily="34" charset="0"/>
+                          <a:cs typeface="Open Sans" panose="020B0606030504020204" pitchFamily="34" charset="0"/>
+                          <a:sym typeface="Arial"/>
+                        </a:rPr>
+                        <a:t>Product Attribute Match</a:t>
+                      </a:r>
+                    </a:p>
+                  </a:txBody>
+                  <a:tcPr>
+                    <a:lnL w="12700" cap="flat" cmpd="sng" algn="ctr">
+                      <a:solidFill>
+                        <a:schemeClr val="tx1"/>
+                      </a:solidFill>
+                      <a:prstDash val="solid"/>
+                      <a:round/>
+                      <a:headEnd type="none" w="med" len="med"/>
+                      <a:tailEnd type="none" w="med" len="med"/>
+                    </a:lnL>
+                    <a:lnR w="12700" cap="flat" cmpd="sng" algn="ctr">
+                      <a:solidFill>
+                        <a:schemeClr val="tx1"/>
+                      </a:solidFill>
+                      <a:prstDash val="solid"/>
+                      <a:round/>
+                      <a:headEnd type="none" w="med" len="med"/>
+                      <a:tailEnd type="none" w="med" len="med"/>
+                    </a:lnR>
+                    <a:lnT w="12700" cap="flat" cmpd="sng" algn="ctr">
+                      <a:solidFill>
+                        <a:schemeClr val="tx1"/>
+                      </a:solidFill>
+                      <a:prstDash val="solid"/>
+                      <a:round/>
+                      <a:headEnd type="none" w="med" len="med"/>
+                      <a:tailEnd type="none" w="med" len="med"/>
+                    </a:lnT>
+                    <a:lnB w="12700" cap="flat" cmpd="sng" algn="ctr">
+                      <a:solidFill>
+                        <a:schemeClr val="tx1"/>
+                      </a:solidFill>
+                      <a:prstDash val="solid"/>
+                      <a:round/>
+                      <a:headEnd type="none" w="med" len="med"/>
+                      <a:tailEnd type="none" w="med" len="med"/>
+                    </a:lnB>
+                  </a:tcPr>
+                </a:tc>
+                <a:tc>
+                  <a:txBody>
+                    <a:bodyPr/>
+                    <a:lstStyle/>
+                    <a:p>
+                      <a:pPr marL="285750" marR="0" lvl="0" indent="-285750" algn="l" defTabSz="914400" rtl="0" eaLnBrk="1" fontAlgn="auto" latinLnBrk="0" hangingPunct="1">
+                        <a:lnSpc>
+                          <a:spcPct val="100000"/>
+                        </a:lnSpc>
+                        <a:spcBef>
+                          <a:spcPts val="0"/>
+                        </a:spcBef>
+                        <a:spcAft>
+                          <a:spcPts val="0"/>
+                        </a:spcAft>
+                        <a:buClr>
+                          <a:srgbClr val="000000"/>
+                        </a:buClr>
+                        <a:buSzTx/>
+                        <a:buFont typeface="Arial" panose="020B0604020202020204" pitchFamily="34" charset="0"/>
+                        <a:buChar char="•"/>
+                        <a:tabLst/>
+                        <a:defRPr/>
+                      </a:pPr>
+                      <a:r>
+                        <a:rPr lang="en-GB" sz="1400" b="0" i="0" u="none" strike="noStrike" cap="none" dirty="0">
+                          <a:solidFill>
+                            <a:srgbClr val="000000"/>
+                          </a:solidFill>
+                          <a:latin typeface="Open Sans" panose="020B0606030504020204" pitchFamily="34" charset="0"/>
+                          <a:ea typeface="Open Sans" panose="020B0606030504020204" pitchFamily="34" charset="0"/>
+                          <a:cs typeface="Open Sans" panose="020B0606030504020204" pitchFamily="34" charset="0"/>
+                          <a:sym typeface="Arial"/>
+                        </a:rPr>
+                        <a:t>Match sneaker item records when Item Name, Brand, and Condition are identical.</a:t>
+                      </a:r>
+                    </a:p>
+                    <a:p>
+                      <a:pPr marL="285750" marR="0" lvl="0" indent="-285750" algn="l" defTabSz="914400" rtl="0" eaLnBrk="1" fontAlgn="auto" latinLnBrk="0" hangingPunct="1">
+                        <a:lnSpc>
+                          <a:spcPct val="100000"/>
+                        </a:lnSpc>
+                        <a:spcBef>
+                          <a:spcPts val="0"/>
+                        </a:spcBef>
+                        <a:spcAft>
+                          <a:spcPts val="0"/>
+                        </a:spcAft>
+                        <a:buClr>
+                          <a:srgbClr val="000000"/>
+                        </a:buClr>
+                        <a:buSzTx/>
+                        <a:buFont typeface="Arial" panose="020B0604020202020204" pitchFamily="34" charset="0"/>
+                        <a:buChar char="•"/>
+                        <a:tabLst/>
+                        <a:defRPr/>
+                      </a:pPr>
+                      <a:r>
+                        <a:rPr lang="en-GB" sz="1400" b="0" i="0" u="none" strike="noStrike" cap="none" dirty="0">
+                          <a:solidFill>
+                            <a:srgbClr val="000000"/>
+                          </a:solidFill>
+                          <a:latin typeface="Open Sans" panose="020B0606030504020204" pitchFamily="34" charset="0"/>
+                          <a:ea typeface="Open Sans" panose="020B0606030504020204" pitchFamily="34" charset="0"/>
+                          <a:cs typeface="Open Sans" panose="020B0606030504020204" pitchFamily="34" charset="0"/>
+                          <a:sym typeface="Arial"/>
+                        </a:rPr>
+                        <a:t>Used when Item IDs are inconsistent between systems. Helps identify the same product based on business attributes.</a:t>
+                      </a:r>
+                    </a:p>
+                  </a:txBody>
+                  <a:tcPr>
+                    <a:lnL w="12700" cap="flat" cmpd="sng" algn="ctr">
+                      <a:solidFill>
+                        <a:schemeClr val="tx1"/>
+                      </a:solidFill>
+                      <a:prstDash val="solid"/>
+                      <a:round/>
+                      <a:headEnd type="none" w="med" len="med"/>
+                      <a:tailEnd type="none" w="med" len="med"/>
+                    </a:lnL>
+                    <a:lnR w="12700" cap="flat" cmpd="sng" algn="ctr">
+                      <a:solidFill>
+                        <a:schemeClr val="tx1"/>
+                      </a:solidFill>
+                      <a:prstDash val="solid"/>
+                      <a:round/>
+                      <a:headEnd type="none" w="med" len="med"/>
+                      <a:tailEnd type="none" w="med" len="med"/>
+                    </a:lnR>
+                    <a:lnT w="12700" cap="flat" cmpd="sng" algn="ctr">
+                      <a:solidFill>
+                        <a:schemeClr val="tx1"/>
+                      </a:solidFill>
+                      <a:prstDash val="solid"/>
+                      <a:round/>
+                      <a:headEnd type="none" w="med" len="med"/>
+                      <a:tailEnd type="none" w="med" len="med"/>
+                    </a:lnT>
+                    <a:lnB w="12700" cap="flat" cmpd="sng" algn="ctr">
+                      <a:solidFill>
+                        <a:schemeClr val="tx1"/>
+                      </a:solidFill>
+                      <a:prstDash val="solid"/>
+                      <a:round/>
+                      <a:headEnd type="none" w="med" len="med"/>
+                      <a:tailEnd type="none" w="med" len="med"/>
+                    </a:lnB>
+                  </a:tcPr>
+                </a:tc>
+                <a:extLst>
+                  <a:ext uri="{0D108BD9-81ED-4DB2-BD59-A6C34878D82A}">
+                    <a16:rowId xmlns:a16="http://schemas.microsoft.com/office/drawing/2014/main" val="503077370"/>
+                  </a:ext>
+                </a:extLst>
+              </a:tr>
+            </a:tbl>
+          </a:graphicData>
+        </a:graphic>
+      </p:graphicFrame>
     </p:spTree>
   </p:cSld>
   <p:clrMapOvr>
@@ -29566,283 +30044,7 @@
 </p:sld>
 </file>
 
-<file path=ppt/slides/slide2.xml><?xml version="1.0" encoding="utf-8"?>
-<p:sld xmlns:a="http://schemas.openxmlformats.org/drawingml/2006/main" xmlns:r="http://schemas.openxmlformats.org/officeDocument/2006/relationships" xmlns:p="http://schemas.openxmlformats.org/presentationml/2006/main">
-  <p:cSld>
-    <p:spTree>
-      <p:nvGrpSpPr>
-        <p:cNvPr id="1" name="Shape 184"/>
-        <p:cNvGrpSpPr/>
-        <p:nvPr/>
-      </p:nvGrpSpPr>
-      <p:grpSpPr>
-        <a:xfrm>
-          <a:off x="0" y="0"/>
-          <a:ext cx="0" cy="0"/>
-          <a:chOff x="0" y="0"/>
-          <a:chExt cx="0" cy="0"/>
-        </a:xfrm>
-      </p:grpSpPr>
-      <p:sp>
-        <p:nvSpPr>
-          <p:cNvPr id="185" name="Google Shape;185;p52"/>
-          <p:cNvSpPr txBox="1">
-            <a:spLocks noGrp="1"/>
-          </p:cNvSpPr>
-          <p:nvPr>
-            <p:ph type="title"/>
-          </p:nvPr>
-        </p:nvSpPr>
-        <p:spPr>
-          <a:xfrm>
-            <a:off x="264945" y="870271"/>
-            <a:ext cx="7242600" cy="1119900"/>
-          </a:xfrm>
-          <a:prstGeom prst="rect">
-            <a:avLst/>
-          </a:prstGeom>
-        </p:spPr>
-        <p:txBody>
-          <a:bodyPr spcFirstLastPara="1" wrap="square" lIns="91425" tIns="91425" rIns="91425" bIns="91425" anchor="ctr" anchorCtr="0">
-            <a:noAutofit/>
-          </a:bodyPr>
-          <a:lstStyle/>
-          <a:p>
-            <a:pPr marL="0" lvl="0" indent="0" algn="l" rtl="0">
-              <a:spcBef>
-                <a:spcPts val="0"/>
-              </a:spcBef>
-              <a:spcAft>
-                <a:spcPts val="0"/>
-              </a:spcAft>
-              <a:buNone/>
-            </a:pPr>
-            <a:r>
-              <a:rPr lang="en"/>
-              <a:t>How to use this Template</a:t>
-            </a:r>
-            <a:endParaRPr/>
-          </a:p>
-        </p:txBody>
-      </p:sp>
-      <p:sp>
-        <p:nvSpPr>
-          <p:cNvPr id="186" name="Google Shape;186;p52"/>
-          <p:cNvSpPr txBox="1">
-            <a:spLocks noGrp="1"/>
-          </p:cNvSpPr>
-          <p:nvPr>
-            <p:ph type="body" idx="1"/>
-          </p:nvPr>
-        </p:nvSpPr>
-        <p:spPr>
-          <a:xfrm>
-            <a:off x="264945" y="2253729"/>
-            <a:ext cx="7242600" cy="6239700"/>
-          </a:xfrm>
-          <a:prstGeom prst="rect">
-            <a:avLst/>
-          </a:prstGeom>
-        </p:spPr>
-        <p:txBody>
-          <a:bodyPr spcFirstLastPara="1" wrap="square" lIns="91425" tIns="91425" rIns="91425" bIns="91425" anchor="t" anchorCtr="0">
-            <a:noAutofit/>
-          </a:bodyPr>
-          <a:lstStyle/>
-          <a:p>
-            <a:pPr marL="457200" lvl="0" indent="-368300" algn="l" rtl="0">
-              <a:spcBef>
-                <a:spcPts val="0"/>
-              </a:spcBef>
-              <a:spcAft>
-                <a:spcPts val="0"/>
-              </a:spcAft>
-              <a:buSzPts val="2200"/>
-              <a:buChar char="●"/>
-            </a:pPr>
-            <a:r>
-              <a:rPr lang="en" sz="2200"/>
-              <a:t>Theses slides are provided as a guide to ensure that you submit all the required components to successfully complete your project. For detailed instruction, please read the instruction in the classroom.</a:t>
-            </a:r>
-            <a:endParaRPr sz="2200"/>
-          </a:p>
-          <a:p>
-            <a:pPr marL="457200" lvl="0" indent="-368300" algn="l" rtl="0">
-              <a:spcBef>
-                <a:spcPts val="0"/>
-              </a:spcBef>
-              <a:spcAft>
-                <a:spcPts val="0"/>
-              </a:spcAft>
-              <a:buSzPts val="2200"/>
-              <a:buChar char="●"/>
-            </a:pPr>
-            <a:r>
-              <a:rPr lang="en" sz="2200"/>
-              <a:t>When presenting your project, please only think of this as a guide. We encouraged you to use creative freedom when making changes as long as the required information is present. </a:t>
-            </a:r>
-            <a:endParaRPr sz="2200"/>
-          </a:p>
-          <a:p>
-            <a:pPr marL="457200" lvl="0" indent="-368300" algn="l" rtl="0">
-              <a:spcBef>
-                <a:spcPts val="0"/>
-              </a:spcBef>
-              <a:spcAft>
-                <a:spcPts val="0"/>
-              </a:spcAft>
-              <a:buSzPts val="2200"/>
-              <a:buChar char="●"/>
-            </a:pPr>
-            <a:r>
-              <a:rPr lang="en" sz="2200" b="1">
-                <a:latin typeface="Open Sans"/>
-                <a:ea typeface="Open Sans"/>
-                <a:cs typeface="Open Sans"/>
-                <a:sym typeface="Open Sans"/>
-              </a:rPr>
-              <a:t>Remember to delete this and all</a:t>
-            </a:r>
-            <a:r>
-              <a:rPr lang="en" sz="2200"/>
-              <a:t> of the other example slides before you submit your project.</a:t>
-            </a:r>
-            <a:endParaRPr sz="2200"/>
-          </a:p>
-          <a:p>
-            <a:pPr marL="457200" lvl="0" indent="-368300" algn="l" rtl="0">
-              <a:spcBef>
-                <a:spcPts val="0"/>
-              </a:spcBef>
-              <a:spcAft>
-                <a:spcPts val="0"/>
-              </a:spcAft>
-              <a:buSzPts val="2200"/>
-              <a:buChar char="●"/>
-            </a:pPr>
-            <a:r>
-              <a:rPr lang="en" sz="2200" b="1">
-                <a:latin typeface="Open Sans"/>
-                <a:ea typeface="Open Sans"/>
-                <a:cs typeface="Open Sans"/>
-                <a:sym typeface="Open Sans"/>
-              </a:rPr>
-              <a:t>Remember to add your name and the date</a:t>
-            </a:r>
-            <a:r>
-              <a:rPr lang="en" sz="2200"/>
-              <a:t> to the cover slide</a:t>
-            </a:r>
-            <a:endParaRPr sz="2200"/>
-          </a:p>
-          <a:p>
-            <a:pPr marL="457200" lvl="0" indent="0" algn="l" rtl="0">
-              <a:spcBef>
-                <a:spcPts val="1600"/>
-              </a:spcBef>
-              <a:spcAft>
-                <a:spcPts val="1600"/>
-              </a:spcAft>
-              <a:buNone/>
-            </a:pPr>
-            <a:endParaRPr sz="2200"/>
-          </a:p>
-        </p:txBody>
-      </p:sp>
-      <p:sp>
-        <p:nvSpPr>
-          <p:cNvPr id="187" name="Google Shape;187;p52"/>
-          <p:cNvSpPr txBox="1"/>
-          <p:nvPr/>
-        </p:nvSpPr>
-        <p:spPr>
-          <a:xfrm>
-            <a:off x="1028425" y="7749175"/>
-            <a:ext cx="5652900" cy="1119900"/>
-          </a:xfrm>
-          <a:prstGeom prst="rect">
-            <a:avLst/>
-          </a:prstGeom>
-          <a:noFill/>
-          <a:ln>
-            <a:noFill/>
-          </a:ln>
-        </p:spPr>
-        <p:txBody>
-          <a:bodyPr spcFirstLastPara="1" wrap="square" lIns="91425" tIns="91425" rIns="91425" bIns="91425" anchor="t" anchorCtr="0">
-            <a:noAutofit/>
-          </a:bodyPr>
-          <a:lstStyle/>
-          <a:p>
-            <a:pPr marL="0" lvl="0" indent="0" algn="ctr" rtl="0">
-              <a:spcBef>
-                <a:spcPts val="0"/>
-              </a:spcBef>
-              <a:spcAft>
-                <a:spcPts val="0"/>
-              </a:spcAft>
-              <a:buNone/>
-            </a:pPr>
-            <a:r>
-              <a:rPr lang="en" sz="4500">
-                <a:solidFill>
-                  <a:srgbClr val="FFFFFF"/>
-                </a:solidFill>
-                <a:latin typeface="Open Sans"/>
-                <a:ea typeface="Open Sans"/>
-                <a:cs typeface="Open Sans"/>
-                <a:sym typeface="Open Sans"/>
-              </a:rPr>
-              <a:t>Remove this slide</a:t>
-            </a:r>
-            <a:endParaRPr sz="4500">
-              <a:solidFill>
-                <a:srgbClr val="FFFFFF"/>
-              </a:solidFill>
-              <a:latin typeface="Open Sans"/>
-              <a:ea typeface="Open Sans"/>
-              <a:cs typeface="Open Sans"/>
-              <a:sym typeface="Open Sans"/>
-            </a:endParaRPr>
-          </a:p>
-        </p:txBody>
-      </p:sp>
-      <p:pic>
-        <p:nvPicPr>
-          <p:cNvPr id="188" name="Google Shape;188;p52"/>
-          <p:cNvPicPr preferRelativeResize="0"/>
-          <p:nvPr/>
-        </p:nvPicPr>
-        <p:blipFill rotWithShape="1">
-          <a:blip r:embed="rId3">
-            <a:alphaModFix/>
-          </a:blip>
-          <a:srcRect l="18074" t="20989" r="14486" b="11825"/>
-          <a:stretch/>
-        </p:blipFill>
-        <p:spPr>
-          <a:xfrm>
-            <a:off x="374375" y="7823200"/>
-            <a:ext cx="7023750" cy="1749275"/>
-          </a:xfrm>
-          <a:prstGeom prst="rect">
-            <a:avLst/>
-          </a:prstGeom>
-          <a:noFill/>
-          <a:ln>
-            <a:noFill/>
-          </a:ln>
-        </p:spPr>
-      </p:pic>
-    </p:spTree>
-  </p:cSld>
-  <p:clrMapOvr>
-    <a:masterClrMapping/>
-  </p:clrMapOvr>
-</p:sld>
-</file>
-
-<file path=ppt/slides/slide20.xml><?xml version="1.0" encoding="utf-8"?>
+<file path=ppt/slides/slide18.xml><?xml version="1.0" encoding="utf-8"?>
 <p:sld xmlns:a="http://schemas.openxmlformats.org/drawingml/2006/main" xmlns:r="http://schemas.openxmlformats.org/officeDocument/2006/relationships" xmlns:p="http://schemas.openxmlformats.org/presentationml/2006/main">
   <p:cSld>
     <p:bg>
@@ -30073,7 +30275,7 @@
 </p:sld>
 </file>
 
-<file path=ppt/slides/slide21.xml><?xml version="1.0" encoding="utf-8"?>
+<file path=ppt/slides/slide19.xml><?xml version="1.0" encoding="utf-8"?>
 <p:sld xmlns:a="http://schemas.openxmlformats.org/drawingml/2006/main" xmlns:r="http://schemas.openxmlformats.org/officeDocument/2006/relationships" xmlns:p="http://schemas.openxmlformats.org/presentationml/2006/main">
   <p:cSld>
     <p:spTree>
@@ -30092,240 +30294,243 @@
       </p:grpSpPr>
       <p:sp>
         <p:nvSpPr>
-          <p:cNvPr id="303" name="Google Shape;303;p71"/>
+          <p:cNvPr id="3" name="TextBox 2">
+            <a:extLst>
+              <a:ext uri="{FF2B5EF4-FFF2-40B4-BE49-F238E27FC236}">
+                <a16:creationId xmlns:a16="http://schemas.microsoft.com/office/drawing/2014/main" id="{8782DC50-C671-C8A0-8A70-6A7C7D8B82F1}"/>
+              </a:ext>
+            </a:extLst>
+          </p:cNvPr>
           <p:cNvSpPr txBox="1"/>
           <p:nvPr/>
         </p:nvSpPr>
         <p:spPr>
           <a:xfrm>
-            <a:off x="457200" y="447675"/>
-            <a:ext cx="6842100" cy="1152600"/>
+            <a:off x="308919" y="781884"/>
+            <a:ext cx="7030995" cy="6555641"/>
           </a:xfrm>
           <a:prstGeom prst="rect">
             <a:avLst/>
           </a:prstGeom>
           <a:noFill/>
-          <a:ln>
-            <a:noFill/>
-          </a:ln>
         </p:spPr>
         <p:txBody>
-          <a:bodyPr spcFirstLastPara="1" wrap="square" lIns="91425" tIns="91425" rIns="91425" bIns="91425" anchor="t" anchorCtr="0">
-            <a:noAutofit/>
+          <a:bodyPr wrap="square">
+            <a:spAutoFit/>
           </a:bodyPr>
           <a:lstStyle/>
           <a:p>
-            <a:pPr marL="0" lvl="0" indent="0" algn="just" rtl="0">
-              <a:lnSpc>
-                <a:spcPct val="170000"/>
-              </a:lnSpc>
-              <a:spcBef>
-                <a:spcPts val="0"/>
-              </a:spcBef>
-              <a:spcAft>
-                <a:spcPts val="0"/>
-              </a:spcAft>
+            <a:pPr>
               <a:buNone/>
             </a:pPr>
             <a:r>
-              <a:rPr lang="en" sz="1600">
-                <a:solidFill>
-                  <a:srgbClr val="525C65"/>
-                </a:solidFill>
-                <a:highlight>
-                  <a:srgbClr val="FFFFFF"/>
-                </a:highlight>
-                <a:latin typeface="Open Sans"/>
-                <a:ea typeface="Open Sans"/>
-                <a:cs typeface="Open Sans"/>
-                <a:sym typeface="Open Sans"/>
+              <a:rPr lang="en-GB" dirty="0">
+                <a:latin typeface="Open Sans" panose="020B0606030504020204" pitchFamily="34" charset="0"/>
+                <a:ea typeface="Open Sans" panose="020B0606030504020204" pitchFamily="34" charset="0"/>
+                <a:cs typeface="Open Sans" panose="020B0606030504020204" pitchFamily="34" charset="0"/>
               </a:rPr>
-              <a:t>Write 1-2 paragraphs discussing what </a:t>
+              <a:t>To support the new Data Management initiative, </a:t>
             </a:r>
             <a:r>
-              <a:rPr lang="en" sz="1600" b="1">
-                <a:solidFill>
-                  <a:srgbClr val="525C65"/>
-                </a:solidFill>
-                <a:highlight>
-                  <a:srgbClr val="FFFFFF"/>
-                </a:highlight>
-                <a:latin typeface="Open Sans"/>
-                <a:ea typeface="Open Sans"/>
-                <a:cs typeface="Open Sans"/>
-                <a:sym typeface="Open Sans"/>
+              <a:rPr lang="en-GB" dirty="0" err="1">
+                <a:latin typeface="Open Sans" panose="020B0606030504020204" pitchFamily="34" charset="0"/>
+                <a:ea typeface="Open Sans" panose="020B0606030504020204" pitchFamily="34" charset="0"/>
+                <a:cs typeface="Open Sans" panose="020B0606030504020204" pitchFamily="34" charset="0"/>
               </a:rPr>
-              <a:t>data governance roles and responsibilities</a:t>
+              <a:t>SneakerPark</a:t>
             </a:r>
             <a:r>
-              <a:rPr lang="en" sz="1600">
-                <a:solidFill>
-                  <a:srgbClr val="525C65"/>
-                </a:solidFill>
-                <a:highlight>
-                  <a:srgbClr val="FFFFFF"/>
-                </a:highlight>
-                <a:latin typeface="Open Sans"/>
-                <a:ea typeface="Open Sans"/>
-                <a:cs typeface="Open Sans"/>
-                <a:sym typeface="Open Sans"/>
+              <a:rPr lang="en-GB" dirty="0">
+                <a:latin typeface="Open Sans" panose="020B0606030504020204" pitchFamily="34" charset="0"/>
+                <a:ea typeface="Open Sans" panose="020B0606030504020204" pitchFamily="34" charset="0"/>
+                <a:cs typeface="Open Sans" panose="020B0606030504020204" pitchFamily="34" charset="0"/>
               </a:rPr>
-              <a:t> will be necessary to oversee this new Data Management initiative. Please be sure to discuss the responsibilities in the context of at </a:t>
+              <a:t> should establish clear data governance roles and responsibilities. </a:t>
             </a:r>
-            <a:r>
-              <a:rPr lang="en" sz="1600" b="1">
-                <a:solidFill>
-                  <a:srgbClr val="525C65"/>
-                </a:solidFill>
-                <a:highlight>
-                  <a:srgbClr val="FFFFFF"/>
-                </a:highlight>
-                <a:latin typeface="Open Sans"/>
-                <a:ea typeface="Open Sans"/>
-                <a:cs typeface="Open Sans"/>
-                <a:sym typeface="Open Sans"/>
-              </a:rPr>
-              <a:t>least 3 different aspects </a:t>
-            </a:r>
-            <a:r>
-              <a:rPr lang="en" sz="1600">
-                <a:solidFill>
-                  <a:srgbClr val="525C65"/>
-                </a:solidFill>
-                <a:highlight>
-                  <a:srgbClr val="FFFFFF"/>
-                </a:highlight>
-                <a:latin typeface="Open Sans"/>
-                <a:ea typeface="Open Sans"/>
-                <a:cs typeface="Open Sans"/>
-                <a:sym typeface="Open Sans"/>
-              </a:rPr>
-              <a:t>of Data Governance (such as Data Quality Management, Metadata Management, MDM, etc). Based on what you know, do SneakerPark's </a:t>
-            </a:r>
-            <a:r>
-              <a:rPr lang="en" sz="1600" b="1">
-                <a:solidFill>
-                  <a:srgbClr val="525C65"/>
-                </a:solidFill>
-                <a:highlight>
-                  <a:srgbClr val="FFFFFF"/>
-                </a:highlight>
-                <a:latin typeface="Open Sans"/>
-                <a:ea typeface="Open Sans"/>
-                <a:cs typeface="Open Sans"/>
-                <a:sym typeface="Open Sans"/>
-              </a:rPr>
-              <a:t>current employees have the necessary skills</a:t>
-            </a:r>
-            <a:r>
-              <a:rPr lang="en" sz="1600">
-                <a:solidFill>
-                  <a:srgbClr val="525C65"/>
-                </a:solidFill>
-                <a:highlight>
-                  <a:srgbClr val="FFFFFF"/>
-                </a:highlight>
-                <a:latin typeface="Open Sans"/>
-                <a:ea typeface="Open Sans"/>
-                <a:cs typeface="Open Sans"/>
-                <a:sym typeface="Open Sans"/>
-              </a:rPr>
-              <a:t> for these roles or should the company </a:t>
-            </a:r>
-            <a:r>
-              <a:rPr lang="en" sz="1600" b="1">
-                <a:solidFill>
-                  <a:srgbClr val="525C65"/>
-                </a:solidFill>
-                <a:highlight>
-                  <a:srgbClr val="FFFFFF"/>
-                </a:highlight>
-                <a:latin typeface="Open Sans"/>
-                <a:ea typeface="Open Sans"/>
-                <a:cs typeface="Open Sans"/>
-                <a:sym typeface="Open Sans"/>
-              </a:rPr>
-              <a:t>make new hires</a:t>
-            </a:r>
-            <a:r>
-              <a:rPr lang="en" sz="1600">
-                <a:solidFill>
-                  <a:srgbClr val="525C65"/>
-                </a:solidFill>
-                <a:highlight>
-                  <a:srgbClr val="FFFFFF"/>
-                </a:highlight>
-                <a:latin typeface="Open Sans"/>
-                <a:ea typeface="Open Sans"/>
-                <a:cs typeface="Open Sans"/>
-                <a:sym typeface="Open Sans"/>
-              </a:rPr>
-              <a:t>?</a:t>
-            </a:r>
-            <a:endParaRPr sz="1600">
-              <a:solidFill>
-                <a:srgbClr val="525C65"/>
-              </a:solidFill>
-              <a:highlight>
-                <a:srgbClr val="FFFFFF"/>
-              </a:highlight>
-              <a:latin typeface="Open Sans"/>
-              <a:ea typeface="Open Sans"/>
-              <a:cs typeface="Open Sans"/>
-              <a:sym typeface="Open Sans"/>
+          </a:p>
+          <a:p>
+            <a:pPr>
+              <a:buNone/>
+            </a:pPr>
+            <a:endParaRPr lang="en-GB" dirty="0">
+              <a:latin typeface="Open Sans" panose="020B0606030504020204" pitchFamily="34" charset="0"/>
+              <a:ea typeface="Open Sans" panose="020B0606030504020204" pitchFamily="34" charset="0"/>
+              <a:cs typeface="Open Sans" panose="020B0606030504020204" pitchFamily="34" charset="0"/>
             </a:endParaRPr>
           </a:p>
           <a:p>
-            <a:pPr marL="0" lvl="0" indent="0" algn="just" rtl="0">
-              <a:lnSpc>
-                <a:spcPct val="170000"/>
-              </a:lnSpc>
-              <a:spcBef>
-                <a:spcPts val="1100"/>
-              </a:spcBef>
-              <a:spcAft>
-                <a:spcPts val="0"/>
-              </a:spcAft>
+            <a:pPr>
               <a:buNone/>
             </a:pPr>
-            <a:endParaRPr sz="1600">
-              <a:solidFill>
-                <a:srgbClr val="525C65"/>
-              </a:solidFill>
-              <a:highlight>
-                <a:srgbClr val="FFFFFF"/>
-              </a:highlight>
-              <a:latin typeface="Open Sans"/>
-              <a:ea typeface="Open Sans"/>
-              <a:cs typeface="Open Sans"/>
-              <a:sym typeface="Open Sans"/>
+            <a:r>
+              <a:rPr lang="en-GB" b="1" dirty="0">
+                <a:latin typeface="Open Sans" panose="020B0606030504020204" pitchFamily="34" charset="0"/>
+                <a:ea typeface="Open Sans" panose="020B0606030504020204" pitchFamily="34" charset="0"/>
+                <a:cs typeface="Open Sans" panose="020B0606030504020204" pitchFamily="34" charset="0"/>
+              </a:rPr>
+              <a:t>Data Quality Management</a:t>
+            </a:r>
+          </a:p>
+          <a:p>
+            <a:pPr marL="285750" indent="-285750">
+              <a:buFont typeface="Arial" panose="020B0604020202020204" pitchFamily="34" charset="0"/>
+              <a:buChar char="•"/>
+            </a:pPr>
+            <a:r>
+              <a:rPr lang="en-GB" dirty="0">
+                <a:latin typeface="Open Sans" panose="020B0606030504020204" pitchFamily="34" charset="0"/>
+                <a:ea typeface="Open Sans" panose="020B0606030504020204" pitchFamily="34" charset="0"/>
+                <a:cs typeface="Open Sans" panose="020B0606030504020204" pitchFamily="34" charset="0"/>
+              </a:rPr>
+              <a:t>Data Stewards should be responsible for monitoring data quality issues, defining data quality rules and working with business teams to resolve data issues. This will help improve the accuracy, completeness and consistency of customer, item and order data across the organisation.</a:t>
+            </a:r>
+          </a:p>
+          <a:p>
+            <a:pPr>
+              <a:buNone/>
+            </a:pPr>
+            <a:endParaRPr lang="en-GB" dirty="0">
+              <a:latin typeface="Open Sans" panose="020B0606030504020204" pitchFamily="34" charset="0"/>
+              <a:ea typeface="Open Sans" panose="020B0606030504020204" pitchFamily="34" charset="0"/>
+              <a:cs typeface="Open Sans" panose="020B0606030504020204" pitchFamily="34" charset="0"/>
             </a:endParaRPr>
           </a:p>
           <a:p>
-            <a:pPr marL="0" lvl="0" indent="0" algn="just" rtl="0">
-              <a:lnSpc>
-                <a:spcPct val="170000"/>
-              </a:lnSpc>
-              <a:spcBef>
-                <a:spcPts val="1100"/>
-              </a:spcBef>
-              <a:spcAft>
-                <a:spcPts val="1100"/>
-              </a:spcAft>
+            <a:pPr>
               <a:buNone/>
             </a:pPr>
-            <a:endParaRPr sz="1600">
-              <a:solidFill>
-                <a:srgbClr val="525C65"/>
-              </a:solidFill>
-              <a:highlight>
-                <a:srgbClr val="FFFFFF"/>
-              </a:highlight>
-              <a:latin typeface="Open Sans"/>
-              <a:ea typeface="Open Sans"/>
-              <a:cs typeface="Open Sans"/>
-              <a:sym typeface="Open Sans"/>
+            <a:r>
+              <a:rPr lang="en-GB" b="1" dirty="0">
+                <a:latin typeface="Open Sans" panose="020B0606030504020204" pitchFamily="34" charset="0"/>
+                <a:ea typeface="Open Sans" panose="020B0606030504020204" pitchFamily="34" charset="0"/>
+                <a:cs typeface="Open Sans" panose="020B0606030504020204" pitchFamily="34" charset="0"/>
+              </a:rPr>
+              <a:t>Metadata Management</a:t>
+            </a:r>
+          </a:p>
+          <a:p>
+            <a:pPr marL="285750" indent="-285750">
+              <a:buFont typeface="Arial" panose="020B0604020202020204" pitchFamily="34" charset="0"/>
+              <a:buChar char="•"/>
+            </a:pPr>
+            <a:r>
+              <a:rPr lang="en-GB" dirty="0">
+                <a:latin typeface="Open Sans" panose="020B0606030504020204" pitchFamily="34" charset="0"/>
+                <a:ea typeface="Open Sans" panose="020B0606030504020204" pitchFamily="34" charset="0"/>
+                <a:cs typeface="Open Sans" panose="020B0606030504020204" pitchFamily="34" charset="0"/>
+              </a:rPr>
+              <a:t>Data Architect should be responsible for maintaining the enterprise data model, data </a:t>
+            </a:r>
+            <a:r>
+              <a:rPr lang="en-GB" dirty="0" err="1">
+                <a:latin typeface="Open Sans" panose="020B0606030504020204" pitchFamily="34" charset="0"/>
+                <a:ea typeface="Open Sans" panose="020B0606030504020204" pitchFamily="34" charset="0"/>
+                <a:cs typeface="Open Sans" panose="020B0606030504020204" pitchFamily="34" charset="0"/>
+              </a:rPr>
+              <a:t>catalog</a:t>
+            </a:r>
+            <a:r>
+              <a:rPr lang="en-GB" dirty="0">
+                <a:latin typeface="Open Sans" panose="020B0606030504020204" pitchFamily="34" charset="0"/>
+                <a:ea typeface="Open Sans" panose="020B0606030504020204" pitchFamily="34" charset="0"/>
+                <a:cs typeface="Open Sans" panose="020B0606030504020204" pitchFamily="34" charset="0"/>
+              </a:rPr>
+              <a:t> and business glossary. This role will ensure that data definitions remain consistent across systems and that users have a clear understanding of the data available within the organisation. </a:t>
+            </a:r>
+          </a:p>
+          <a:p>
+            <a:pPr marL="285750" indent="-285750">
+              <a:buFont typeface="Arial" panose="020B0604020202020204" pitchFamily="34" charset="0"/>
+              <a:buChar char="•"/>
+            </a:pPr>
+            <a:endParaRPr lang="en-GB" dirty="0">
+              <a:latin typeface="Open Sans" panose="020B0606030504020204" pitchFamily="34" charset="0"/>
+              <a:ea typeface="Open Sans" panose="020B0606030504020204" pitchFamily="34" charset="0"/>
+              <a:cs typeface="Open Sans" panose="020B0606030504020204" pitchFamily="34" charset="0"/>
             </a:endParaRPr>
+          </a:p>
+          <a:p>
+            <a:r>
+              <a:rPr lang="en-GB" b="1" dirty="0">
+                <a:latin typeface="Open Sans" panose="020B0606030504020204" pitchFamily="34" charset="0"/>
+                <a:ea typeface="Open Sans" panose="020B0606030504020204" pitchFamily="34" charset="0"/>
+                <a:cs typeface="Open Sans" panose="020B0606030504020204" pitchFamily="34" charset="0"/>
+              </a:rPr>
+              <a:t>Master Data Management (MDM)</a:t>
+            </a:r>
+          </a:p>
+          <a:p>
+            <a:pPr marL="285750" indent="-285750">
+              <a:buFont typeface="Arial" panose="020B0604020202020204" pitchFamily="34" charset="0"/>
+              <a:buChar char="•"/>
+            </a:pPr>
+            <a:r>
+              <a:rPr lang="en-GB" dirty="0">
+                <a:latin typeface="Open Sans" panose="020B0606030504020204" pitchFamily="34" charset="0"/>
+                <a:ea typeface="Open Sans" panose="020B0606030504020204" pitchFamily="34" charset="0"/>
+                <a:cs typeface="Open Sans" panose="020B0606030504020204" pitchFamily="34" charset="0"/>
+              </a:rPr>
+              <a:t>Both Data Stewards and the Data Architect should work together to define matching rules, manage golden records and oversee the MDM Hub to ensure a single source of truth for customer and sneaker item data.</a:t>
+            </a:r>
+          </a:p>
+          <a:p>
+            <a:endParaRPr lang="en-GB" dirty="0">
+              <a:latin typeface="Open Sans" panose="020B0606030504020204" pitchFamily="34" charset="0"/>
+              <a:ea typeface="Open Sans" panose="020B0606030504020204" pitchFamily="34" charset="0"/>
+              <a:cs typeface="Open Sans" panose="020B0606030504020204" pitchFamily="34" charset="0"/>
+            </a:endParaRPr>
+          </a:p>
+          <a:p>
+            <a:pPr>
+              <a:buNone/>
+            </a:pPr>
+            <a:r>
+              <a:rPr lang="en-GB" dirty="0">
+                <a:latin typeface="Open Sans" panose="020B0606030504020204" pitchFamily="34" charset="0"/>
+                <a:ea typeface="Open Sans" panose="020B0606030504020204" pitchFamily="34" charset="0"/>
+                <a:cs typeface="Open Sans" panose="020B0606030504020204" pitchFamily="34" charset="0"/>
+              </a:rPr>
+              <a:t>Based on the information provided, Jessica already has strong business knowledge and would be a good candidate for a Data Steward role because she understands the company's data and business processes. Jake has experience managing the company's databases and could continue supporting the technical aspects of the platform. </a:t>
+            </a:r>
+          </a:p>
+          <a:p>
+            <a:pPr>
+              <a:buNone/>
+            </a:pPr>
+            <a:endParaRPr lang="en-GB" dirty="0">
+              <a:latin typeface="Open Sans" panose="020B0606030504020204" pitchFamily="34" charset="0"/>
+              <a:ea typeface="Open Sans" panose="020B0606030504020204" pitchFamily="34" charset="0"/>
+              <a:cs typeface="Open Sans" panose="020B0606030504020204" pitchFamily="34" charset="0"/>
+            </a:endParaRPr>
+          </a:p>
+          <a:p>
+            <a:pPr>
+              <a:buNone/>
+            </a:pPr>
+            <a:r>
+              <a:rPr lang="en-GB" dirty="0">
+                <a:latin typeface="Open Sans" panose="020B0606030504020204" pitchFamily="34" charset="0"/>
+                <a:ea typeface="Open Sans" panose="020B0606030504020204" pitchFamily="34" charset="0"/>
+                <a:cs typeface="Open Sans" panose="020B0606030504020204" pitchFamily="34" charset="0"/>
+              </a:rPr>
+              <a:t>However, neither employee appears to have formal experience in enterprise data governance or MDM. Therefore, </a:t>
+            </a:r>
+            <a:r>
+              <a:rPr lang="en-GB" dirty="0" err="1">
+                <a:latin typeface="Open Sans" panose="020B0606030504020204" pitchFamily="34" charset="0"/>
+                <a:ea typeface="Open Sans" panose="020B0606030504020204" pitchFamily="34" charset="0"/>
+                <a:cs typeface="Open Sans" panose="020B0606030504020204" pitchFamily="34" charset="0"/>
+              </a:rPr>
+              <a:t>SneakerPark</a:t>
+            </a:r>
+            <a:r>
+              <a:rPr lang="en-GB" dirty="0">
+                <a:latin typeface="Open Sans" panose="020B0606030504020204" pitchFamily="34" charset="0"/>
+                <a:ea typeface="Open Sans" panose="020B0606030504020204" pitchFamily="34" charset="0"/>
+                <a:cs typeface="Open Sans" panose="020B0606030504020204" pitchFamily="34" charset="0"/>
+              </a:rPr>
+              <a:t> should consider hiring a dedicated Data Architect or Data Governance Manager to lead the programme and establish governance standards, policies and processes as the company continues to grow.</a:t>
+            </a:r>
           </a:p>
         </p:txBody>
       </p:sp>
@@ -30337,1009 +30542,7 @@
 </p:sld>
 </file>
 
-<file path=ppt/slides/slide22.xml><?xml version="1.0" encoding="utf-8"?>
-<p:sld xmlns:a="http://schemas.openxmlformats.org/drawingml/2006/main" xmlns:r="http://schemas.openxmlformats.org/officeDocument/2006/relationships" xmlns:p="http://schemas.openxmlformats.org/presentationml/2006/main">
-  <p:cSld>
-    <p:bg>
-      <p:bgPr>
-        <a:solidFill>
-          <a:srgbClr val="02B4E5"/>
-        </a:solidFill>
-        <a:effectLst/>
-      </p:bgPr>
-    </p:bg>
-    <p:spTree>
-      <p:nvGrpSpPr>
-        <p:cNvPr id="1" name="Shape 307"/>
-        <p:cNvGrpSpPr/>
-        <p:nvPr/>
-      </p:nvGrpSpPr>
-      <p:grpSpPr>
-        <a:xfrm>
-          <a:off x="0" y="0"/>
-          <a:ext cx="0" cy="0"/>
-          <a:chOff x="0" y="0"/>
-          <a:chExt cx="0" cy="0"/>
-        </a:xfrm>
-      </p:grpSpPr>
-      <p:sp>
-        <p:nvSpPr>
-          <p:cNvPr id="308" name="Google Shape;308;p72"/>
-          <p:cNvSpPr/>
-          <p:nvPr/>
-        </p:nvSpPr>
-        <p:spPr>
-          <a:xfrm>
-            <a:off x="1422750" y="4013075"/>
-            <a:ext cx="4926900" cy="2460000"/>
-          </a:xfrm>
-          <a:prstGeom prst="rect">
-            <a:avLst/>
-          </a:prstGeom>
-          <a:noFill/>
-          <a:ln>
-            <a:noFill/>
-          </a:ln>
-        </p:spPr>
-        <p:txBody>
-          <a:bodyPr spcFirstLastPara="1" wrap="square" lIns="26775" tIns="26775" rIns="26775" bIns="26775" anchor="t" anchorCtr="0">
-            <a:noAutofit/>
-          </a:bodyPr>
-          <a:lstStyle/>
-          <a:p>
-            <a:pPr marL="0" marR="0" lvl="0" indent="0" algn="ctr" rtl="0">
-              <a:lnSpc>
-                <a:spcPct val="150000"/>
-              </a:lnSpc>
-              <a:spcBef>
-                <a:spcPts val="0"/>
-              </a:spcBef>
-              <a:spcAft>
-                <a:spcPts val="0"/>
-              </a:spcAft>
-              <a:buClr>
-                <a:srgbClr val="FFFFFF"/>
-              </a:buClr>
-              <a:buFont typeface="Open Sans"/>
-              <a:buNone/>
-            </a:pPr>
-            <a:r>
-              <a:rPr lang="en" sz="3000" b="1">
-                <a:solidFill>
-                  <a:srgbClr val="FFFFFF"/>
-                </a:solidFill>
-                <a:latin typeface="Open Sans"/>
-                <a:ea typeface="Open Sans"/>
-                <a:cs typeface="Open Sans"/>
-                <a:sym typeface="Open Sans"/>
-              </a:rPr>
-              <a:t>Standout Suggestions</a:t>
-            </a:r>
-            <a:endParaRPr sz="3000">
-              <a:solidFill>
-                <a:srgbClr val="FFFFFF"/>
-              </a:solidFill>
-              <a:latin typeface="Open Sans"/>
-              <a:ea typeface="Open Sans"/>
-              <a:cs typeface="Open Sans"/>
-              <a:sym typeface="Open Sans"/>
-            </a:endParaRPr>
-          </a:p>
-        </p:txBody>
-      </p:sp>
-      <p:sp>
-        <p:nvSpPr>
-          <p:cNvPr id="309" name="Google Shape;309;p72"/>
-          <p:cNvSpPr/>
-          <p:nvPr/>
-        </p:nvSpPr>
-        <p:spPr>
-          <a:xfrm>
-            <a:off x="3582591" y="3663029"/>
-            <a:ext cx="607200" cy="74400"/>
-          </a:xfrm>
-          <a:prstGeom prst="rect">
-            <a:avLst/>
-          </a:prstGeom>
-          <a:solidFill>
-            <a:schemeClr val="lt1"/>
-          </a:solidFill>
-          <a:ln>
-            <a:noFill/>
-          </a:ln>
-        </p:spPr>
-        <p:txBody>
-          <a:bodyPr spcFirstLastPara="1" wrap="square" lIns="26775" tIns="26775" rIns="26775" bIns="26775" anchor="ctr" anchorCtr="0">
-            <a:noAutofit/>
-          </a:bodyPr>
-          <a:lstStyle/>
-          <a:p>
-            <a:pPr marL="0" marR="0" lvl="0" indent="0" algn="ctr" rtl="0">
-              <a:lnSpc>
-                <a:spcPct val="100000"/>
-              </a:lnSpc>
-              <a:spcBef>
-                <a:spcPts val="0"/>
-              </a:spcBef>
-              <a:spcAft>
-                <a:spcPts val="0"/>
-              </a:spcAft>
-              <a:buClr>
-                <a:srgbClr val="FFFFFF"/>
-              </a:buClr>
-              <a:buFont typeface="Helvetica Neue"/>
-              <a:buNone/>
-            </a:pPr>
-            <a:endParaRPr sz="1200" b="0" i="0" u="none" strike="noStrike" cap="none">
-              <a:solidFill>
-                <a:srgbClr val="02B4E5"/>
-              </a:solidFill>
-              <a:latin typeface="Helvetica Neue"/>
-              <a:ea typeface="Helvetica Neue"/>
-              <a:cs typeface="Helvetica Neue"/>
-              <a:sym typeface="Helvetica Neue"/>
-            </a:endParaRPr>
-          </a:p>
-        </p:txBody>
-      </p:sp>
-    </p:spTree>
-  </p:cSld>
-  <p:clrMapOvr>
-    <a:masterClrMapping/>
-  </p:clrMapOvr>
-</p:sld>
-</file>
-
-<file path=ppt/slides/slide23.xml><?xml version="1.0" encoding="utf-8"?>
-<p:sld xmlns:a="http://schemas.openxmlformats.org/drawingml/2006/main" xmlns:r="http://schemas.openxmlformats.org/officeDocument/2006/relationships" xmlns:p="http://schemas.openxmlformats.org/presentationml/2006/main">
-  <p:cSld>
-    <p:spTree>
-      <p:nvGrpSpPr>
-        <p:cNvPr id="1" name="Shape 313"/>
-        <p:cNvGrpSpPr/>
-        <p:nvPr/>
-      </p:nvGrpSpPr>
-      <p:grpSpPr>
-        <a:xfrm>
-          <a:off x="0" y="0"/>
-          <a:ext cx="0" cy="0"/>
-          <a:chOff x="0" y="0"/>
-          <a:chExt cx="0" cy="0"/>
-        </a:xfrm>
-      </p:grpSpPr>
-      <p:sp>
-        <p:nvSpPr>
-          <p:cNvPr id="314" name="Google Shape;314;p73"/>
-          <p:cNvSpPr txBox="1"/>
-          <p:nvPr/>
-        </p:nvSpPr>
-        <p:spPr>
-          <a:xfrm>
-            <a:off x="457200" y="504825"/>
-            <a:ext cx="6858000" cy="7983600"/>
-          </a:xfrm>
-          <a:prstGeom prst="rect">
-            <a:avLst/>
-          </a:prstGeom>
-          <a:noFill/>
-          <a:ln>
-            <a:noFill/>
-          </a:ln>
-        </p:spPr>
-        <p:txBody>
-          <a:bodyPr spcFirstLastPara="1" wrap="square" lIns="91425" tIns="91425" rIns="91425" bIns="91425" anchor="t" anchorCtr="0">
-            <a:noAutofit/>
-          </a:bodyPr>
-          <a:lstStyle/>
-          <a:p>
-            <a:pPr marL="457200" lvl="0" indent="-342900" algn="l" rtl="0">
-              <a:lnSpc>
-                <a:spcPct val="115000"/>
-              </a:lnSpc>
-              <a:spcBef>
-                <a:spcPts val="0"/>
-              </a:spcBef>
-              <a:spcAft>
-                <a:spcPts val="0"/>
-              </a:spcAft>
-              <a:buClr>
-                <a:srgbClr val="2E3D49"/>
-              </a:buClr>
-              <a:buSzPts val="1800"/>
-              <a:buFont typeface="Open Sans"/>
-              <a:buAutoNum type="arabicPeriod"/>
-            </a:pPr>
-            <a:r>
-              <a:rPr lang="en" sz="1600">
-                <a:solidFill>
-                  <a:srgbClr val="525C65"/>
-                </a:solidFill>
-                <a:highlight>
-                  <a:srgbClr val="FFFFFF"/>
-                </a:highlight>
-                <a:latin typeface="Open Sans"/>
-                <a:ea typeface="Open Sans"/>
-                <a:cs typeface="Open Sans"/>
-                <a:sym typeface="Open Sans"/>
-              </a:rPr>
-              <a:t>Create a Business Glossary for SneakerPark and define common terms such as Item, Buyer, etc. Think and discuss how SneakerPark can improve on the consistency of the terms that its systems currently use. (You can use the “Business Glossary” tab of the same Sheets template you’ve been using for the other parts of this project to get you started.)</a:t>
-            </a:r>
-            <a:endParaRPr sz="1600">
-              <a:solidFill>
-                <a:srgbClr val="525C65"/>
-              </a:solidFill>
-              <a:highlight>
-                <a:srgbClr val="FFFFFF"/>
-              </a:highlight>
-              <a:latin typeface="Open Sans"/>
-              <a:ea typeface="Open Sans"/>
-              <a:cs typeface="Open Sans"/>
-              <a:sym typeface="Open Sans"/>
-            </a:endParaRPr>
-          </a:p>
-          <a:p>
-            <a:pPr marL="457200" lvl="0" indent="0" algn="l" rtl="0">
-              <a:lnSpc>
-                <a:spcPct val="115000"/>
-              </a:lnSpc>
-              <a:spcBef>
-                <a:spcPts val="0"/>
-              </a:spcBef>
-              <a:spcAft>
-                <a:spcPts val="0"/>
-              </a:spcAft>
-              <a:buNone/>
-            </a:pPr>
-            <a:endParaRPr sz="1600">
-              <a:solidFill>
-                <a:srgbClr val="525C65"/>
-              </a:solidFill>
-              <a:highlight>
-                <a:srgbClr val="FFFFFF"/>
-              </a:highlight>
-              <a:latin typeface="Open Sans"/>
-              <a:ea typeface="Open Sans"/>
-              <a:cs typeface="Open Sans"/>
-              <a:sym typeface="Open Sans"/>
-            </a:endParaRPr>
-          </a:p>
-          <a:p>
-            <a:pPr marL="457200" lvl="0" indent="-342900" algn="l" rtl="0">
-              <a:lnSpc>
-                <a:spcPct val="115000"/>
-              </a:lnSpc>
-              <a:spcBef>
-                <a:spcPts val="0"/>
-              </a:spcBef>
-              <a:spcAft>
-                <a:spcPts val="0"/>
-              </a:spcAft>
-              <a:buClr>
-                <a:srgbClr val="2E3D49"/>
-              </a:buClr>
-              <a:buSzPts val="1800"/>
-              <a:buFont typeface="Open Sans"/>
-              <a:buAutoNum type="arabicPeriod"/>
-            </a:pPr>
-            <a:r>
-              <a:rPr lang="en" sz="1600">
-                <a:solidFill>
-                  <a:srgbClr val="525C65"/>
-                </a:solidFill>
-                <a:highlight>
-                  <a:srgbClr val="FFFFFF"/>
-                </a:highlight>
-                <a:latin typeface="Open Sans"/>
-                <a:ea typeface="Open Sans"/>
-                <a:cs typeface="Open Sans"/>
-                <a:sym typeface="Open Sans"/>
-              </a:rPr>
-              <a:t>Document SneakerPark’s current naming conventions. Can you think of any improvements?  (You can use the “Standard Naming Conventions” tab of the same Sheets template you’ve been using for the other parts of this project to get you started.) Some examples of Naming Conventions include;</a:t>
-            </a:r>
-            <a:endParaRPr sz="1600">
-              <a:solidFill>
-                <a:srgbClr val="525C65"/>
-              </a:solidFill>
-              <a:highlight>
-                <a:srgbClr val="FFFFFF"/>
-              </a:highlight>
-              <a:latin typeface="Open Sans"/>
-              <a:ea typeface="Open Sans"/>
-              <a:cs typeface="Open Sans"/>
-              <a:sym typeface="Open Sans"/>
-            </a:endParaRPr>
-          </a:p>
-          <a:p>
-            <a:pPr marL="457200" lvl="0" indent="0" algn="l" rtl="0">
-              <a:lnSpc>
-                <a:spcPct val="115000"/>
-              </a:lnSpc>
-              <a:spcBef>
-                <a:spcPts val="0"/>
-              </a:spcBef>
-              <a:spcAft>
-                <a:spcPts val="0"/>
-              </a:spcAft>
-              <a:buNone/>
-            </a:pPr>
-            <a:endParaRPr sz="1600">
-              <a:solidFill>
-                <a:srgbClr val="525C65"/>
-              </a:solidFill>
-              <a:highlight>
-                <a:srgbClr val="FFFFFF"/>
-              </a:highlight>
-              <a:latin typeface="Open Sans"/>
-              <a:ea typeface="Open Sans"/>
-              <a:cs typeface="Open Sans"/>
-              <a:sym typeface="Open Sans"/>
-            </a:endParaRPr>
-          </a:p>
-          <a:p>
-            <a:pPr marL="914400" lvl="0" indent="-330200" algn="l" rtl="0">
-              <a:lnSpc>
-                <a:spcPct val="115000"/>
-              </a:lnSpc>
-              <a:spcBef>
-                <a:spcPts val="0"/>
-              </a:spcBef>
-              <a:spcAft>
-                <a:spcPts val="0"/>
-              </a:spcAft>
-              <a:buClr>
-                <a:srgbClr val="525C65"/>
-              </a:buClr>
-              <a:buSzPts val="1600"/>
-              <a:buFont typeface="Open Sans"/>
-              <a:buChar char="●"/>
-            </a:pPr>
-            <a:r>
-              <a:rPr lang="en" sz="1600">
-                <a:solidFill>
-                  <a:srgbClr val="525C65"/>
-                </a:solidFill>
-                <a:highlight>
-                  <a:srgbClr val="FFFFFF"/>
-                </a:highlight>
-                <a:latin typeface="Open Sans"/>
-                <a:ea typeface="Open Sans"/>
-                <a:cs typeface="Open Sans"/>
-                <a:sym typeface="Open Sans"/>
-              </a:rPr>
-              <a:t>Do not use spaces or special characters.</a:t>
-            </a:r>
-            <a:endParaRPr sz="1600">
-              <a:solidFill>
-                <a:srgbClr val="525C65"/>
-              </a:solidFill>
-              <a:highlight>
-                <a:srgbClr val="FFFFFF"/>
-              </a:highlight>
-              <a:latin typeface="Open Sans"/>
-              <a:ea typeface="Open Sans"/>
-              <a:cs typeface="Open Sans"/>
-              <a:sym typeface="Open Sans"/>
-            </a:endParaRPr>
-          </a:p>
-          <a:p>
-            <a:pPr marL="914400" lvl="0" indent="-330200" algn="l" rtl="0">
-              <a:lnSpc>
-                <a:spcPct val="115000"/>
-              </a:lnSpc>
-              <a:spcBef>
-                <a:spcPts val="0"/>
-              </a:spcBef>
-              <a:spcAft>
-                <a:spcPts val="0"/>
-              </a:spcAft>
-              <a:buClr>
-                <a:srgbClr val="525C65"/>
-              </a:buClr>
-              <a:buSzPts val="1600"/>
-              <a:buFont typeface="Open Sans"/>
-              <a:buChar char="●"/>
-            </a:pPr>
-            <a:r>
-              <a:rPr lang="en" sz="1600">
-                <a:solidFill>
-                  <a:srgbClr val="525C65"/>
-                </a:solidFill>
-                <a:highlight>
-                  <a:srgbClr val="FFFFFF"/>
-                </a:highlight>
-                <a:latin typeface="Open Sans"/>
-                <a:ea typeface="Open Sans"/>
-                <a:cs typeface="Open Sans"/>
-                <a:sym typeface="Open Sans"/>
-              </a:rPr>
-              <a:t>Use only LOWERCASE.</a:t>
-            </a:r>
-            <a:endParaRPr sz="1600">
-              <a:solidFill>
-                <a:srgbClr val="525C65"/>
-              </a:solidFill>
-              <a:highlight>
-                <a:srgbClr val="FFFFFF"/>
-              </a:highlight>
-              <a:latin typeface="Open Sans"/>
-              <a:ea typeface="Open Sans"/>
-              <a:cs typeface="Open Sans"/>
-              <a:sym typeface="Open Sans"/>
-            </a:endParaRPr>
-          </a:p>
-          <a:p>
-            <a:pPr marL="914400" lvl="0" indent="-330200" algn="l" rtl="0">
-              <a:lnSpc>
-                <a:spcPct val="115000"/>
-              </a:lnSpc>
-              <a:spcBef>
-                <a:spcPts val="0"/>
-              </a:spcBef>
-              <a:spcAft>
-                <a:spcPts val="0"/>
-              </a:spcAft>
-              <a:buClr>
-                <a:srgbClr val="525C65"/>
-              </a:buClr>
-              <a:buSzPts val="1600"/>
-              <a:buFont typeface="Open Sans"/>
-              <a:buChar char="●"/>
-            </a:pPr>
-            <a:r>
-              <a:rPr lang="en" sz="1600">
-                <a:solidFill>
-                  <a:srgbClr val="525C65"/>
-                </a:solidFill>
-                <a:highlight>
-                  <a:srgbClr val="FFFFFF"/>
-                </a:highlight>
-                <a:latin typeface="Open Sans"/>
-                <a:ea typeface="Open Sans"/>
-                <a:cs typeface="Open Sans"/>
-                <a:sym typeface="Open Sans"/>
-              </a:rPr>
-              <a:t>All identifier fields should end in “_id”.</a:t>
-            </a:r>
-            <a:endParaRPr sz="1600">
-              <a:solidFill>
-                <a:srgbClr val="525C65"/>
-              </a:solidFill>
-              <a:highlight>
-                <a:srgbClr val="FFFFFF"/>
-              </a:highlight>
-              <a:latin typeface="Open Sans"/>
-              <a:ea typeface="Open Sans"/>
-              <a:cs typeface="Open Sans"/>
-              <a:sym typeface="Open Sans"/>
-            </a:endParaRPr>
-          </a:p>
-          <a:p>
-            <a:pPr marL="914400" lvl="0" indent="-330200" algn="l" rtl="0">
-              <a:lnSpc>
-                <a:spcPct val="115000"/>
-              </a:lnSpc>
-              <a:spcBef>
-                <a:spcPts val="0"/>
-              </a:spcBef>
-              <a:spcAft>
-                <a:spcPts val="0"/>
-              </a:spcAft>
-              <a:buClr>
-                <a:srgbClr val="525C65"/>
-              </a:buClr>
-              <a:buSzPts val="1600"/>
-              <a:buFont typeface="Open Sans"/>
-              <a:buChar char="●"/>
-            </a:pPr>
-            <a:r>
-              <a:rPr lang="en" sz="1600">
-                <a:solidFill>
-                  <a:srgbClr val="525C65"/>
-                </a:solidFill>
-                <a:highlight>
-                  <a:srgbClr val="FFFFFF"/>
-                </a:highlight>
-                <a:latin typeface="Open Sans"/>
-                <a:ea typeface="Open Sans"/>
-                <a:cs typeface="Open Sans"/>
-                <a:sym typeface="Open Sans"/>
-              </a:rPr>
-              <a:t>Avoid acronyms and abbreviations.</a:t>
-            </a:r>
-            <a:endParaRPr sz="1600">
-              <a:solidFill>
-                <a:srgbClr val="525C65"/>
-              </a:solidFill>
-              <a:highlight>
-                <a:srgbClr val="FFFFFF"/>
-              </a:highlight>
-              <a:latin typeface="Open Sans"/>
-              <a:ea typeface="Open Sans"/>
-              <a:cs typeface="Open Sans"/>
-              <a:sym typeface="Open Sans"/>
-            </a:endParaRPr>
-          </a:p>
-          <a:p>
-            <a:pPr marL="457200" lvl="0" indent="0" algn="l" rtl="0">
-              <a:lnSpc>
-                <a:spcPct val="115000"/>
-              </a:lnSpc>
-              <a:spcBef>
-                <a:spcPts val="0"/>
-              </a:spcBef>
-              <a:spcAft>
-                <a:spcPts val="0"/>
-              </a:spcAft>
-              <a:buNone/>
-            </a:pPr>
-            <a:endParaRPr sz="1600">
-              <a:solidFill>
-                <a:srgbClr val="525C65"/>
-              </a:solidFill>
-              <a:highlight>
-                <a:srgbClr val="FFFFFF"/>
-              </a:highlight>
-              <a:latin typeface="Open Sans"/>
-              <a:ea typeface="Open Sans"/>
-              <a:cs typeface="Open Sans"/>
-              <a:sym typeface="Open Sans"/>
-            </a:endParaRPr>
-          </a:p>
-          <a:p>
-            <a:pPr marL="457200" lvl="0" indent="-342900" algn="l" rtl="0">
-              <a:lnSpc>
-                <a:spcPct val="115000"/>
-              </a:lnSpc>
-              <a:spcBef>
-                <a:spcPts val="0"/>
-              </a:spcBef>
-              <a:spcAft>
-                <a:spcPts val="0"/>
-              </a:spcAft>
-              <a:buClr>
-                <a:srgbClr val="2E3D49"/>
-              </a:buClr>
-              <a:buSzPts val="1800"/>
-              <a:buFont typeface="Open Sans"/>
-              <a:buAutoNum type="arabicPeriod"/>
-            </a:pPr>
-            <a:r>
-              <a:rPr lang="en" sz="1600">
-                <a:solidFill>
-                  <a:srgbClr val="525C65"/>
-                </a:solidFill>
-                <a:highlight>
-                  <a:srgbClr val="FFFFFF"/>
-                </a:highlight>
-                <a:latin typeface="Open Sans"/>
-                <a:ea typeface="Open Sans"/>
-                <a:cs typeface="Open Sans"/>
-                <a:sym typeface="Open Sans"/>
-              </a:rPr>
-              <a:t>Write SQL scripts for the matching rules that you’ve created in Step 6. </a:t>
-            </a:r>
-            <a:endParaRPr sz="1800">
-              <a:solidFill>
-                <a:srgbClr val="2E3D49"/>
-              </a:solidFill>
-              <a:latin typeface="Open Sans"/>
-              <a:ea typeface="Open Sans"/>
-              <a:cs typeface="Open Sans"/>
-              <a:sym typeface="Open Sans"/>
-            </a:endParaRPr>
-          </a:p>
-        </p:txBody>
-      </p:sp>
-    </p:spTree>
-  </p:cSld>
-  <p:clrMapOvr>
-    <a:masterClrMapping/>
-  </p:clrMapOvr>
-</p:sld>
-</file>
-
-<file path=ppt/slides/slide3.xml><?xml version="1.0" encoding="utf-8"?>
-<p:sld xmlns:a="http://schemas.openxmlformats.org/drawingml/2006/main" xmlns:r="http://schemas.openxmlformats.org/officeDocument/2006/relationships" xmlns:p="http://schemas.openxmlformats.org/presentationml/2006/main">
-  <p:cSld>
-    <p:spTree>
-      <p:nvGrpSpPr>
-        <p:cNvPr id="1" name="Shape 192"/>
-        <p:cNvGrpSpPr/>
-        <p:nvPr/>
-      </p:nvGrpSpPr>
-      <p:grpSpPr>
-        <a:xfrm>
-          <a:off x="0" y="0"/>
-          <a:ext cx="0" cy="0"/>
-          <a:chOff x="0" y="0"/>
-          <a:chExt cx="0" cy="0"/>
-        </a:xfrm>
-      </p:grpSpPr>
-      <p:sp>
-        <p:nvSpPr>
-          <p:cNvPr id="193" name="Google Shape;193;p53"/>
-          <p:cNvSpPr txBox="1"/>
-          <p:nvPr/>
-        </p:nvSpPr>
-        <p:spPr>
-          <a:xfrm>
-            <a:off x="329725" y="742950"/>
-            <a:ext cx="6135900" cy="895200"/>
-          </a:xfrm>
-          <a:prstGeom prst="rect">
-            <a:avLst/>
-          </a:prstGeom>
-          <a:noFill/>
-          <a:ln>
-            <a:noFill/>
-          </a:ln>
-        </p:spPr>
-        <p:txBody>
-          <a:bodyPr spcFirstLastPara="1" wrap="square" lIns="91425" tIns="91425" rIns="91425" bIns="91425" anchor="ctr" anchorCtr="0">
-            <a:noAutofit/>
-          </a:bodyPr>
-          <a:lstStyle/>
-          <a:p>
-            <a:pPr marL="0" marR="0" lvl="0" indent="0" algn="l" rtl="0">
-              <a:lnSpc>
-                <a:spcPct val="100000"/>
-              </a:lnSpc>
-              <a:spcBef>
-                <a:spcPts val="0"/>
-              </a:spcBef>
-              <a:spcAft>
-                <a:spcPts val="0"/>
-              </a:spcAft>
-              <a:buNone/>
-            </a:pPr>
-            <a:r>
-              <a:rPr lang="en" sz="4000">
-                <a:solidFill>
-                  <a:srgbClr val="2E3D49"/>
-                </a:solidFill>
-                <a:latin typeface="Open Sans"/>
-                <a:ea typeface="Open Sans"/>
-                <a:cs typeface="Open Sans"/>
-                <a:sym typeface="Open Sans"/>
-              </a:rPr>
-              <a:t>What we provide:</a:t>
-            </a:r>
-            <a:endParaRPr sz="4000">
-              <a:solidFill>
-                <a:srgbClr val="2E3D49"/>
-              </a:solidFill>
-              <a:latin typeface="Open Sans"/>
-              <a:ea typeface="Open Sans"/>
-              <a:cs typeface="Open Sans"/>
-              <a:sym typeface="Open Sans"/>
-            </a:endParaRPr>
-          </a:p>
-        </p:txBody>
-      </p:sp>
-      <p:sp>
-        <p:nvSpPr>
-          <p:cNvPr id="194" name="Google Shape;194;p53"/>
-          <p:cNvSpPr txBox="1"/>
-          <p:nvPr/>
-        </p:nvSpPr>
-        <p:spPr>
-          <a:xfrm>
-            <a:off x="1028425" y="7749175"/>
-            <a:ext cx="5652900" cy="1119900"/>
-          </a:xfrm>
-          <a:prstGeom prst="rect">
-            <a:avLst/>
-          </a:prstGeom>
-          <a:noFill/>
-          <a:ln>
-            <a:noFill/>
-          </a:ln>
-        </p:spPr>
-        <p:txBody>
-          <a:bodyPr spcFirstLastPara="1" wrap="square" lIns="91425" tIns="91425" rIns="91425" bIns="91425" anchor="t" anchorCtr="0">
-            <a:noAutofit/>
-          </a:bodyPr>
-          <a:lstStyle/>
-          <a:p>
-            <a:pPr marL="0" lvl="0" indent="0" algn="ctr" rtl="0">
-              <a:spcBef>
-                <a:spcPts val="0"/>
-              </a:spcBef>
-              <a:spcAft>
-                <a:spcPts val="0"/>
-              </a:spcAft>
-              <a:buNone/>
-            </a:pPr>
-            <a:r>
-              <a:rPr lang="en" sz="4500">
-                <a:solidFill>
-                  <a:srgbClr val="FFFFFF"/>
-                </a:solidFill>
-                <a:latin typeface="Open Sans"/>
-                <a:ea typeface="Open Sans"/>
-                <a:cs typeface="Open Sans"/>
-                <a:sym typeface="Open Sans"/>
-              </a:rPr>
-              <a:t>Remove this slide</a:t>
-            </a:r>
-            <a:endParaRPr sz="4500">
-              <a:solidFill>
-                <a:srgbClr val="FFFFFF"/>
-              </a:solidFill>
-              <a:latin typeface="Open Sans"/>
-              <a:ea typeface="Open Sans"/>
-              <a:cs typeface="Open Sans"/>
-              <a:sym typeface="Open Sans"/>
-            </a:endParaRPr>
-          </a:p>
-        </p:txBody>
-      </p:sp>
-      <p:pic>
-        <p:nvPicPr>
-          <p:cNvPr id="195" name="Google Shape;195;p53"/>
-          <p:cNvPicPr preferRelativeResize="0"/>
-          <p:nvPr/>
-        </p:nvPicPr>
-        <p:blipFill rotWithShape="1">
-          <a:blip r:embed="rId3">
-            <a:alphaModFix/>
-          </a:blip>
-          <a:srcRect l="18074" t="20989" r="14486" b="11825"/>
-          <a:stretch/>
-        </p:blipFill>
-        <p:spPr>
-          <a:xfrm>
-            <a:off x="374375" y="7823200"/>
-            <a:ext cx="7023750" cy="1749275"/>
-          </a:xfrm>
-          <a:prstGeom prst="rect">
-            <a:avLst/>
-          </a:prstGeom>
-          <a:noFill/>
-          <a:ln>
-            <a:noFill/>
-          </a:ln>
-        </p:spPr>
-      </p:pic>
-      <p:sp>
-        <p:nvSpPr>
-          <p:cNvPr id="196" name="Google Shape;196;p53"/>
-          <p:cNvSpPr txBox="1">
-            <a:spLocks noGrp="1"/>
-          </p:cNvSpPr>
-          <p:nvPr>
-            <p:ph type="title"/>
-          </p:nvPr>
-        </p:nvSpPr>
-        <p:spPr>
-          <a:xfrm>
-            <a:off x="322950" y="5293650"/>
-            <a:ext cx="7242600" cy="1119900"/>
-          </a:xfrm>
-          <a:prstGeom prst="rect">
-            <a:avLst/>
-          </a:prstGeom>
-        </p:spPr>
-        <p:txBody>
-          <a:bodyPr spcFirstLastPara="1" wrap="square" lIns="91425" tIns="91425" rIns="91425" bIns="91425" anchor="ctr" anchorCtr="0">
-            <a:noAutofit/>
-          </a:bodyPr>
-          <a:lstStyle/>
-          <a:p>
-            <a:pPr marL="0" lvl="0" indent="0" algn="l" rtl="0">
-              <a:spcBef>
-                <a:spcPts val="0"/>
-              </a:spcBef>
-              <a:spcAft>
-                <a:spcPts val="0"/>
-              </a:spcAft>
-              <a:buNone/>
-            </a:pPr>
-            <a:r>
-              <a:rPr lang="en"/>
-              <a:t>What you are required to submit:</a:t>
-            </a:r>
-            <a:endParaRPr/>
-          </a:p>
-        </p:txBody>
-      </p:sp>
-      <p:sp>
-        <p:nvSpPr>
-          <p:cNvPr id="197" name="Google Shape;197;p53"/>
-          <p:cNvSpPr txBox="1">
-            <a:spLocks noGrp="1"/>
-          </p:cNvSpPr>
-          <p:nvPr>
-            <p:ph type="body" idx="1"/>
-          </p:nvPr>
-        </p:nvSpPr>
-        <p:spPr>
-          <a:xfrm>
-            <a:off x="233575" y="6710816"/>
-            <a:ext cx="7242600" cy="1119900"/>
-          </a:xfrm>
-          <a:prstGeom prst="rect">
-            <a:avLst/>
-          </a:prstGeom>
-        </p:spPr>
-        <p:txBody>
-          <a:bodyPr spcFirstLastPara="1" wrap="square" lIns="91425" tIns="91425" rIns="91425" bIns="91425" anchor="t" anchorCtr="0">
-            <a:noAutofit/>
-          </a:bodyPr>
-          <a:lstStyle/>
-          <a:p>
-            <a:pPr marL="457200" marR="0" lvl="0" indent="-355600" algn="l" rtl="0">
-              <a:lnSpc>
-                <a:spcPct val="115000"/>
-              </a:lnSpc>
-              <a:spcBef>
-                <a:spcPts val="0"/>
-              </a:spcBef>
-              <a:spcAft>
-                <a:spcPts val="0"/>
-              </a:spcAft>
-              <a:buSzPts val="2000"/>
-              <a:buFont typeface="Open Sans"/>
-              <a:buChar char="●"/>
-            </a:pPr>
-            <a:r>
-              <a:rPr lang="en" sz="2200"/>
-              <a:t>Filled out Slides template.</a:t>
-            </a:r>
-            <a:endParaRPr sz="2200"/>
-          </a:p>
-          <a:p>
-            <a:pPr marL="457200" marR="0" lvl="0" indent="-355600" algn="l" rtl="0">
-              <a:lnSpc>
-                <a:spcPct val="115000"/>
-              </a:lnSpc>
-              <a:spcBef>
-                <a:spcPts val="0"/>
-              </a:spcBef>
-              <a:spcAft>
-                <a:spcPts val="0"/>
-              </a:spcAft>
-              <a:buSzPts val="2000"/>
-              <a:buFont typeface="Open Sans"/>
-              <a:buChar char="●"/>
-            </a:pPr>
-            <a:r>
-              <a:rPr lang="en" sz="2200"/>
-              <a:t>Filled out Sheets template.</a:t>
-            </a:r>
-            <a:endParaRPr sz="2200"/>
-          </a:p>
-        </p:txBody>
-      </p:sp>
-      <p:sp>
-        <p:nvSpPr>
-          <p:cNvPr id="198" name="Google Shape;198;p53"/>
-          <p:cNvSpPr txBox="1">
-            <a:spLocks noGrp="1"/>
-          </p:cNvSpPr>
-          <p:nvPr>
-            <p:ph type="body" idx="1"/>
-          </p:nvPr>
-        </p:nvSpPr>
-        <p:spPr>
-          <a:xfrm>
-            <a:off x="264950" y="1638151"/>
-            <a:ext cx="7242600" cy="2091300"/>
-          </a:xfrm>
-          <a:prstGeom prst="rect">
-            <a:avLst/>
-          </a:prstGeom>
-        </p:spPr>
-        <p:txBody>
-          <a:bodyPr spcFirstLastPara="1" wrap="square" lIns="91425" tIns="91425" rIns="91425" bIns="91425" anchor="t" anchorCtr="0">
-            <a:noAutofit/>
-          </a:bodyPr>
-          <a:lstStyle/>
-          <a:p>
-            <a:pPr marL="457200" lvl="0" indent="-355600" algn="l" rtl="0">
-              <a:spcBef>
-                <a:spcPts val="0"/>
-              </a:spcBef>
-              <a:spcAft>
-                <a:spcPts val="0"/>
-              </a:spcAft>
-              <a:buSzPts val="2000"/>
-              <a:buChar char="●"/>
-            </a:pPr>
-            <a:r>
-              <a:rPr lang="en" sz="2200"/>
-              <a:t>This Starter Slides Template</a:t>
-            </a:r>
-            <a:endParaRPr sz="2200"/>
-          </a:p>
-          <a:p>
-            <a:pPr marL="457200" lvl="0" indent="-355600" algn="l" rtl="0">
-              <a:spcBef>
-                <a:spcPts val="0"/>
-              </a:spcBef>
-              <a:spcAft>
-                <a:spcPts val="0"/>
-              </a:spcAft>
-              <a:buSzPts val="2000"/>
-              <a:buFont typeface="Open Sans"/>
-              <a:buChar char="●"/>
-            </a:pPr>
-            <a:r>
-              <a:rPr lang="en" sz="2200"/>
-              <a:t>Sheets Template with 4 Tabs - Data Dictionary, Data Quality Issues, Standard Naming Convention, and Business Glossary</a:t>
-            </a:r>
-            <a:endParaRPr sz="2200"/>
-          </a:p>
-          <a:p>
-            <a:pPr marL="457200" lvl="0" indent="-355600" algn="l" rtl="0">
-              <a:spcBef>
-                <a:spcPts val="0"/>
-              </a:spcBef>
-              <a:spcAft>
-                <a:spcPts val="0"/>
-              </a:spcAft>
-              <a:buSzPts val="2000"/>
-              <a:buFont typeface="Open Sans"/>
-              <a:buChar char="●"/>
-            </a:pPr>
-            <a:r>
-              <a:rPr lang="en" sz="2200"/>
-              <a:t>Workspace with an instance of Postgres and code that will create and populate the database you will be working with.</a:t>
-            </a:r>
-            <a:endParaRPr sz="2200"/>
-          </a:p>
-          <a:p>
-            <a:pPr marL="457200" lvl="0" indent="-355600" algn="l" rtl="0">
-              <a:spcBef>
-                <a:spcPts val="0"/>
-              </a:spcBef>
-              <a:spcAft>
-                <a:spcPts val="0"/>
-              </a:spcAft>
-              <a:buSzPts val="2000"/>
-              <a:buFont typeface="Open Sans"/>
-              <a:buChar char="●"/>
-            </a:pPr>
-            <a:r>
-              <a:rPr lang="en" sz="2200"/>
-              <a:t>Grading rubric you can use to ensure you have submitted everything that is required. </a:t>
-            </a:r>
-            <a:endParaRPr sz="2200"/>
-          </a:p>
-          <a:p>
-            <a:pPr marL="0" marR="0" lvl="0" indent="0" algn="l" rtl="0">
-              <a:lnSpc>
-                <a:spcPct val="100000"/>
-              </a:lnSpc>
-              <a:spcBef>
-                <a:spcPts val="1600"/>
-              </a:spcBef>
-              <a:spcAft>
-                <a:spcPts val="0"/>
-              </a:spcAft>
-              <a:buNone/>
-            </a:pPr>
-            <a:endParaRPr sz="4000">
-              <a:solidFill>
-                <a:srgbClr val="2E3D49"/>
-              </a:solidFill>
-              <a:latin typeface="Open Sans"/>
-              <a:ea typeface="Open Sans"/>
-              <a:cs typeface="Open Sans"/>
-              <a:sym typeface="Open Sans"/>
-            </a:endParaRPr>
-          </a:p>
-        </p:txBody>
-      </p:sp>
-    </p:spTree>
-  </p:cSld>
-  <p:clrMapOvr>
-    <a:masterClrMapping/>
-  </p:clrMapOvr>
-</p:sld>
-</file>
-
-<file path=ppt/slides/slide4.xml><?xml version="1.0" encoding="utf-8"?>
+<file path=ppt/slides/slide2.xml><?xml version="1.0" encoding="utf-8"?>
 <p:sld xmlns:a="http://schemas.openxmlformats.org/drawingml/2006/main" xmlns:r="http://schemas.openxmlformats.org/officeDocument/2006/relationships" xmlns:p="http://schemas.openxmlformats.org/presentationml/2006/main">
   <p:cSld>
     <p:spTree>
@@ -31441,7 +30644,7 @@
               <a:buChar char="●"/>
             </a:pPr>
             <a:r>
-              <a:rPr lang="en" sz="1700" b="1">
+              <a:rPr lang="en" sz="1700" b="1" dirty="0">
                 <a:solidFill>
                   <a:srgbClr val="525C65"/>
                 </a:solidFill>
@@ -31456,7 +30659,7 @@
               <a:t>SneakerPark</a:t>
             </a:r>
             <a:r>
-              <a:rPr lang="en" sz="1700">
+              <a:rPr lang="en" sz="1700" dirty="0">
                 <a:solidFill>
                   <a:srgbClr val="525C65"/>
                 </a:solidFill>
@@ -31470,7 +30673,7 @@
               </a:rPr>
               <a:t> is an online shoe reseller that allows people to buy and sell used and new shoes. Buyers can bid for shoes or buy them outright, and sellers can set a price or sell to the highest bidder.</a:t>
             </a:r>
-            <a:endParaRPr sz="1700">
+            <a:endParaRPr sz="1700" dirty="0">
               <a:solidFill>
                 <a:srgbClr val="525C65"/>
               </a:solidFill>
@@ -31502,7 +30705,7 @@
               <a:buChar char="●"/>
             </a:pPr>
             <a:r>
-              <a:rPr lang="en" sz="1700">
+              <a:rPr lang="en" sz="1700" dirty="0">
                 <a:solidFill>
                   <a:srgbClr val="525C65"/>
                 </a:solidFill>
@@ -31516,7 +30719,7 @@
               </a:rPr>
               <a:t>Each buyer and seller must have an active account in order to sell, bid, or purchase sneakers using SneakerPark’s website.</a:t>
             </a:r>
-            <a:endParaRPr sz="1700">
+            <a:endParaRPr sz="1700" dirty="0">
               <a:solidFill>
                 <a:srgbClr val="525C65"/>
               </a:solidFill>
@@ -31548,7 +30751,7 @@
               <a:buChar char="●"/>
             </a:pPr>
             <a:r>
-              <a:rPr lang="en" sz="1700">
+              <a:rPr lang="en" sz="1700" dirty="0">
                 <a:solidFill>
                   <a:srgbClr val="525C65"/>
                 </a:solidFill>
@@ -31562,7 +30765,7 @@
               </a:rPr>
               <a:t>SneakerPark authenticates the shoes before shipping them to the buyer, so before listing an item, the seller must ship it to SneakerPark’s warehouse. Upon receipt, SneakerPark assigns an item number to each pair of sneakers and notifies the seller that they are now free to list their item. If the item is not listed within 45 days, SneakerPark returns it to the seller and sends an invoice to the seller for the shipping cost.</a:t>
             </a:r>
-            <a:endParaRPr sz="1700">
+            <a:endParaRPr sz="1700" dirty="0">
               <a:solidFill>
                 <a:srgbClr val="525C65"/>
               </a:solidFill>
@@ -31594,7 +30797,7 @@
               <a:buChar char="●"/>
             </a:pPr>
             <a:r>
-              <a:rPr lang="en" sz="1700">
+              <a:rPr lang="en" sz="1700" dirty="0">
                 <a:solidFill>
                   <a:srgbClr val="525C65"/>
                 </a:solidFill>
@@ -31608,7 +30811,7 @@
               </a:rPr>
               <a:t>If the item is found to be inauthentic or in an unacceptable condition, it is also returned back to the seller in a similar fashion.</a:t>
             </a:r>
-            <a:endParaRPr sz="1700">
+            <a:endParaRPr sz="1700" dirty="0">
               <a:solidFill>
                 <a:srgbClr val="525C65"/>
               </a:solidFill>
@@ -31640,7 +30843,7 @@
               <a:buChar char="●"/>
             </a:pPr>
             <a:r>
-              <a:rPr lang="en" sz="1700">
+              <a:rPr lang="en" sz="1700" dirty="0">
                 <a:solidFill>
                   <a:srgbClr val="525C65"/>
                 </a:solidFill>
@@ -31654,7 +30857,7 @@
               </a:rPr>
               <a:t>When the item sells, the buyer’s account is credited with the purchase price minus the SneakerPark service fee and shipping fees to deliver the item to the buyer.</a:t>
             </a:r>
-            <a:endParaRPr sz="1700">
+            <a:endParaRPr sz="1700" dirty="0">
               <a:solidFill>
                 <a:srgbClr val="525C65"/>
               </a:solidFill>
@@ -31686,7 +30889,7 @@
               <a:buChar char="●"/>
             </a:pPr>
             <a:r>
-              <a:rPr lang="en" sz="1700">
+              <a:rPr lang="en" sz="1700" dirty="0">
                 <a:solidFill>
                   <a:srgbClr val="525C65"/>
                 </a:solidFill>
@@ -31700,7 +30903,7 @@
               </a:rPr>
               <a:t>Currently, SneakerPark only supports sales within the United States.</a:t>
             </a:r>
-            <a:endParaRPr sz="1700">
+            <a:endParaRPr sz="1700" dirty="0">
               <a:solidFill>
                 <a:srgbClr val="525C65"/>
               </a:solidFill>
@@ -31731,7 +30934,7 @@
               <a:buFont typeface="Arial"/>
               <a:buNone/>
             </a:pPr>
-            <a:endParaRPr sz="1700" b="1">
+            <a:endParaRPr sz="1700" b="1" dirty="0">
               <a:solidFill>
                 <a:srgbClr val="2E3D49"/>
               </a:solidFill>
@@ -31754,7 +30957,7 @@
 </p:sld>
 </file>
 
-<file path=ppt/slides/slide5.xml><?xml version="1.0" encoding="utf-8"?>
+<file path=ppt/slides/slide3.xml><?xml version="1.0" encoding="utf-8"?>
 <p:sld xmlns:a="http://schemas.openxmlformats.org/drawingml/2006/main" xmlns:r="http://schemas.openxmlformats.org/officeDocument/2006/relationships" xmlns:p="http://schemas.openxmlformats.org/presentationml/2006/main">
   <p:cSld>
     <p:spTree>
@@ -31921,7 +31124,7 @@
 </p:sld>
 </file>
 
-<file path=ppt/slides/slide6.xml><?xml version="1.0" encoding="utf-8"?>
+<file path=ppt/slides/slide4.xml><?xml version="1.0" encoding="utf-8"?>
 <p:sld xmlns:a="http://schemas.openxmlformats.org/drawingml/2006/main" xmlns:r="http://schemas.openxmlformats.org/officeDocument/2006/relationships" xmlns:p="http://schemas.openxmlformats.org/presentationml/2006/main">
   <p:cSld>
     <p:bg>
@@ -32168,7 +31371,7 @@
 </p:sld>
 </file>
 
-<file path=ppt/slides/slide7.xml><?xml version="1.0" encoding="utf-8"?>
+<file path=ppt/slides/slide5.xml><?xml version="1.0" encoding="utf-8"?>
 <p:sld xmlns:a="http://schemas.openxmlformats.org/drawingml/2006/main" xmlns:r="http://schemas.openxmlformats.org/officeDocument/2006/relationships" xmlns:p="http://schemas.openxmlformats.org/presentationml/2006/main">
   <p:cSld>
     <p:spTree>
@@ -32348,7 +31551,7 @@
 </p:sld>
 </file>
 
-<file path=ppt/slides/slide8.xml><?xml version="1.0" encoding="utf-8"?>
+<file path=ppt/slides/slide6.xml><?xml version="1.0" encoding="utf-8"?>
 <p:sld xmlns:a="http://schemas.openxmlformats.org/drawingml/2006/main" xmlns:r="http://schemas.openxmlformats.org/officeDocument/2006/relationships" xmlns:p="http://schemas.openxmlformats.org/presentationml/2006/main">
   <p:cSld>
     <p:spTree>
@@ -32485,7 +31688,7 @@
 </p:sld>
 </file>
 
-<file path=ppt/slides/slide9.xml><?xml version="1.0" encoding="utf-8"?>
+<file path=ppt/slides/slide7.xml><?xml version="1.0" encoding="utf-8"?>
 <p:sld xmlns:a="http://schemas.openxmlformats.org/drawingml/2006/main" xmlns:r="http://schemas.openxmlformats.org/officeDocument/2006/relationships" xmlns:p="http://schemas.openxmlformats.org/presentationml/2006/main">
   <p:cSld>
     <p:bg>
@@ -32665,6 +31868,355 @@
               <a:ea typeface="Open Sans"/>
               <a:cs typeface="Open Sans"/>
               <a:sym typeface="Open Sans"/>
+            </a:endParaRPr>
+          </a:p>
+        </p:txBody>
+      </p:sp>
+    </p:spTree>
+  </p:cSld>
+  <p:clrMapOvr>
+    <a:masterClrMapping/>
+  </p:clrMapOvr>
+</p:sld>
+</file>
+
+<file path=ppt/slides/slide8.xml><?xml version="1.0" encoding="utf-8"?>
+<p:sld xmlns:a="http://schemas.openxmlformats.org/drawingml/2006/main" xmlns:r="http://schemas.openxmlformats.org/officeDocument/2006/relationships" xmlns:p="http://schemas.openxmlformats.org/presentationml/2006/main">
+  <p:cSld>
+    <p:spTree>
+      <p:nvGrpSpPr>
+        <p:cNvPr id="1" name="Shape 240"/>
+        <p:cNvGrpSpPr/>
+        <p:nvPr/>
+      </p:nvGrpSpPr>
+      <p:grpSpPr>
+        <a:xfrm>
+          <a:off x="0" y="0"/>
+          <a:ext cx="0" cy="0"/>
+          <a:chOff x="0" y="0"/>
+          <a:chExt cx="0" cy="0"/>
+        </a:xfrm>
+      </p:grpSpPr>
+      <p:sp>
+        <p:nvSpPr>
+          <p:cNvPr id="5" name="TextBox 4">
+            <a:extLst>
+              <a:ext uri="{FF2B5EF4-FFF2-40B4-BE49-F238E27FC236}">
+                <a16:creationId xmlns:a16="http://schemas.microsoft.com/office/drawing/2014/main" id="{1C653097-FEC9-05E6-DFA6-D0B3B22F3299}"/>
+              </a:ext>
+            </a:extLst>
+          </p:cNvPr>
+          <p:cNvSpPr txBox="1"/>
+          <p:nvPr/>
+        </p:nvSpPr>
+        <p:spPr>
+          <a:xfrm>
+            <a:off x="373791" y="486774"/>
+            <a:ext cx="7052619" cy="954107"/>
+          </a:xfrm>
+          <a:prstGeom prst="rect">
+            <a:avLst/>
+          </a:prstGeom>
+          <a:noFill/>
+        </p:spPr>
+        <p:txBody>
+          <a:bodyPr wrap="square">
+            <a:spAutoFit/>
+          </a:bodyPr>
+          <a:lstStyle/>
+          <a:p>
+            <a:r>
+              <a:rPr lang="en-GB" dirty="0">
+                <a:latin typeface="Open Sans" panose="020B0606030504020204" pitchFamily="34" charset="0"/>
+                <a:ea typeface="Open Sans" panose="020B0606030504020204" pitchFamily="34" charset="0"/>
+                <a:cs typeface="Open Sans" panose="020B0606030504020204" pitchFamily="34" charset="0"/>
+              </a:rPr>
+              <a:t>The metadata for all source systems was documented in the Data Dictionary and Enterprise Data </a:t>
+            </a:r>
+            <a:r>
+              <a:rPr lang="en-GB" dirty="0" err="1">
+                <a:latin typeface="Open Sans" panose="020B0606030504020204" pitchFamily="34" charset="0"/>
+                <a:ea typeface="Open Sans" panose="020B0606030504020204" pitchFamily="34" charset="0"/>
+                <a:cs typeface="Open Sans" panose="020B0606030504020204" pitchFamily="34" charset="0"/>
+              </a:rPr>
+              <a:t>Catalog</a:t>
+            </a:r>
+            <a:r>
+              <a:rPr lang="en-GB" dirty="0">
+                <a:latin typeface="Open Sans" panose="020B0606030504020204" pitchFamily="34" charset="0"/>
+                <a:ea typeface="Open Sans" panose="020B0606030504020204" pitchFamily="34" charset="0"/>
+                <a:cs typeface="Open Sans" panose="020B0606030504020204" pitchFamily="34" charset="0"/>
+              </a:rPr>
+              <a:t> tabs of the provided spreadsheet template.</a:t>
+            </a:r>
+            <a:br>
+              <a:rPr lang="en-GB" dirty="0">
+                <a:latin typeface="Open Sans" panose="020B0606030504020204" pitchFamily="34" charset="0"/>
+                <a:ea typeface="Open Sans" panose="020B0606030504020204" pitchFamily="34" charset="0"/>
+                <a:cs typeface="Open Sans" panose="020B0606030504020204" pitchFamily="34" charset="0"/>
+              </a:rPr>
+            </a:br>
+            <a:br>
+              <a:rPr lang="en-GB" dirty="0">
+                <a:latin typeface="Open Sans" panose="020B0606030504020204" pitchFamily="34" charset="0"/>
+                <a:ea typeface="Open Sans" panose="020B0606030504020204" pitchFamily="34" charset="0"/>
+                <a:cs typeface="Open Sans" panose="020B0606030504020204" pitchFamily="34" charset="0"/>
+              </a:rPr>
+            </a:br>
+            <a:r>
+              <a:rPr lang="en-GB" b="1" dirty="0">
+                <a:latin typeface="Open Sans" panose="020B0606030504020204" pitchFamily="34" charset="0"/>
+                <a:ea typeface="Open Sans" panose="020B0606030504020204" pitchFamily="34" charset="0"/>
+                <a:cs typeface="Open Sans" panose="020B0606030504020204" pitchFamily="34" charset="0"/>
+              </a:rPr>
+              <a:t>Please refer to the attached Metadata </a:t>
+            </a:r>
+            <a:r>
+              <a:rPr lang="en-GB" b="1" dirty="0" err="1">
+                <a:latin typeface="Open Sans" panose="020B0606030504020204" pitchFamily="34" charset="0"/>
+                <a:ea typeface="Open Sans" panose="020B0606030504020204" pitchFamily="34" charset="0"/>
+                <a:cs typeface="Open Sans" panose="020B0606030504020204" pitchFamily="34" charset="0"/>
+              </a:rPr>
+              <a:t>Catalog</a:t>
+            </a:r>
+            <a:r>
+              <a:rPr lang="en-GB" b="1" dirty="0">
+                <a:latin typeface="Open Sans" panose="020B0606030504020204" pitchFamily="34" charset="0"/>
+                <a:ea typeface="Open Sans" panose="020B0606030504020204" pitchFamily="34" charset="0"/>
+                <a:cs typeface="Open Sans" panose="020B0606030504020204" pitchFamily="34" charset="0"/>
+              </a:rPr>
+              <a:t> spreadsheet for full details.</a:t>
+            </a:r>
+          </a:p>
+        </p:txBody>
+      </p:sp>
+    </p:spTree>
+  </p:cSld>
+  <p:clrMapOvr>
+    <a:masterClrMapping/>
+  </p:clrMapOvr>
+</p:sld>
+</file>
+
+<file path=ppt/slides/slide9.xml><?xml version="1.0" encoding="utf-8"?>
+<p:sld xmlns:a="http://schemas.openxmlformats.org/drawingml/2006/main" xmlns:r="http://schemas.openxmlformats.org/officeDocument/2006/relationships" xmlns:p="http://schemas.openxmlformats.org/presentationml/2006/main">
+  <p:cSld>
+    <p:bg>
+      <p:bgPr>
+        <a:solidFill>
+          <a:srgbClr val="02B4E5"/>
+        </a:solidFill>
+        <a:effectLst/>
+      </p:bgPr>
+    </p:bg>
+    <p:spTree>
+      <p:nvGrpSpPr>
+        <p:cNvPr id="1" name="Shape 245"/>
+        <p:cNvGrpSpPr/>
+        <p:nvPr/>
+      </p:nvGrpSpPr>
+      <p:grpSpPr>
+        <a:xfrm>
+          <a:off x="0" y="0"/>
+          <a:ext cx="0" cy="0"/>
+          <a:chOff x="0" y="0"/>
+          <a:chExt cx="0" cy="0"/>
+        </a:xfrm>
+      </p:grpSpPr>
+      <p:sp>
+        <p:nvSpPr>
+          <p:cNvPr id="246" name="Google Shape;246;p61"/>
+          <p:cNvSpPr/>
+          <p:nvPr/>
+        </p:nvSpPr>
+        <p:spPr>
+          <a:xfrm>
+            <a:off x="1051200" y="4003550"/>
+            <a:ext cx="5670000" cy="2460000"/>
+          </a:xfrm>
+          <a:prstGeom prst="rect">
+            <a:avLst/>
+          </a:prstGeom>
+          <a:noFill/>
+          <a:ln>
+            <a:noFill/>
+          </a:ln>
+        </p:spPr>
+        <p:txBody>
+          <a:bodyPr spcFirstLastPara="1" wrap="square" lIns="26775" tIns="26775" rIns="26775" bIns="26775" anchor="t" anchorCtr="0">
+            <a:noAutofit/>
+          </a:bodyPr>
+          <a:lstStyle/>
+          <a:p>
+            <a:pPr marL="0" marR="0" lvl="0" indent="0" algn="ctr" rtl="0">
+              <a:lnSpc>
+                <a:spcPct val="150000"/>
+              </a:lnSpc>
+              <a:spcBef>
+                <a:spcPts val="0"/>
+              </a:spcBef>
+              <a:spcAft>
+                <a:spcPts val="0"/>
+              </a:spcAft>
+              <a:buClr>
+                <a:srgbClr val="FFFFFF"/>
+              </a:buClr>
+              <a:buFont typeface="Open Sans"/>
+              <a:buNone/>
+            </a:pPr>
+            <a:r>
+              <a:rPr lang="en" sz="3000" b="1">
+                <a:solidFill>
+                  <a:srgbClr val="FFFFFF"/>
+                </a:solidFill>
+                <a:latin typeface="Open Sans"/>
+                <a:ea typeface="Open Sans"/>
+                <a:cs typeface="Open Sans"/>
+                <a:sym typeface="Open Sans"/>
+              </a:rPr>
+              <a:t>Step 3</a:t>
+            </a:r>
+            <a:endParaRPr sz="3000" b="1">
+              <a:solidFill>
+                <a:srgbClr val="FFFFFF"/>
+              </a:solidFill>
+              <a:latin typeface="Open Sans"/>
+              <a:ea typeface="Open Sans"/>
+              <a:cs typeface="Open Sans"/>
+              <a:sym typeface="Open Sans"/>
+            </a:endParaRPr>
+          </a:p>
+          <a:p>
+            <a:pPr marL="0" marR="0" lvl="0" indent="0" algn="ctr" rtl="0">
+              <a:lnSpc>
+                <a:spcPct val="150000"/>
+              </a:lnSpc>
+              <a:spcBef>
+                <a:spcPts val="0"/>
+              </a:spcBef>
+              <a:spcAft>
+                <a:spcPts val="0"/>
+              </a:spcAft>
+              <a:buClr>
+                <a:srgbClr val="FFFFFF"/>
+              </a:buClr>
+              <a:buFont typeface="Open Sans"/>
+              <a:buNone/>
+            </a:pPr>
+            <a:r>
+              <a:rPr lang="en" sz="3000">
+                <a:solidFill>
+                  <a:srgbClr val="FFFFFF"/>
+                </a:solidFill>
+                <a:latin typeface="Open Sans"/>
+                <a:ea typeface="Open Sans"/>
+                <a:cs typeface="Open Sans"/>
+                <a:sym typeface="Open Sans"/>
+              </a:rPr>
+              <a:t>Data Quality</a:t>
+            </a:r>
+            <a:endParaRPr sz="3000">
+              <a:solidFill>
+                <a:srgbClr val="FFFFFF"/>
+              </a:solidFill>
+              <a:latin typeface="Open Sans"/>
+              <a:ea typeface="Open Sans"/>
+              <a:cs typeface="Open Sans"/>
+              <a:sym typeface="Open Sans"/>
+            </a:endParaRPr>
+          </a:p>
+          <a:p>
+            <a:pPr marL="0" marR="0" lvl="0" indent="0" algn="ctr" rtl="0">
+              <a:lnSpc>
+                <a:spcPct val="150000"/>
+              </a:lnSpc>
+              <a:spcBef>
+                <a:spcPts val="0"/>
+              </a:spcBef>
+              <a:spcAft>
+                <a:spcPts val="0"/>
+              </a:spcAft>
+              <a:buClr>
+                <a:srgbClr val="FFFFFF"/>
+              </a:buClr>
+              <a:buFont typeface="Open Sans"/>
+              <a:buNone/>
+            </a:pPr>
+            <a:r>
+              <a:rPr lang="en" sz="3000">
+                <a:solidFill>
+                  <a:srgbClr val="FFFFFF"/>
+                </a:solidFill>
+                <a:latin typeface="Open Sans"/>
+                <a:ea typeface="Open Sans"/>
+                <a:cs typeface="Open Sans"/>
+                <a:sym typeface="Open Sans"/>
+              </a:rPr>
+              <a:t>Part 1: Profiling and Cleansing</a:t>
+            </a:r>
+            <a:endParaRPr sz="3000">
+              <a:solidFill>
+                <a:srgbClr val="FFFFFF"/>
+              </a:solidFill>
+              <a:latin typeface="Open Sans"/>
+              <a:ea typeface="Open Sans"/>
+              <a:cs typeface="Open Sans"/>
+              <a:sym typeface="Open Sans"/>
+            </a:endParaRPr>
+          </a:p>
+        </p:txBody>
+      </p:sp>
+      <p:sp>
+        <p:nvSpPr>
+          <p:cNvPr id="247" name="Google Shape;247;p61"/>
+          <p:cNvSpPr/>
+          <p:nvPr/>
+        </p:nvSpPr>
+        <p:spPr>
+          <a:xfrm>
+            <a:off x="3582591" y="3663029"/>
+            <a:ext cx="607200" cy="74400"/>
+          </a:xfrm>
+          <a:prstGeom prst="rect">
+            <a:avLst/>
+          </a:prstGeom>
+          <a:solidFill>
+            <a:schemeClr val="lt1"/>
+          </a:solidFill>
+          <a:ln>
+            <a:noFill/>
+          </a:ln>
+        </p:spPr>
+        <p:txBody>
+          <a:bodyPr spcFirstLastPara="1" wrap="square" lIns="26775" tIns="26775" rIns="26775" bIns="26775" anchor="ctr" anchorCtr="0">
+            <a:noAutofit/>
+          </a:bodyPr>
+          <a:lstStyle/>
+          <a:p>
+            <a:pPr marL="0" marR="0" lvl="0" indent="0" algn="ctr" rtl="0">
+              <a:lnSpc>
+                <a:spcPct val="100000"/>
+              </a:lnSpc>
+              <a:spcBef>
+                <a:spcPts val="0"/>
+              </a:spcBef>
+              <a:spcAft>
+                <a:spcPts val="0"/>
+              </a:spcAft>
+              <a:buClr>
+                <a:srgbClr val="FFFFFF"/>
+              </a:buClr>
+              <a:buFont typeface="Helvetica Neue"/>
+              <a:buNone/>
+            </a:pPr>
+            <a:endParaRPr sz="1200" b="0" i="0" u="none" strike="noStrike" cap="none">
+              <a:solidFill>
+                <a:srgbClr val="02B4E5"/>
+              </a:solidFill>
+              <a:latin typeface="Helvetica Neue"/>
+              <a:ea typeface="Helvetica Neue"/>
+              <a:cs typeface="Helvetica Neue"/>
+              <a:sym typeface="Helvetica Neue"/>
             </a:endParaRPr>
           </a:p>
         </p:txBody>
